--- a/deck/KESSLER-SIH-PS04.pptx
+++ b/deck/KESSLER-SIH-PS04.pptx
@@ -2555,7 +2555,7 @@
                 <a:ea typeface="Calibri" pitchFamily="34" charset="-122"/>
                 <a:cs typeface="Calibri" pitchFamily="34" charset="-120"/>
               </a:rPr>
-              <a:t>Real element sets · real SGP4 · real times of closest approach. Every capability in the interface declares its own build status, so nothing unfinished can appear as working.</a:t>
+              <a:t>Real element sets · real SGP4 · real times of closest approach. Every capability in the interface declares its own build status, so nothing unfinished can appear as working. Open source under the MIT licence.</a:t>
             </a:r>
             <a:endParaRPr lang="en-US" sz="1050" dirty="0"/>
           </a:p>
@@ -2963,7 +2963,7 @@
         </p:nvSpPr>
         <p:spPr>
           <a:xfrm>
-            <a:off x="310896" y="896112"/>
+            <a:off x="310896" y="859536"/>
             <a:ext cx="292608" cy="292608"/>
           </a:xfrm>
           <a:prstGeom prst="rect">
@@ -3002,7 +3002,7 @@
         </p:nvSpPr>
         <p:spPr>
           <a:xfrm>
-            <a:off x="621792" y="896112"/>
+            <a:off x="621792" y="859536"/>
             <a:ext cx="9692640" cy="292608"/>
           </a:xfrm>
           <a:prstGeom prst="rect">
@@ -3041,12 +3041,12 @@
         </p:nvSpPr>
         <p:spPr>
           <a:xfrm>
-            <a:off x="310896" y="1316736"/>
-            <a:ext cx="4041648" cy="1243584"/>
+            <a:off x="310896" y="1225296"/>
+            <a:ext cx="4041648" cy="932688"/>
           </a:xfrm>
           <a:prstGeom prst="roundRect">
             <a:avLst>
-              <a:gd name="adj" fmla="val 2206"/>
+              <a:gd name="adj" fmla="val 2941"/>
             </a:avLst>
           </a:prstGeom>
           <a:solidFill>
@@ -3068,7 +3068,7 @@
         </p:nvSpPr>
         <p:spPr>
           <a:xfrm>
-            <a:off x="530352" y="1463040"/>
+            <a:off x="512064" y="1316736"/>
             <a:ext cx="3657600" cy="182880"/>
           </a:xfrm>
           <a:prstGeom prst="rect">
@@ -3107,24 +3107,24 @@
         </p:nvSpPr>
         <p:spPr>
           <a:xfrm>
-            <a:off x="530352" y="1700784"/>
-            <a:ext cx="3657600" cy="384048"/>
-          </a:xfrm>
-          <a:prstGeom prst="rect">
-            <a:avLst/>
-          </a:prstGeom>
-          <a:noFill/>
-          <a:ln/>
-        </p:spPr>
-        <p:txBody>
-          <a:bodyPr wrap="square" lIns="0" tIns="0" rIns="0" bIns="0" rtlCol="0" anchor="ctr"/>
-          <a:lstStyle/>
-          <a:p>
-            <a:pPr indent="0" marL="0">
-              <a:buNone/>
-            </a:pPr>
-            <a:r>
-              <a:rPr lang="en-US" sz="2200" b="1" dirty="0">
+            <a:off x="512064" y="1517904"/>
+            <a:ext cx="3712464" cy="329184"/>
+          </a:xfrm>
+          <a:prstGeom prst="rect">
+            <a:avLst/>
+          </a:prstGeom>
+          <a:noFill/>
+          <a:ln/>
+        </p:spPr>
+        <p:txBody>
+          <a:bodyPr wrap="square" lIns="0" tIns="0" rIns="0" bIns="0" rtlCol="0" anchor="ctr"/>
+          <a:lstStyle/>
+          <a:p>
+            <a:pPr indent="0" marL="0">
+              <a:buNone/>
+            </a:pPr>
+            <a:r>
+              <a:rPr lang="en-US" sz="2100" b="1" dirty="0">
                 <a:solidFill>
                   <a:srgbClr val="B3261E"/>
                 </a:solidFill>
@@ -3138,7 +3138,7 @@
               <a:buNone/>
             </a:pPr>
             <a:r>
-              <a:rPr lang="en-US" sz="1200" dirty="0">
+              <a:rPr lang="en-US" sz="1100" dirty="0">
                 <a:solidFill>
                   <a:srgbClr val="5A6673"/>
                 </a:solidFill>
@@ -3146,37 +3146,51 @@
                 <a:ea typeface="Arial" pitchFamily="34" charset="-122"/>
                 <a:cs typeface="Arial" pitchFamily="34" charset="-120"/>
               </a:rPr>
-              <a:t>  alerts   →   </a:t>
-            </a:r>
-            <a:pPr indent="0" marL="0">
-              <a:buNone/>
-            </a:pPr>
-            <a:r>
-              <a:rPr lang="en-US" sz="2200" b="1" dirty="0">
-                <a:solidFill>
-                  <a:srgbClr val="1F497D"/>
+              <a:t>  alerts  </a:t>
+            </a:r>
+            <a:pPr indent="0" marL="0">
+              <a:buNone/>
+            </a:pPr>
+            <a:r>
+              <a:rPr lang="en-US" sz="1500" dirty="0">
+                <a:solidFill>
+                  <a:srgbClr val="5A6673"/>
                 </a:solidFill>
                 <a:latin typeface="Arial" pitchFamily="34" charset="0"/>
                 <a:ea typeface="Arial" pitchFamily="34" charset="-122"/>
                 <a:cs typeface="Arial" pitchFamily="34" charset="-120"/>
               </a:rPr>
-              <a:t>10</a:t>
-            </a:r>
-            <a:pPr indent="0" marL="0">
-              <a:buNone/>
-            </a:pPr>
-            <a:r>
-              <a:rPr lang="en-US" sz="1200" dirty="0">
-                <a:solidFill>
-                  <a:srgbClr val="5A6673"/>
+              <a:t>→</a:t>
+            </a:r>
+            <a:pPr indent="0" marL="0">
+              <a:buNone/>
+            </a:pPr>
+            <a:r>
+              <a:rPr lang="en-US" sz="2100" b="1" dirty="0">
+                <a:solidFill>
+                  <a:srgbClr val="1F497D"/>
                 </a:solidFill>
                 <a:latin typeface="Arial" pitchFamily="34" charset="0"/>
                 <a:ea typeface="Arial" pitchFamily="34" charset="-122"/>
                 <a:cs typeface="Arial" pitchFamily="34" charset="-120"/>
               </a:rPr>
-              <a:t>  manoeuvres</a:t>
-            </a:r>
-            <a:endParaRPr lang="en-US" sz="2200" dirty="0"/>
+              <a:t>  10</a:t>
+            </a:r>
+            <a:pPr indent="0" marL="0">
+              <a:buNone/>
+            </a:pPr>
+            <a:r>
+              <a:rPr lang="en-US" sz="1100" dirty="0">
+                <a:solidFill>
+                  <a:srgbClr val="5A6673"/>
+                </a:solidFill>
+                <a:latin typeface="Arial" pitchFamily="34" charset="0"/>
+                <a:ea typeface="Arial" pitchFamily="34" charset="-122"/>
+                <a:cs typeface="Arial" pitchFamily="34" charset="-120"/>
+              </a:rPr>
+              <a:t>  manoeuvres flown</a:t>
+            </a:r>
+            <a:endParaRPr lang="en-US" sz="2100" dirty="0"/>
           </a:p>
         </p:txBody>
       </p:sp>
@@ -3188,17 +3202,59 @@
         </p:nvSpPr>
         <p:spPr>
           <a:xfrm>
-            <a:off x="530352" y="2103120"/>
-            <a:ext cx="3621024" cy="402336"/>
-          </a:xfrm>
-          <a:prstGeom prst="rect">
-            <a:avLst/>
-          </a:prstGeom>
-          <a:noFill/>
-          <a:ln/>
-        </p:spPr>
-        <p:txBody>
-          <a:bodyPr wrap="square" lIns="0" tIns="0" rIns="0" bIns="0" rtlCol="0" anchor="ctr"/>
+            <a:off x="512064" y="1847088"/>
+            <a:ext cx="3712464" cy="274320"/>
+          </a:xfrm>
+          <a:prstGeom prst="rect">
+            <a:avLst/>
+          </a:prstGeom>
+          <a:noFill/>
+          <a:ln/>
+        </p:spPr>
+        <p:txBody>
+          <a:bodyPr wrap="square" lIns="0" tIns="0" rIns="0" bIns="0" rtlCol="0" anchor="t"/>
+          <a:lstStyle/>
+          <a:p>
+            <a:pPr indent="0" marL="0">
+              <a:lnSpc>
+                <a:spcPts val="1100"/>
+              </a:lnSpc>
+              <a:buNone/>
+            </a:pPr>
+            <a:r>
+              <a:rPr lang="en-US" sz="950" dirty="0">
+                <a:solidFill>
+                  <a:srgbClr val="333333"/>
+                </a:solidFill>
+                <a:latin typeface="Calibri" pitchFamily="34" charset="0"/>
+                <a:ea typeface="Calibri" pitchFamily="34" charset="-122"/>
+                <a:cs typeface="Calibri" pitchFamily="34" charset="-120"/>
+              </a:rPr>
+              <a:t>ISRO, 2024. Detection is not the bottleneck. Deciding which ten of fifty-three thousand deserve a burn is.</a:t>
+            </a:r>
+            <a:endParaRPr lang="en-US" sz="950" dirty="0"/>
+          </a:p>
+        </p:txBody>
+      </p:sp>
+      <p:sp>
+        <p:nvSpPr>
+          <p:cNvPr id="16" name="Text 13"/>
+          <p:cNvSpPr/>
+          <p:nvPr/>
+        </p:nvSpPr>
+        <p:spPr>
+          <a:xfrm>
+            <a:off x="4553712" y="1207008"/>
+            <a:ext cx="5833872" cy="969264"/>
+          </a:xfrm>
+          <a:prstGeom prst="rect">
+            <a:avLst/>
+          </a:prstGeom>
+          <a:noFill/>
+          <a:ln/>
+        </p:spPr>
+        <p:txBody>
+          <a:bodyPr wrap="square" lIns="0" tIns="0" rIns="0" bIns="0" rtlCol="0" anchor="t"/>
           <a:lstStyle/>
           <a:p>
             <a:pPr indent="0" marL="0">
@@ -3208,6 +3264,23 @@
               <a:buNone/>
             </a:pPr>
             <a:r>
+              <a:rPr lang="en-US" sz="1050" b="1" dirty="0">
+                <a:solidFill>
+                  <a:srgbClr val="111111"/>
+                </a:solidFill>
+                <a:latin typeface="Calibri" pitchFamily="34" charset="0"/>
+                <a:ea typeface="Calibri" pitchFamily="34" charset="-122"/>
+                <a:cs typeface="Calibri" pitchFamily="34" charset="-120"/>
+              </a:rPr>
+              <a:t>KESSLER ranks close approaches, then argues with its own ranking. </a:t>
+            </a:r>
+            <a:pPr indent="0" marL="0">
+              <a:lnSpc>
+                <a:spcPts val="1250"/>
+              </a:lnSpc>
+              <a:buNone/>
+            </a:pPr>
+            <a:r>
               <a:rPr lang="en-US" sz="1050" dirty="0">
                 <a:solidFill>
                   <a:srgbClr val="333333"/>
@@ -3216,7 +3289,7 @@
                 <a:ea typeface="Calibri" pitchFamily="34" charset="-122"/>
                 <a:cs typeface="Calibri" pitchFamily="34" charset="-120"/>
               </a:rPr>
-              <a:t>ISRO, 2024. Detection is not the bottleneck — deciding which 10 of 53,000 matter is. KESSLER ranks and justifies that choice.</a:t>
+              <a:t>It loads real element sets, propagates them with SGP4, finds each pair’s exact time of closest approach and scores the event — that much is a conjunction tool. Ours adds the last step: for every event it also computes how far apart the pair would have to pass, and how wrong the uncertainty we had to assume would have to be, before the verdict changes. The operator gets a rank and the reason that rank is trustworthy — or the reason it is not.</a:t>
             </a:r>
             <a:endParaRPr lang="en-US" sz="1050" dirty="0"/>
           </a:p>
@@ -3224,57 +3297,18 @@
       </p:sp>
       <p:sp>
         <p:nvSpPr>
-          <p:cNvPr id="16" name="Text 13"/>
-          <p:cNvSpPr/>
-          <p:nvPr/>
-        </p:nvSpPr>
-        <p:spPr>
-          <a:xfrm>
-            <a:off x="4553712" y="1371600"/>
-            <a:ext cx="5852160" cy="182880"/>
-          </a:xfrm>
-          <a:prstGeom prst="rect">
-            <a:avLst/>
-          </a:prstGeom>
-          <a:noFill/>
-          <a:ln/>
-        </p:spPr>
-        <p:txBody>
-          <a:bodyPr wrap="square" lIns="0" tIns="0" rIns="0" bIns="0" rtlCol="0" anchor="ctr"/>
-          <a:lstStyle/>
-          <a:p>
-            <a:pPr indent="0" marL="0">
-              <a:buNone/>
-            </a:pPr>
-            <a:r>
-              <a:rPr lang="en-US" sz="850" b="1" spc="90" kern="0" dirty="0">
-                <a:solidFill>
-                  <a:srgbClr val="1F497D"/>
-                </a:solidFill>
-                <a:latin typeface="Calibri" pitchFamily="34" charset="0"/>
-                <a:ea typeface="Calibri" pitchFamily="34" charset="-122"/>
-                <a:cs typeface="Calibri" pitchFamily="34" charset="-120"/>
-              </a:rPr>
-              <a:t>DETAILED EXPLANATION — WHAT THE PROTOTYPE DOES</a:t>
-            </a:r>
-            <a:endParaRPr lang="en-US" sz="850" dirty="0"/>
-          </a:p>
-        </p:txBody>
-      </p:sp>
-      <p:sp>
-        <p:nvSpPr>
           <p:cNvPr id="17" name="Shape 14"/>
           <p:cNvSpPr/>
           <p:nvPr/>
         </p:nvSpPr>
         <p:spPr>
           <a:xfrm>
-            <a:off x="4553712" y="1627632"/>
-            <a:ext cx="1371600" cy="932688"/>
+            <a:off x="310896" y="2249424"/>
+            <a:ext cx="1481328" cy="859536"/>
           </a:xfrm>
           <a:prstGeom prst="roundRect">
             <a:avLst>
-              <a:gd name="adj" fmla="val 2941"/>
+              <a:gd name="adj" fmla="val 3191"/>
             </a:avLst>
           </a:prstGeom>
           <a:solidFill>
@@ -3296,8 +3330,8 @@
         </p:nvSpPr>
         <p:spPr>
           <a:xfrm>
-            <a:off x="4663440" y="1719072"/>
-            <a:ext cx="237744" cy="237744"/>
+            <a:off x="420624" y="2350008"/>
+            <a:ext cx="219456" cy="219456"/>
           </a:xfrm>
           <a:prstGeom prst="ellipse">
             <a:avLst/>
@@ -3316,8 +3350,8 @@
         </p:nvSpPr>
         <p:spPr>
           <a:xfrm>
-            <a:off x="4663440" y="1719072"/>
-            <a:ext cx="237744" cy="237744"/>
+            <a:off x="420624" y="2350008"/>
+            <a:ext cx="219456" cy="219456"/>
           </a:xfrm>
           <a:prstGeom prst="rect">
             <a:avLst/>
@@ -3333,7 +3367,7 @@
               <a:buNone/>
             </a:pPr>
             <a:r>
-              <a:rPr lang="en-US" sz="1000" b="1" dirty="0">
+              <a:rPr lang="en-US" sz="950" b="1" dirty="0">
                 <a:solidFill>
                   <a:srgbClr val="FFFFFF"/>
                 </a:solidFill>
@@ -3343,164 +3377,144 @@
               </a:rPr>
               <a:t>1</a:t>
             </a:r>
+            <a:endParaRPr lang="en-US" sz="950" dirty="0"/>
+          </a:p>
+        </p:txBody>
+      </p:sp>
+      <p:sp>
+        <p:nvSpPr>
+          <p:cNvPr id="20" name="Text 17"/>
+          <p:cNvSpPr/>
+          <p:nvPr/>
+        </p:nvSpPr>
+        <p:spPr>
+          <a:xfrm>
+            <a:off x="713232" y="2350008"/>
+            <a:ext cx="969264" cy="219456"/>
+          </a:xfrm>
+          <a:prstGeom prst="rect">
+            <a:avLst/>
+          </a:prstGeom>
+          <a:noFill/>
+          <a:ln/>
+        </p:spPr>
+        <p:txBody>
+          <a:bodyPr wrap="square" lIns="0" tIns="0" rIns="0" bIns="0" rtlCol="0" anchor="ctr"/>
+          <a:lstStyle/>
+          <a:p>
+            <a:pPr indent="0" marL="0">
+              <a:buNone/>
+            </a:pPr>
+            <a:r>
+              <a:rPr lang="en-US" sz="1050" b="1" spc="40" kern="0" dirty="0">
+                <a:solidFill>
+                  <a:srgbClr val="1F497D"/>
+                </a:solidFill>
+                <a:latin typeface="Calibri" pitchFamily="34" charset="0"/>
+                <a:ea typeface="Calibri" pitchFamily="34" charset="-122"/>
+                <a:cs typeface="Calibri" pitchFamily="34" charset="-120"/>
+              </a:rPr>
+              <a:t>SCREEN</a:t>
+            </a:r>
+            <a:endParaRPr lang="en-US" sz="1050" dirty="0"/>
+          </a:p>
+        </p:txBody>
+      </p:sp>
+      <p:sp>
+        <p:nvSpPr>
+          <p:cNvPr id="21" name="Text 18"/>
+          <p:cNvSpPr/>
+          <p:nvPr/>
+        </p:nvSpPr>
+        <p:spPr>
+          <a:xfrm>
+            <a:off x="420624" y="2624328"/>
+            <a:ext cx="1261872" cy="384048"/>
+          </a:xfrm>
+          <a:prstGeom prst="rect">
+            <a:avLst/>
+          </a:prstGeom>
+          <a:noFill/>
+          <a:ln/>
+        </p:spPr>
+        <p:txBody>
+          <a:bodyPr wrap="square" lIns="0" tIns="0" rIns="0" bIns="0" rtlCol="0" anchor="t"/>
+          <a:lstStyle/>
+          <a:p>
+            <a:pPr indent="0" marL="0">
+              <a:lnSpc>
+                <a:spcPts val="1050"/>
+              </a:lnSpc>
+              <a:buNone/>
+            </a:pPr>
+            <a:r>
+              <a:rPr lang="en-US" sz="850" dirty="0">
+                <a:solidFill>
+                  <a:srgbClr val="333333"/>
+                </a:solidFill>
+                <a:latin typeface="Calibri" pitchFamily="34" charset="0"/>
+                <a:ea typeface="Calibri" pitchFamily="34" charset="-122"/>
+                <a:cs typeface="Calibri" pitchFamily="34" charset="-120"/>
+              </a:rPr>
+              <a:t>859 objects, 368,511 pairs over 72 h → 3,032 real close approaches</a:t>
+            </a:r>
+            <a:endParaRPr lang="en-US" sz="850" dirty="0"/>
+          </a:p>
+        </p:txBody>
+      </p:sp>
+      <p:sp>
+        <p:nvSpPr>
+          <p:cNvPr id="22" name="Text 19"/>
+          <p:cNvSpPr/>
+          <p:nvPr/>
+        </p:nvSpPr>
+        <p:spPr>
+          <a:xfrm>
+            <a:off x="1828800" y="2249424"/>
+            <a:ext cx="228600" cy="859536"/>
+          </a:xfrm>
+          <a:prstGeom prst="rect">
+            <a:avLst/>
+          </a:prstGeom>
+          <a:noFill/>
+          <a:ln/>
+        </p:spPr>
+        <p:txBody>
+          <a:bodyPr wrap="square" lIns="0" tIns="0" rIns="0" bIns="0" rtlCol="0" anchor="ctr"/>
+          <a:lstStyle/>
+          <a:p>
+            <a:pPr algn="ctr" indent="0" marL="0">
+              <a:buNone/>
+            </a:pPr>
+            <a:r>
+              <a:rPr lang="en-US" sz="1000" dirty="0">
+                <a:solidFill>
+                  <a:srgbClr val="A8B2BE"/>
+                </a:solidFill>
+                <a:latin typeface="Calibri" pitchFamily="34" charset="0"/>
+                <a:ea typeface="Calibri" pitchFamily="34" charset="-122"/>
+                <a:cs typeface="Calibri" pitchFamily="34" charset="-120"/>
+              </a:rPr>
+              <a:t>▶</a:t>
+            </a:r>
             <a:endParaRPr lang="en-US" sz="1000" dirty="0"/>
           </a:p>
         </p:txBody>
       </p:sp>
       <p:sp>
         <p:nvSpPr>
-          <p:cNvPr id="20" name="Text 17"/>
-          <p:cNvSpPr/>
-          <p:nvPr/>
-        </p:nvSpPr>
-        <p:spPr>
-          <a:xfrm>
-            <a:off x="4956048" y="1719072"/>
-            <a:ext cx="914400" cy="237744"/>
-          </a:xfrm>
-          <a:prstGeom prst="rect">
-            <a:avLst/>
-          </a:prstGeom>
-          <a:noFill/>
-          <a:ln/>
-        </p:spPr>
-        <p:txBody>
-          <a:bodyPr wrap="square" lIns="0" tIns="0" rIns="0" bIns="0" rtlCol="0" anchor="ctr"/>
-          <a:lstStyle/>
-          <a:p>
-            <a:pPr indent="0" marL="0">
-              <a:buNone/>
-            </a:pPr>
-            <a:r>
-              <a:rPr lang="en-US" sz="1050" b="1" dirty="0">
-                <a:solidFill>
-                  <a:srgbClr val="1F497D"/>
-                </a:solidFill>
-                <a:latin typeface="Calibri" pitchFamily="34" charset="0"/>
-                <a:ea typeface="Calibri" pitchFamily="34" charset="-122"/>
-                <a:cs typeface="Calibri" pitchFamily="34" charset="-120"/>
-              </a:rPr>
-              <a:t>INGEST</a:t>
-            </a:r>
-            <a:endParaRPr lang="en-US" sz="1050" dirty="0"/>
-          </a:p>
-        </p:txBody>
-      </p:sp>
-      <p:sp>
-        <p:nvSpPr>
-          <p:cNvPr id="21" name="Text 18"/>
-          <p:cNvSpPr/>
-          <p:nvPr/>
-        </p:nvSpPr>
-        <p:spPr>
-          <a:xfrm>
-            <a:off x="4663440" y="2011680"/>
-            <a:ext cx="1170432" cy="475488"/>
-          </a:xfrm>
-          <a:prstGeom prst="rect">
-            <a:avLst/>
-          </a:prstGeom>
-          <a:noFill/>
-          <a:ln/>
-        </p:spPr>
-        <p:txBody>
-          <a:bodyPr wrap="square" lIns="0" tIns="0" rIns="0" bIns="0" rtlCol="0" anchor="ctr"/>
-          <a:lstStyle/>
-          <a:p>
-            <a:pPr indent="0" marL="0">
-              <a:lnSpc>
-                <a:spcPts val="1100"/>
-              </a:lnSpc>
-              <a:buNone/>
-            </a:pPr>
-            <a:r>
-              <a:rPr lang="en-US" sz="900" dirty="0">
-                <a:solidFill>
-                  <a:srgbClr val="333333"/>
-                </a:solidFill>
-                <a:latin typeface="Calibri" pitchFamily="34" charset="0"/>
-                <a:ea typeface="Calibri" pitchFamily="34" charset="-122"/>
-                <a:cs typeface="Calibri" pitchFamily="34" charset="-120"/>
-              </a:rPr>
-              <a:t>Public CelesTrak TLEs</a:t>
-            </a:r>
-            <a:endParaRPr lang="en-US" sz="900" dirty="0"/>
-          </a:p>
-          <a:p>
-            <a:pPr indent="0" marL="0">
-              <a:lnSpc>
-                <a:spcPts val="1100"/>
-              </a:lnSpc>
-              <a:buNone/>
-            </a:pPr>
-            <a:r>
-              <a:rPr lang="en-US" sz="900" dirty="0">
-                <a:solidFill>
-                  <a:srgbClr val="333333"/>
-                </a:solidFill>
-                <a:latin typeface="Calibri" pitchFamily="34" charset="0"/>
-                <a:ea typeface="Calibri" pitchFamily="34" charset="-122"/>
-                <a:cs typeface="Calibri" pitchFamily="34" charset="-120"/>
-              </a:rPr>
-              <a:t>859 real objects</a:t>
-            </a:r>
-            <a:endParaRPr lang="en-US" sz="900" dirty="0"/>
-          </a:p>
-        </p:txBody>
-      </p:sp>
-      <p:sp>
-        <p:nvSpPr>
-          <p:cNvPr id="22" name="Text 19"/>
-          <p:cNvSpPr/>
-          <p:nvPr/>
-        </p:nvSpPr>
-        <p:spPr>
-          <a:xfrm>
-            <a:off x="5925312" y="1975104"/>
-            <a:ext cx="146304" cy="219456"/>
-          </a:xfrm>
-          <a:prstGeom prst="rect">
-            <a:avLst/>
-          </a:prstGeom>
-          <a:noFill/>
-          <a:ln/>
-        </p:spPr>
-        <p:txBody>
-          <a:bodyPr wrap="square" lIns="0" tIns="0" rIns="0" bIns="0" rtlCol="0" anchor="ctr"/>
-          <a:lstStyle/>
-          <a:p>
-            <a:pPr algn="ctr" indent="0" marL="0">
-              <a:buNone/>
-            </a:pPr>
-            <a:r>
-              <a:rPr lang="en-US" sz="900" dirty="0">
-                <a:solidFill>
-                  <a:srgbClr val="A8B2BE"/>
-                </a:solidFill>
-                <a:latin typeface="Calibri" pitchFamily="34" charset="0"/>
-                <a:ea typeface="Calibri" pitchFamily="34" charset="-122"/>
-                <a:cs typeface="Calibri" pitchFamily="34" charset="-120"/>
-              </a:rPr>
-              <a:t>▶</a:t>
-            </a:r>
-            <a:endParaRPr lang="en-US" sz="900" dirty="0"/>
-          </a:p>
-        </p:txBody>
-      </p:sp>
-      <p:sp>
-        <p:nvSpPr>
           <p:cNvPr id="23" name="Shape 20"/>
           <p:cNvSpPr/>
           <p:nvPr/>
         </p:nvSpPr>
         <p:spPr>
           <a:xfrm>
-            <a:off x="6071616" y="1627632"/>
-            <a:ext cx="1371600" cy="932688"/>
+            <a:off x="2093976" y="2249424"/>
+            <a:ext cx="1517904" cy="859536"/>
           </a:xfrm>
           <a:prstGeom prst="roundRect">
             <a:avLst>
-              <a:gd name="adj" fmla="val 2941"/>
+              <a:gd name="adj" fmla="val 3191"/>
             </a:avLst>
           </a:prstGeom>
           <a:solidFill>
@@ -3522,8 +3536,8 @@
         </p:nvSpPr>
         <p:spPr>
           <a:xfrm>
-            <a:off x="6181344" y="1719072"/>
-            <a:ext cx="237744" cy="237744"/>
+            <a:off x="2203704" y="2350008"/>
+            <a:ext cx="219456" cy="219456"/>
           </a:xfrm>
           <a:prstGeom prst="ellipse">
             <a:avLst/>
@@ -3542,8 +3556,8 @@
         </p:nvSpPr>
         <p:spPr>
           <a:xfrm>
-            <a:off x="6181344" y="1719072"/>
-            <a:ext cx="237744" cy="237744"/>
+            <a:off x="2203704" y="2350008"/>
+            <a:ext cx="219456" cy="219456"/>
           </a:xfrm>
           <a:prstGeom prst="rect">
             <a:avLst/>
@@ -3559,7 +3573,7 @@
               <a:buNone/>
             </a:pPr>
             <a:r>
-              <a:rPr lang="en-US" sz="1000" b="1" dirty="0">
+              <a:rPr lang="en-US" sz="950" b="1" dirty="0">
                 <a:solidFill>
                   <a:srgbClr val="FFFFFF"/>
                 </a:solidFill>
@@ -3569,121 +3583,227 @@
               </a:rPr>
               <a:t>2</a:t>
             </a:r>
+            <a:endParaRPr lang="en-US" sz="950" dirty="0"/>
+          </a:p>
+        </p:txBody>
+      </p:sp>
+      <p:sp>
+        <p:nvSpPr>
+          <p:cNvPr id="26" name="Text 23"/>
+          <p:cNvSpPr/>
+          <p:nvPr/>
+        </p:nvSpPr>
+        <p:spPr>
+          <a:xfrm>
+            <a:off x="2496312" y="2350008"/>
+            <a:ext cx="1005840" cy="219456"/>
+          </a:xfrm>
+          <a:prstGeom prst="rect">
+            <a:avLst/>
+          </a:prstGeom>
+          <a:noFill/>
+          <a:ln/>
+        </p:spPr>
+        <p:txBody>
+          <a:bodyPr wrap="square" lIns="0" tIns="0" rIns="0" bIns="0" rtlCol="0" anchor="ctr"/>
+          <a:lstStyle/>
+          <a:p>
+            <a:pPr indent="0" marL="0">
+              <a:buNone/>
+            </a:pPr>
+            <a:r>
+              <a:rPr lang="en-US" sz="1050" b="1" spc="40" kern="0" dirty="0">
+                <a:solidFill>
+                  <a:srgbClr val="0070C0"/>
+                </a:solidFill>
+                <a:latin typeface="Calibri" pitchFamily="34" charset="0"/>
+                <a:ea typeface="Calibri" pitchFamily="34" charset="-122"/>
+                <a:cs typeface="Calibri" pitchFamily="34" charset="-120"/>
+              </a:rPr>
+              <a:t>RANK</a:t>
+            </a:r>
+            <a:endParaRPr lang="en-US" sz="1050" dirty="0"/>
+          </a:p>
+        </p:txBody>
+      </p:sp>
+      <p:sp>
+        <p:nvSpPr>
+          <p:cNvPr id="27" name="Text 24"/>
+          <p:cNvSpPr/>
+          <p:nvPr/>
+        </p:nvSpPr>
+        <p:spPr>
+          <a:xfrm>
+            <a:off x="2203704" y="2624328"/>
+            <a:ext cx="1298448" cy="384048"/>
+          </a:xfrm>
+          <a:prstGeom prst="rect">
+            <a:avLst/>
+          </a:prstGeom>
+          <a:noFill/>
+          <a:ln/>
+        </p:spPr>
+        <p:txBody>
+          <a:bodyPr wrap="square" lIns="0" tIns="0" rIns="0" bIns="0" rtlCol="0" anchor="t"/>
+          <a:lstStyle/>
+          <a:p>
+            <a:pPr indent="0" marL="0">
+              <a:lnSpc>
+                <a:spcPts val="1050"/>
+              </a:lnSpc>
+              <a:buNone/>
+            </a:pPr>
+            <a:r>
+              <a:rPr lang="en-US" sz="850" dirty="0">
+                <a:solidFill>
+                  <a:srgbClr val="333333"/>
+                </a:solidFill>
+                <a:latin typeface="Calibri" pitchFamily="34" charset="0"/>
+                <a:ea typeface="Calibri" pitchFamily="34" charset="-122"/>
+                <a:cs typeface="Calibri" pitchFamily="34" charset="-120"/>
+              </a:rPr>
+              <a:t>Foster collision probability, a severity band and a 0–100 score</a:t>
+            </a:r>
+            <a:endParaRPr lang="en-US" sz="850" dirty="0"/>
+          </a:p>
+        </p:txBody>
+      </p:sp>
+      <p:sp>
+        <p:nvSpPr>
+          <p:cNvPr id="28" name="Text 25"/>
+          <p:cNvSpPr/>
+          <p:nvPr/>
+        </p:nvSpPr>
+        <p:spPr>
+          <a:xfrm>
+            <a:off x="3648456" y="2249424"/>
+            <a:ext cx="228600" cy="859536"/>
+          </a:xfrm>
+          <a:prstGeom prst="rect">
+            <a:avLst/>
+          </a:prstGeom>
+          <a:noFill/>
+          <a:ln/>
+        </p:spPr>
+        <p:txBody>
+          <a:bodyPr wrap="square" lIns="0" tIns="0" rIns="0" bIns="0" rtlCol="0" anchor="ctr"/>
+          <a:lstStyle/>
+          <a:p>
+            <a:pPr algn="ctr" indent="0" marL="0">
+              <a:buNone/>
+            </a:pPr>
+            <a:r>
+              <a:rPr lang="en-US" sz="1000" dirty="0">
+                <a:solidFill>
+                  <a:srgbClr val="A8B2BE"/>
+                </a:solidFill>
+                <a:latin typeface="Calibri" pitchFamily="34" charset="0"/>
+                <a:ea typeface="Calibri" pitchFamily="34" charset="-122"/>
+                <a:cs typeface="Calibri" pitchFamily="34" charset="-120"/>
+              </a:rPr>
+              <a:t>▶</a:t>
+            </a:r>
             <a:endParaRPr lang="en-US" sz="1000" dirty="0"/>
           </a:p>
         </p:txBody>
       </p:sp>
       <p:sp>
         <p:nvSpPr>
-          <p:cNvPr id="26" name="Text 23"/>
-          <p:cNvSpPr/>
-          <p:nvPr/>
-        </p:nvSpPr>
-        <p:spPr>
-          <a:xfrm>
-            <a:off x="6473952" y="1719072"/>
-            <a:ext cx="914400" cy="237744"/>
-          </a:xfrm>
-          <a:prstGeom prst="rect">
-            <a:avLst/>
-          </a:prstGeom>
-          <a:noFill/>
-          <a:ln/>
-        </p:spPr>
-        <p:txBody>
-          <a:bodyPr wrap="square" lIns="0" tIns="0" rIns="0" bIns="0" rtlCol="0" anchor="ctr"/>
-          <a:lstStyle/>
-          <a:p>
-            <a:pPr indent="0" marL="0">
-              <a:buNone/>
-            </a:pPr>
-            <a:r>
-              <a:rPr lang="en-US" sz="1050" b="1" dirty="0">
-                <a:solidFill>
-                  <a:srgbClr val="0070C0"/>
-                </a:solidFill>
-                <a:latin typeface="Calibri" pitchFamily="34" charset="0"/>
-                <a:ea typeface="Calibri" pitchFamily="34" charset="-122"/>
-                <a:cs typeface="Calibri" pitchFamily="34" charset="-120"/>
-              </a:rPr>
-              <a:t>SCREEN</a:t>
-            </a:r>
-            <a:endParaRPr lang="en-US" sz="1050" dirty="0"/>
-          </a:p>
-        </p:txBody>
-      </p:sp>
-      <p:sp>
-        <p:nvSpPr>
-          <p:cNvPr id="27" name="Text 24"/>
-          <p:cNvSpPr/>
-          <p:nvPr/>
-        </p:nvSpPr>
-        <p:spPr>
-          <a:xfrm>
-            <a:off x="6181344" y="2011680"/>
-            <a:ext cx="1170432" cy="475488"/>
-          </a:xfrm>
-          <a:prstGeom prst="rect">
-            <a:avLst/>
-          </a:prstGeom>
-          <a:noFill/>
-          <a:ln/>
-        </p:spPr>
-        <p:txBody>
-          <a:bodyPr wrap="square" lIns="0" tIns="0" rIns="0" bIns="0" rtlCol="0" anchor="ctr"/>
-          <a:lstStyle/>
-          <a:p>
-            <a:pPr indent="0" marL="0">
+          <p:cNvPr id="29" name="Shape 26"/>
+          <p:cNvSpPr/>
+          <p:nvPr/>
+        </p:nvSpPr>
+        <p:spPr>
+          <a:xfrm>
+            <a:off x="3913632" y="2249424"/>
+            <a:ext cx="1572768" cy="859536"/>
+          </a:xfrm>
+          <a:prstGeom prst="diamond">
+            <a:avLst/>
+          </a:prstGeom>
+          <a:solidFill>
+            <a:srgbClr val="FFF4E0"/>
+          </a:solidFill>
+          <a:ln w="12700">
+            <a:solidFill>
+              <a:srgbClr val="B25E00"/>
+            </a:solidFill>
+            <a:prstDash val="solid"/>
+          </a:ln>
+        </p:spPr>
+      </p:sp>
+      <p:sp>
+        <p:nvSpPr>
+          <p:cNvPr id="30" name="Text 27"/>
+          <p:cNvSpPr/>
+          <p:nvPr/>
+        </p:nvSpPr>
+        <p:spPr>
+          <a:xfrm>
+            <a:off x="4078224" y="2478024"/>
+            <a:ext cx="1243584" cy="402336"/>
+          </a:xfrm>
+          <a:prstGeom prst="rect">
+            <a:avLst/>
+          </a:prstGeom>
+          <a:noFill/>
+          <a:ln/>
+        </p:spPr>
+        <p:txBody>
+          <a:bodyPr wrap="square" lIns="0" tIns="0" rIns="0" bIns="0" rtlCol="0" anchor="ctr"/>
+          <a:lstStyle/>
+          <a:p>
+            <a:pPr algn="ctr" indent="0" marL="0">
               <a:lnSpc>
-                <a:spcPts val="1100"/>
+                <a:spcPts val="950"/>
               </a:lnSpc>
               <a:buNone/>
             </a:pPr>
             <a:r>
-              <a:rPr lang="en-US" sz="900" dirty="0">
-                <a:solidFill>
-                  <a:srgbClr val="333333"/>
-                </a:solidFill>
-                <a:latin typeface="Calibri" pitchFamily="34" charset="0"/>
-                <a:ea typeface="Calibri" pitchFamily="34" charset="-122"/>
-                <a:cs typeface="Calibri" pitchFamily="34" charset="-120"/>
-              </a:rPr>
-              <a:t>SGP4 + 3-stage cascade</a:t>
-            </a:r>
-            <a:endParaRPr lang="en-US" sz="900" dirty="0"/>
-          </a:p>
-          <a:p>
-            <a:pPr indent="0" marL="0">
+              <a:rPr lang="en-US" sz="800" b="1" dirty="0">
+                <a:solidFill>
+                  <a:srgbClr val="7A4300"/>
+                </a:solidFill>
+                <a:latin typeface="Calibri" pitchFamily="34" charset="0"/>
+                <a:ea typeface="Calibri" pitchFamily="34" charset="-122"/>
+                <a:cs typeface="Calibri" pitchFamily="34" charset="-120"/>
+              </a:rPr>
+              <a:t>Does the band</a:t>
+            </a:r>
+            <a:endParaRPr lang="en-US" sz="800" dirty="0"/>
+          </a:p>
+          <a:p>
+            <a:pPr algn="ctr" indent="0" marL="0">
               <a:lnSpc>
-                <a:spcPts val="1100"/>
+                <a:spcPts val="950"/>
               </a:lnSpc>
               <a:buNone/>
             </a:pPr>
             <a:r>
-              <a:rPr lang="en-US" sz="900" dirty="0">
-                <a:solidFill>
-                  <a:srgbClr val="333333"/>
-                </a:solidFill>
-                <a:latin typeface="Calibri" pitchFamily="34" charset="0"/>
-                <a:ea typeface="Calibri" pitchFamily="34" charset="-122"/>
-                <a:cs typeface="Calibri" pitchFamily="34" charset="-120"/>
-              </a:rPr>
-              <a:t>368,511 pairs → 3,032</a:t>
-            </a:r>
-            <a:endParaRPr lang="en-US" sz="900" dirty="0"/>
-          </a:p>
-        </p:txBody>
-      </p:sp>
-      <p:sp>
-        <p:nvSpPr>
-          <p:cNvPr id="28" name="Text 25"/>
-          <p:cNvSpPr/>
-          <p:nvPr/>
-        </p:nvSpPr>
-        <p:spPr>
-          <a:xfrm>
-            <a:off x="7443216" y="1975104"/>
-            <a:ext cx="146304" cy="219456"/>
+              <a:rPr lang="en-US" sz="800" b="1" dirty="0">
+                <a:solidFill>
+                  <a:srgbClr val="7A4300"/>
+                </a:solidFill>
+                <a:latin typeface="Calibri" pitchFamily="34" charset="0"/>
+                <a:ea typeface="Calibri" pitchFamily="34" charset="-122"/>
+                <a:cs typeface="Calibri" pitchFamily="34" charset="-120"/>
+              </a:rPr>
+              <a:t>survive the σ sweep?</a:t>
+            </a:r>
+            <a:endParaRPr lang="en-US" sz="800" dirty="0"/>
+          </a:p>
+        </p:txBody>
+      </p:sp>
+      <p:sp>
+        <p:nvSpPr>
+          <p:cNvPr id="31" name="Text 28"/>
+          <p:cNvSpPr/>
+          <p:nvPr/>
+        </p:nvSpPr>
+        <p:spPr>
+          <a:xfrm>
+            <a:off x="5522976" y="2240280"/>
+            <a:ext cx="228600" cy="420624"/>
           </a:xfrm>
           <a:prstGeom prst="rect">
             <a:avLst/>
@@ -3699,7 +3819,7 @@
               <a:buNone/>
             </a:pPr>
             <a:r>
-              <a:rPr lang="en-US" sz="900" dirty="0">
+              <a:rPr lang="en-US" sz="1000" dirty="0">
                 <a:solidFill>
                   <a:srgbClr val="A8B2BE"/>
                 </a:solidFill>
@@ -3709,24 +3829,318 @@
               </a:rPr>
               <a:t>▶</a:t>
             </a:r>
-            <a:endParaRPr lang="en-US" sz="900" dirty="0"/>
-          </a:p>
-        </p:txBody>
-      </p:sp>
-      <p:sp>
-        <p:nvSpPr>
-          <p:cNvPr id="29" name="Shape 26"/>
-          <p:cNvSpPr/>
-          <p:nvPr/>
-        </p:nvSpPr>
-        <p:spPr>
-          <a:xfrm>
-            <a:off x="7589520" y="1627632"/>
-            <a:ext cx="1371600" cy="932688"/>
+            <a:endParaRPr lang="en-US" sz="1000" dirty="0"/>
+          </a:p>
+        </p:txBody>
+      </p:sp>
+      <p:sp>
+        <p:nvSpPr>
+          <p:cNvPr id="32" name="Text 29"/>
+          <p:cNvSpPr/>
+          <p:nvPr/>
+        </p:nvSpPr>
+        <p:spPr>
+          <a:xfrm>
+            <a:off x="5522976" y="2697480"/>
+            <a:ext cx="228600" cy="420624"/>
+          </a:xfrm>
+          <a:prstGeom prst="rect">
+            <a:avLst/>
+          </a:prstGeom>
+          <a:noFill/>
+          <a:ln/>
+        </p:spPr>
+        <p:txBody>
+          <a:bodyPr wrap="square" lIns="0" tIns="0" rIns="0" bIns="0" rtlCol="0" anchor="ctr"/>
+          <a:lstStyle/>
+          <a:p>
+            <a:pPr algn="ctr" indent="0" marL="0">
+              <a:buNone/>
+            </a:pPr>
+            <a:r>
+              <a:rPr lang="en-US" sz="1000" dirty="0">
+                <a:solidFill>
+                  <a:srgbClr val="A8B2BE"/>
+                </a:solidFill>
+                <a:latin typeface="Calibri" pitchFamily="34" charset="0"/>
+                <a:ea typeface="Calibri" pitchFamily="34" charset="-122"/>
+                <a:cs typeface="Calibri" pitchFamily="34" charset="-120"/>
+              </a:rPr>
+              <a:t>▶</a:t>
+            </a:r>
+            <a:endParaRPr lang="en-US" sz="1000" dirty="0"/>
+          </a:p>
+        </p:txBody>
+      </p:sp>
+      <p:sp>
+        <p:nvSpPr>
+          <p:cNvPr id="33" name="Shape 30"/>
+          <p:cNvSpPr/>
+          <p:nvPr/>
+        </p:nvSpPr>
+        <p:spPr>
+          <a:xfrm>
+            <a:off x="5788152" y="2249424"/>
+            <a:ext cx="2395728" cy="402336"/>
           </a:xfrm>
           <a:prstGeom prst="roundRect">
             <a:avLst>
-              <a:gd name="adj" fmla="val 2941"/>
+              <a:gd name="adj" fmla="val 6818"/>
+            </a:avLst>
+          </a:prstGeom>
+          <a:solidFill>
+            <a:srgbClr val="F1F8F3"/>
+          </a:solidFill>
+          <a:ln w="9525">
+            <a:solidFill>
+              <a:srgbClr val="D4DAE2"/>
+            </a:solidFill>
+            <a:prstDash val="solid"/>
+          </a:ln>
+        </p:spPr>
+      </p:sp>
+      <p:sp>
+        <p:nvSpPr>
+          <p:cNvPr id="34" name="Text 31"/>
+          <p:cNvSpPr/>
+          <p:nvPr/>
+        </p:nvSpPr>
+        <p:spPr>
+          <a:xfrm>
+            <a:off x="5897880" y="2267712"/>
+            <a:ext cx="822960" cy="182880"/>
+          </a:xfrm>
+          <a:prstGeom prst="rect">
+            <a:avLst/>
+          </a:prstGeom>
+          <a:noFill/>
+          <a:ln/>
+        </p:spPr>
+        <p:txBody>
+          <a:bodyPr wrap="square" lIns="0" tIns="0" rIns="0" bIns="0" rtlCol="0" anchor="ctr"/>
+          <a:lstStyle/>
+          <a:p>
+            <a:pPr indent="0" marL="0">
+              <a:buNone/>
+            </a:pPr>
+            <a:r>
+              <a:rPr lang="en-US" sz="850" b="1" dirty="0">
+                <a:solidFill>
+                  <a:srgbClr val="1E7A4C"/>
+                </a:solidFill>
+                <a:latin typeface="Calibri" pitchFamily="34" charset="0"/>
+                <a:ea typeface="Calibri" pitchFamily="34" charset="-122"/>
+                <a:cs typeface="Calibri" pitchFamily="34" charset="-120"/>
+              </a:rPr>
+              <a:t>✓  ESCALATE</a:t>
+            </a:r>
+            <a:endParaRPr lang="en-US" sz="850" dirty="0"/>
+          </a:p>
+        </p:txBody>
+      </p:sp>
+      <p:sp>
+        <p:nvSpPr>
+          <p:cNvPr id="35" name="Text 32"/>
+          <p:cNvSpPr/>
+          <p:nvPr/>
+        </p:nvSpPr>
+        <p:spPr>
+          <a:xfrm>
+            <a:off x="6702552" y="2249424"/>
+            <a:ext cx="1389888" cy="402336"/>
+          </a:xfrm>
+          <a:prstGeom prst="rect">
+            <a:avLst/>
+          </a:prstGeom>
+          <a:noFill/>
+          <a:ln/>
+        </p:spPr>
+        <p:txBody>
+          <a:bodyPr wrap="square" lIns="0" tIns="0" rIns="0" bIns="0" rtlCol="0" anchor="ctr"/>
+          <a:lstStyle/>
+          <a:p>
+            <a:pPr indent="0" marL="0">
+              <a:lnSpc>
+                <a:spcPts val="850"/>
+              </a:lnSpc>
+              <a:buNone/>
+            </a:pPr>
+            <a:r>
+              <a:rPr lang="en-US" sz="700" dirty="0">
+                <a:solidFill>
+                  <a:srgbClr val="333333"/>
+                </a:solidFill>
+                <a:latin typeface="Calibri" pitchFamily="34" charset="0"/>
+                <a:ea typeface="Calibri" pitchFamily="34" charset="-122"/>
+                <a:cs typeface="Calibri" pitchFamily="34" charset="-120"/>
+              </a:rPr>
+              <a:t>Band held from 0.25× to 4× the assumed σ — it is geometry, not our assumption.</a:t>
+            </a:r>
+            <a:endParaRPr lang="en-US" sz="700" dirty="0"/>
+          </a:p>
+        </p:txBody>
+      </p:sp>
+      <p:sp>
+        <p:nvSpPr>
+          <p:cNvPr id="36" name="Shape 33"/>
+          <p:cNvSpPr/>
+          <p:nvPr/>
+        </p:nvSpPr>
+        <p:spPr>
+          <a:xfrm>
+            <a:off x="5788152" y="2706624"/>
+            <a:ext cx="2395728" cy="402336"/>
+          </a:xfrm>
+          <a:prstGeom prst="roundRect">
+            <a:avLst>
+              <a:gd name="adj" fmla="val 6818"/>
+            </a:avLst>
+          </a:prstGeom>
+          <a:solidFill>
+            <a:srgbClr val="F4F6F8"/>
+          </a:solidFill>
+          <a:ln w="9525">
+            <a:solidFill>
+              <a:srgbClr val="D4DAE2"/>
+            </a:solidFill>
+            <a:prstDash val="solid"/>
+          </a:ln>
+        </p:spPr>
+      </p:sp>
+      <p:sp>
+        <p:nvSpPr>
+          <p:cNvPr id="37" name="Text 34"/>
+          <p:cNvSpPr/>
+          <p:nvPr/>
+        </p:nvSpPr>
+        <p:spPr>
+          <a:xfrm>
+            <a:off x="5897880" y="2724912"/>
+            <a:ext cx="822960" cy="182880"/>
+          </a:xfrm>
+          <a:prstGeom prst="rect">
+            <a:avLst/>
+          </a:prstGeom>
+          <a:noFill/>
+          <a:ln/>
+        </p:spPr>
+        <p:txBody>
+          <a:bodyPr wrap="square" lIns="0" tIns="0" rIns="0" bIns="0" rtlCol="0" anchor="ctr"/>
+          <a:lstStyle/>
+          <a:p>
+            <a:pPr indent="0" marL="0">
+              <a:buNone/>
+            </a:pPr>
+            <a:r>
+              <a:rPr lang="en-US" sz="850" b="1" dirty="0">
+                <a:solidFill>
+                  <a:srgbClr val="5A6673"/>
+                </a:solidFill>
+                <a:latin typeface="Calibri" pitchFamily="34" charset="0"/>
+                <a:ea typeface="Calibri" pitchFamily="34" charset="-122"/>
+                <a:cs typeface="Calibri" pitchFamily="34" charset="-120"/>
+              </a:rPr>
+              <a:t>✕  DISCARD</a:t>
+            </a:r>
+            <a:endParaRPr lang="en-US" sz="850" dirty="0"/>
+          </a:p>
+        </p:txBody>
+      </p:sp>
+      <p:sp>
+        <p:nvSpPr>
+          <p:cNvPr id="38" name="Text 35"/>
+          <p:cNvSpPr/>
+          <p:nvPr/>
+        </p:nvSpPr>
+        <p:spPr>
+          <a:xfrm>
+            <a:off x="6702552" y="2706624"/>
+            <a:ext cx="1389888" cy="402336"/>
+          </a:xfrm>
+          <a:prstGeom prst="rect">
+            <a:avLst/>
+          </a:prstGeom>
+          <a:noFill/>
+          <a:ln/>
+        </p:spPr>
+        <p:txBody>
+          <a:bodyPr wrap="square" lIns="0" tIns="0" rIns="0" bIns="0" rtlCol="0" anchor="ctr"/>
+          <a:lstStyle/>
+          <a:p>
+            <a:pPr indent="0" marL="0">
+              <a:lnSpc>
+                <a:spcPts val="850"/>
+              </a:lnSpc>
+              <a:buNone/>
+            </a:pPr>
+            <a:r>
+              <a:rPr lang="en-US" sz="700" dirty="0">
+                <a:solidFill>
+                  <a:srgbClr val="333333"/>
+                </a:solidFill>
+                <a:latin typeface="Calibri" pitchFamily="34" charset="0"/>
+                <a:ea typeface="Calibri" pitchFamily="34" charset="-122"/>
+                <a:cs typeface="Calibri" pitchFamily="34" charset="-120"/>
+              </a:rPr>
+              <a:t>A small revision to σ flips it. Logged with the exact multiplier, so the call is auditable.</a:t>
+            </a:r>
+            <a:endParaRPr lang="en-US" sz="700" dirty="0"/>
+          </a:p>
+        </p:txBody>
+      </p:sp>
+      <p:sp>
+        <p:nvSpPr>
+          <p:cNvPr id="39" name="Text 36"/>
+          <p:cNvSpPr/>
+          <p:nvPr/>
+        </p:nvSpPr>
+        <p:spPr>
+          <a:xfrm>
+            <a:off x="8220456" y="2249424"/>
+            <a:ext cx="228600" cy="859536"/>
+          </a:xfrm>
+          <a:prstGeom prst="rect">
+            <a:avLst/>
+          </a:prstGeom>
+          <a:noFill/>
+          <a:ln/>
+        </p:spPr>
+        <p:txBody>
+          <a:bodyPr wrap="square" lIns="0" tIns="0" rIns="0" bIns="0" rtlCol="0" anchor="ctr"/>
+          <a:lstStyle/>
+          <a:p>
+            <a:pPr algn="ctr" indent="0" marL="0">
+              <a:buNone/>
+            </a:pPr>
+            <a:r>
+              <a:rPr lang="en-US" sz="1000" dirty="0">
+                <a:solidFill>
+                  <a:srgbClr val="A8B2BE"/>
+                </a:solidFill>
+                <a:latin typeface="Calibri" pitchFamily="34" charset="0"/>
+                <a:ea typeface="Calibri" pitchFamily="34" charset="-122"/>
+                <a:cs typeface="Calibri" pitchFamily="34" charset="-120"/>
+              </a:rPr>
+              <a:t>▶</a:t>
+            </a:r>
+            <a:endParaRPr lang="en-US" sz="1000" dirty="0"/>
+          </a:p>
+        </p:txBody>
+      </p:sp>
+      <p:sp>
+        <p:nvSpPr>
+          <p:cNvPr id="40" name="Shape 37"/>
+          <p:cNvSpPr/>
+          <p:nvPr/>
+        </p:nvSpPr>
+        <p:spPr>
+          <a:xfrm>
+            <a:off x="8485632" y="2249424"/>
+            <a:ext cx="1901952" cy="859536"/>
+          </a:xfrm>
+          <a:prstGeom prst="roundRect">
+            <a:avLst>
+              <a:gd name="adj" fmla="val 3191"/>
             </a:avLst>
           </a:prstGeom>
           <a:solidFill>
@@ -3742,240 +4156,14 @@
       </p:sp>
       <p:sp>
         <p:nvSpPr>
-          <p:cNvPr id="30" name="Shape 27"/>
-          <p:cNvSpPr/>
-          <p:nvPr/>
-        </p:nvSpPr>
-        <p:spPr>
-          <a:xfrm>
-            <a:off x="7699248" y="1719072"/>
-            <a:ext cx="237744" cy="237744"/>
-          </a:xfrm>
-          <a:prstGeom prst="ellipse">
-            <a:avLst/>
-          </a:prstGeom>
-          <a:solidFill>
-            <a:srgbClr val="B25E00"/>
-          </a:solidFill>
-          <a:ln/>
-        </p:spPr>
-      </p:sp>
-      <p:sp>
-        <p:nvSpPr>
-          <p:cNvPr id="31" name="Text 28"/>
-          <p:cNvSpPr/>
-          <p:nvPr/>
-        </p:nvSpPr>
-        <p:spPr>
-          <a:xfrm>
-            <a:off x="7699248" y="1719072"/>
-            <a:ext cx="237744" cy="237744"/>
-          </a:xfrm>
-          <a:prstGeom prst="rect">
-            <a:avLst/>
-          </a:prstGeom>
-          <a:noFill/>
-          <a:ln/>
-        </p:spPr>
-        <p:txBody>
-          <a:bodyPr wrap="square" lIns="0" tIns="0" rIns="0" bIns="0" rtlCol="0" anchor="ctr"/>
-          <a:lstStyle/>
-          <a:p>
-            <a:pPr algn="ctr" indent="0" marL="0">
-              <a:buNone/>
-            </a:pPr>
-            <a:r>
-              <a:rPr lang="en-US" sz="1000" b="1" dirty="0">
-                <a:solidFill>
-                  <a:srgbClr val="FFFFFF"/>
-                </a:solidFill>
-                <a:latin typeface="Calibri" pitchFamily="34" charset="0"/>
-                <a:ea typeface="Calibri" pitchFamily="34" charset="-122"/>
-                <a:cs typeface="Calibri" pitchFamily="34" charset="-120"/>
-              </a:rPr>
-              <a:t>3</a:t>
-            </a:r>
-            <a:endParaRPr lang="en-US" sz="1000" dirty="0"/>
-          </a:p>
-        </p:txBody>
-      </p:sp>
-      <p:sp>
-        <p:nvSpPr>
-          <p:cNvPr id="32" name="Text 29"/>
-          <p:cNvSpPr/>
-          <p:nvPr/>
-        </p:nvSpPr>
-        <p:spPr>
-          <a:xfrm>
-            <a:off x="7991856" y="1719072"/>
-            <a:ext cx="914400" cy="237744"/>
-          </a:xfrm>
-          <a:prstGeom prst="rect">
-            <a:avLst/>
-          </a:prstGeom>
-          <a:noFill/>
-          <a:ln/>
-        </p:spPr>
-        <p:txBody>
-          <a:bodyPr wrap="square" lIns="0" tIns="0" rIns="0" bIns="0" rtlCol="0" anchor="ctr"/>
-          <a:lstStyle/>
-          <a:p>
-            <a:pPr indent="0" marL="0">
-              <a:buNone/>
-            </a:pPr>
-            <a:r>
-              <a:rPr lang="en-US" sz="1050" b="1" dirty="0">
-                <a:solidFill>
-                  <a:srgbClr val="B25E00"/>
-                </a:solidFill>
-                <a:latin typeface="Calibri" pitchFamily="34" charset="0"/>
-                <a:ea typeface="Calibri" pitchFamily="34" charset="-122"/>
-                <a:cs typeface="Calibri" pitchFamily="34" charset="-120"/>
-              </a:rPr>
-              <a:t>RANK</a:t>
-            </a:r>
-            <a:endParaRPr lang="en-US" sz="1050" dirty="0"/>
-          </a:p>
-        </p:txBody>
-      </p:sp>
-      <p:sp>
-        <p:nvSpPr>
-          <p:cNvPr id="33" name="Text 30"/>
-          <p:cNvSpPr/>
-          <p:nvPr/>
-        </p:nvSpPr>
-        <p:spPr>
-          <a:xfrm>
-            <a:off x="7699248" y="2011680"/>
-            <a:ext cx="1170432" cy="475488"/>
-          </a:xfrm>
-          <a:prstGeom prst="rect">
-            <a:avLst/>
-          </a:prstGeom>
-          <a:noFill/>
-          <a:ln/>
-        </p:spPr>
-        <p:txBody>
-          <a:bodyPr wrap="square" lIns="0" tIns="0" rIns="0" bIns="0" rtlCol="0" anchor="ctr"/>
-          <a:lstStyle/>
-          <a:p>
-            <a:pPr indent="0" marL="0">
-              <a:lnSpc>
-                <a:spcPts val="1100"/>
-              </a:lnSpc>
-              <a:buNone/>
-            </a:pPr>
-            <a:r>
-              <a:rPr lang="en-US" sz="900" dirty="0">
-                <a:solidFill>
-                  <a:srgbClr val="333333"/>
-                </a:solidFill>
-                <a:latin typeface="Calibri" pitchFamily="34" charset="0"/>
-                <a:ea typeface="Calibri" pitchFamily="34" charset="-122"/>
-                <a:cs typeface="Calibri" pitchFamily="34" charset="-120"/>
-              </a:rPr>
-              <a:t>Collision probability,</a:t>
-            </a:r>
-            <a:endParaRPr lang="en-US" sz="900" dirty="0"/>
-          </a:p>
-          <a:p>
-            <a:pPr indent="0" marL="0">
-              <a:lnSpc>
-                <a:spcPts val="1100"/>
-              </a:lnSpc>
-              <a:buNone/>
-            </a:pPr>
-            <a:r>
-              <a:rPr lang="en-US" sz="900" dirty="0">
-                <a:solidFill>
-                  <a:srgbClr val="333333"/>
-                </a:solidFill>
-                <a:latin typeface="Calibri" pitchFamily="34" charset="0"/>
-                <a:ea typeface="Calibri" pitchFamily="34" charset="-122"/>
-                <a:cs typeface="Calibri" pitchFamily="34" charset="-120"/>
-              </a:rPr>
-              <a:t>severity band, 0–100 score</a:t>
-            </a:r>
-            <a:endParaRPr lang="en-US" sz="900" dirty="0"/>
-          </a:p>
-        </p:txBody>
-      </p:sp>
-      <p:sp>
-        <p:nvSpPr>
-          <p:cNvPr id="34" name="Text 31"/>
-          <p:cNvSpPr/>
-          <p:nvPr/>
-        </p:nvSpPr>
-        <p:spPr>
-          <a:xfrm>
-            <a:off x="8961120" y="1975104"/>
-            <a:ext cx="146304" cy="219456"/>
-          </a:xfrm>
-          <a:prstGeom prst="rect">
-            <a:avLst/>
-          </a:prstGeom>
-          <a:noFill/>
-          <a:ln/>
-        </p:spPr>
-        <p:txBody>
-          <a:bodyPr wrap="square" lIns="0" tIns="0" rIns="0" bIns="0" rtlCol="0" anchor="ctr"/>
-          <a:lstStyle/>
-          <a:p>
-            <a:pPr algn="ctr" indent="0" marL="0">
-              <a:buNone/>
-            </a:pPr>
-            <a:r>
-              <a:rPr lang="en-US" sz="900" dirty="0">
-                <a:solidFill>
-                  <a:srgbClr val="A8B2BE"/>
-                </a:solidFill>
-                <a:latin typeface="Calibri" pitchFamily="34" charset="0"/>
-                <a:ea typeface="Calibri" pitchFamily="34" charset="-122"/>
-                <a:cs typeface="Calibri" pitchFamily="34" charset="-120"/>
-              </a:rPr>
-              <a:t>▶</a:t>
-            </a:r>
-            <a:endParaRPr lang="en-US" sz="900" dirty="0"/>
-          </a:p>
-        </p:txBody>
-      </p:sp>
-      <p:sp>
-        <p:nvSpPr>
-          <p:cNvPr id="35" name="Shape 32"/>
-          <p:cNvSpPr/>
-          <p:nvPr/>
-        </p:nvSpPr>
-        <p:spPr>
-          <a:xfrm>
-            <a:off x="9107424" y="1627632"/>
-            <a:ext cx="1371600" cy="932688"/>
-          </a:xfrm>
-          <a:prstGeom prst="roundRect">
-            <a:avLst>
-              <a:gd name="adj" fmla="val 2941"/>
-            </a:avLst>
-          </a:prstGeom>
-          <a:solidFill>
-            <a:srgbClr val="FFFFFF"/>
-          </a:solidFill>
-          <a:ln w="9525">
-            <a:solidFill>
-              <a:srgbClr val="D4DAE2"/>
-            </a:solidFill>
-            <a:prstDash val="solid"/>
-          </a:ln>
-        </p:spPr>
-      </p:sp>
-      <p:sp>
-        <p:nvSpPr>
-          <p:cNvPr id="36" name="Shape 33"/>
-          <p:cNvSpPr/>
-          <p:nvPr/>
-        </p:nvSpPr>
-        <p:spPr>
-          <a:xfrm>
-            <a:off x="9217152" y="1719072"/>
-            <a:ext cx="237744" cy="237744"/>
+          <p:cNvPr id="41" name="Shape 38"/>
+          <p:cNvSpPr/>
+          <p:nvPr/>
+        </p:nvSpPr>
+        <p:spPr>
+          <a:xfrm>
+            <a:off x="8595360" y="2350008"/>
+            <a:ext cx="219456" cy="219456"/>
           </a:xfrm>
           <a:prstGeom prst="ellipse">
             <a:avLst/>
@@ -3988,14 +4176,14 @@
       </p:sp>
       <p:sp>
         <p:nvSpPr>
-          <p:cNvPr id="37" name="Text 34"/>
-          <p:cNvSpPr/>
-          <p:nvPr/>
-        </p:nvSpPr>
-        <p:spPr>
-          <a:xfrm>
-            <a:off x="9217152" y="1719072"/>
-            <a:ext cx="237744" cy="237744"/>
+          <p:cNvPr id="42" name="Text 39"/>
+          <p:cNvSpPr/>
+          <p:nvPr/>
+        </p:nvSpPr>
+        <p:spPr>
+          <a:xfrm>
+            <a:off x="8595360" y="2350008"/>
+            <a:ext cx="219456" cy="219456"/>
           </a:xfrm>
           <a:prstGeom prst="rect">
             <a:avLst/>
@@ -4011,7 +4199,7 @@
               <a:buNone/>
             </a:pPr>
             <a:r>
-              <a:rPr lang="en-US" sz="1000" b="1" dirty="0">
+              <a:rPr lang="en-US" sz="950" b="1" dirty="0">
                 <a:solidFill>
                   <a:srgbClr val="FFFFFF"/>
                 </a:solidFill>
@@ -4019,38 +4207,38 @@
                 <a:ea typeface="Calibri" pitchFamily="34" charset="-122"/>
                 <a:cs typeface="Calibri" pitchFamily="34" charset="-120"/>
               </a:rPr>
-              <a:t>4</a:t>
-            </a:r>
-            <a:endParaRPr lang="en-US" sz="1000" dirty="0"/>
-          </a:p>
-        </p:txBody>
-      </p:sp>
-      <p:sp>
-        <p:nvSpPr>
-          <p:cNvPr id="38" name="Text 35"/>
-          <p:cNvSpPr/>
-          <p:nvPr/>
-        </p:nvSpPr>
-        <p:spPr>
-          <a:xfrm>
-            <a:off x="9509760" y="1719072"/>
-            <a:ext cx="914400" cy="237744"/>
-          </a:xfrm>
-          <a:prstGeom prst="rect">
-            <a:avLst/>
-          </a:prstGeom>
-          <a:noFill/>
-          <a:ln/>
-        </p:spPr>
-        <p:txBody>
-          <a:bodyPr wrap="square" lIns="0" tIns="0" rIns="0" bIns="0" rtlCol="0" anchor="ctr"/>
-          <a:lstStyle/>
-          <a:p>
-            <a:pPr indent="0" marL="0">
-              <a:buNone/>
-            </a:pPr>
-            <a:r>
-              <a:rPr lang="en-US" sz="1050" b="1" dirty="0">
+              <a:t>3</a:t>
+            </a:r>
+            <a:endParaRPr lang="en-US" sz="950" dirty="0"/>
+          </a:p>
+        </p:txBody>
+      </p:sp>
+      <p:sp>
+        <p:nvSpPr>
+          <p:cNvPr id="43" name="Text 40"/>
+          <p:cNvSpPr/>
+          <p:nvPr/>
+        </p:nvSpPr>
+        <p:spPr>
+          <a:xfrm>
+            <a:off x="8887968" y="2350008"/>
+            <a:ext cx="1389888" cy="219456"/>
+          </a:xfrm>
+          <a:prstGeom prst="rect">
+            <a:avLst/>
+          </a:prstGeom>
+          <a:noFill/>
+          <a:ln/>
+        </p:spPr>
+        <p:txBody>
+          <a:bodyPr wrap="square" lIns="0" tIns="0" rIns="0" bIns="0" rtlCol="0" anchor="ctr"/>
+          <a:lstStyle/>
+          <a:p>
+            <a:pPr indent="0" marL="0">
+              <a:buNone/>
+            </a:pPr>
+            <a:r>
+              <a:rPr lang="en-US" sz="1050" b="1" spc="40" kern="0" dirty="0">
                 <a:solidFill>
                   <a:srgbClr val="1E7A4C"/>
                 </a:solidFill>
@@ -4058,7 +4246,7 @@
                 <a:ea typeface="Calibri" pitchFamily="34" charset="-122"/>
                 <a:cs typeface="Calibri" pitchFamily="34" charset="-120"/>
               </a:rPr>
-              <a:t>DECIDE</a:t>
+              <a:t>HAND OFF</a:t>
             </a:r>
             <a:endParaRPr lang="en-US" sz="1050" dirty="0"/>
           </a:p>
@@ -4066,33 +4254,33 @@
       </p:sp>
       <p:sp>
         <p:nvSpPr>
-          <p:cNvPr id="39" name="Text 36"/>
-          <p:cNvSpPr/>
-          <p:nvPr/>
-        </p:nvSpPr>
-        <p:spPr>
-          <a:xfrm>
-            <a:off x="9217152" y="2011680"/>
-            <a:ext cx="1170432" cy="475488"/>
-          </a:xfrm>
-          <a:prstGeom prst="rect">
-            <a:avLst/>
-          </a:prstGeom>
-          <a:noFill/>
-          <a:ln/>
-        </p:spPr>
-        <p:txBody>
-          <a:bodyPr wrap="square" lIns="0" tIns="0" rIns="0" bIns="0" rtlCol="0" anchor="ctr"/>
+          <p:cNvPr id="44" name="Text 41"/>
+          <p:cNvSpPr/>
+          <p:nvPr/>
+        </p:nvSpPr>
+        <p:spPr>
+          <a:xfrm>
+            <a:off x="8595360" y="2624328"/>
+            <a:ext cx="1682496" cy="384048"/>
+          </a:xfrm>
+          <a:prstGeom prst="rect">
+            <a:avLst/>
+          </a:prstGeom>
+          <a:noFill/>
+          <a:ln/>
+        </p:spPr>
+        <p:txBody>
+          <a:bodyPr wrap="square" lIns="0" tIns="0" rIns="0" bIns="0" rtlCol="0" anchor="t"/>
           <a:lstStyle/>
           <a:p>
             <a:pPr indent="0" marL="0">
               <a:lnSpc>
-                <a:spcPts val="1100"/>
+                <a:spcPts val="1050"/>
               </a:lnSpc>
               <a:buNone/>
             </a:pPr>
             <a:r>
-              <a:rPr lang="en-US" sz="900" dirty="0">
+              <a:rPr lang="en-US" sz="850" dirty="0">
                 <a:solidFill>
                   <a:srgbClr val="333333"/>
                 </a:solidFill>
@@ -4100,41 +4288,21 @@
                 <a:ea typeface="Calibri" pitchFamily="34" charset="-122"/>
                 <a:cs typeface="Calibri" pitchFamily="34" charset="-120"/>
               </a:rPr>
-              <a:t>What would change</a:t>
-            </a:r>
-            <a:endParaRPr lang="en-US" sz="900" dirty="0"/>
-          </a:p>
-          <a:p>
-            <a:pPr indent="0" marL="0">
-              <a:lnSpc>
-                <a:spcPts val="1100"/>
-              </a:lnSpc>
-              <a:buNone/>
-            </a:pPr>
-            <a:r>
-              <a:rPr lang="en-US" sz="900" dirty="0">
-                <a:solidFill>
-                  <a:srgbClr val="333333"/>
-                </a:solidFill>
-                <a:latin typeface="Calibri" pitchFamily="34" charset="0"/>
-                <a:ea typeface="Calibri" pitchFamily="34" charset="-122"/>
-                <a:cs typeface="Calibri" pitchFamily="34" charset="-120"/>
-              </a:rPr>
-              <a:t>the verdict + CDM export</a:t>
-            </a:r>
-            <a:endParaRPr lang="en-US" sz="900" dirty="0"/>
-          </a:p>
-        </p:txBody>
-      </p:sp>
-      <p:sp>
-        <p:nvSpPr>
-          <p:cNvPr id="40" name="Text 37"/>
-          <p:cNvSpPr/>
-          <p:nvPr/>
-        </p:nvSpPr>
-        <p:spPr>
-          <a:xfrm>
-            <a:off x="310896" y="2724912"/>
+              <a:t>CCSDS 508.0-B-1 Conjunction Data Message, plus CSV — formats an operator already ingests</a:t>
+            </a:r>
+            <a:endParaRPr lang="en-US" sz="850" dirty="0"/>
+          </a:p>
+        </p:txBody>
+      </p:sp>
+      <p:sp>
+        <p:nvSpPr>
+          <p:cNvPr id="45" name="Text 42"/>
+          <p:cNvSpPr/>
+          <p:nvPr/>
+        </p:nvSpPr>
+        <p:spPr>
+          <a:xfrm>
+            <a:off x="310896" y="3200400"/>
             <a:ext cx="292608" cy="292608"/>
           </a:xfrm>
           <a:prstGeom prst="rect">
@@ -4167,13 +4335,13 @@
       </p:sp>
       <p:sp>
         <p:nvSpPr>
-          <p:cNvPr id="41" name="Text 38"/>
-          <p:cNvSpPr/>
-          <p:nvPr/>
-        </p:nvSpPr>
-        <p:spPr>
-          <a:xfrm>
-            <a:off x="621792" y="2724912"/>
+          <p:cNvPr id="46" name="Text 43"/>
+          <p:cNvSpPr/>
+          <p:nvPr/>
+        </p:nvSpPr>
+        <p:spPr>
+          <a:xfrm>
+            <a:off x="621792" y="3200400"/>
             <a:ext cx="9692640" cy="292608"/>
           </a:xfrm>
           <a:prstGeom prst="rect">
@@ -4206,13 +4374,13 @@
       </p:sp>
       <p:sp>
         <p:nvSpPr>
-          <p:cNvPr id="42" name="Shape 39"/>
-          <p:cNvSpPr/>
-          <p:nvPr/>
-        </p:nvSpPr>
-        <p:spPr>
-          <a:xfrm>
-            <a:off x="365760" y="3209544"/>
+          <p:cNvPr id="47" name="Shape 44"/>
+          <p:cNvSpPr/>
+          <p:nvPr/>
+        </p:nvSpPr>
+        <p:spPr>
+          <a:xfrm>
+            <a:off x="365760" y="3685032"/>
             <a:ext cx="91440" cy="91440"/>
           </a:xfrm>
           <a:prstGeom prst="rect">
@@ -4226,13 +4394,13 @@
       </p:sp>
       <p:sp>
         <p:nvSpPr>
-          <p:cNvPr id="43" name="Text 40"/>
-          <p:cNvSpPr/>
-          <p:nvPr/>
-        </p:nvSpPr>
-        <p:spPr>
-          <a:xfrm>
-            <a:off x="566928" y="3127248"/>
+          <p:cNvPr id="48" name="Text 45"/>
+          <p:cNvSpPr/>
+          <p:nvPr/>
+        </p:nvSpPr>
+        <p:spPr>
+          <a:xfrm>
+            <a:off x="566928" y="3602736"/>
             <a:ext cx="3200400" cy="256032"/>
           </a:xfrm>
           <a:prstGeom prst="rect">
@@ -4265,13 +4433,13 @@
       </p:sp>
       <p:sp>
         <p:nvSpPr>
-          <p:cNvPr id="44" name="Text 41"/>
-          <p:cNvSpPr/>
-          <p:nvPr/>
-        </p:nvSpPr>
-        <p:spPr>
-          <a:xfrm>
-            <a:off x="3877056" y="3108960"/>
+          <p:cNvPr id="49" name="Text 46"/>
+          <p:cNvSpPr/>
+          <p:nvPr/>
+        </p:nvSpPr>
+        <p:spPr>
+          <a:xfrm>
+            <a:off x="3877056" y="3584448"/>
             <a:ext cx="6492240" cy="566928"/>
           </a:xfrm>
           <a:prstGeom prst="rect">
@@ -4299,7 +4467,7 @@
                 <a:ea typeface="Calibri" pitchFamily="34" charset="-122"/>
                 <a:cs typeface="Calibri" pitchFamily="34" charset="-120"/>
               </a:rPr>
-              <a:t>Every event states the miss distance and the uncertainty multiplier that would drop it a severity band. Published tools give a ranked list and stop there.</a:t>
+              <a:t>Every event states the miss distance and the σ multiplier that would drop it a severity band, and which of the three score terms is carrying it. Published tools give a ranked list and stop. Ours is the same Foster model solved backwards, so no new assumption enters to produce the answer.</a:t>
             </a:r>
             <a:endParaRPr lang="en-US" sz="1050" dirty="0"/>
           </a:p>
@@ -4307,13 +4475,13 @@
       </p:sp>
       <p:sp>
         <p:nvSpPr>
-          <p:cNvPr id="45" name="Shape 42"/>
-          <p:cNvSpPr/>
-          <p:nvPr/>
-        </p:nvSpPr>
-        <p:spPr>
-          <a:xfrm>
-            <a:off x="365760" y="3858768"/>
+          <p:cNvPr id="50" name="Shape 47"/>
+          <p:cNvSpPr/>
+          <p:nvPr/>
+        </p:nvSpPr>
+        <p:spPr>
+          <a:xfrm>
+            <a:off x="365760" y="4151376"/>
             <a:ext cx="10003536" cy="0"/>
           </a:xfrm>
           <a:prstGeom prst="line">
@@ -4330,13 +4498,13 @@
       </p:sp>
       <p:sp>
         <p:nvSpPr>
-          <p:cNvPr id="46" name="Shape 43"/>
-          <p:cNvSpPr/>
-          <p:nvPr/>
-        </p:nvSpPr>
-        <p:spPr>
-          <a:xfrm>
-            <a:off x="365760" y="4050792"/>
+          <p:cNvPr id="51" name="Shape 48"/>
+          <p:cNvSpPr/>
+          <p:nvPr/>
+        </p:nvSpPr>
+        <p:spPr>
+          <a:xfrm>
+            <a:off x="365760" y="4343400"/>
             <a:ext cx="91440" cy="91440"/>
           </a:xfrm>
           <a:prstGeom prst="rect">
@@ -4350,13 +4518,13 @@
       </p:sp>
       <p:sp>
         <p:nvSpPr>
-          <p:cNvPr id="47" name="Text 44"/>
-          <p:cNvSpPr/>
-          <p:nvPr/>
-        </p:nvSpPr>
-        <p:spPr>
-          <a:xfrm>
-            <a:off x="566928" y="3968496"/>
+          <p:cNvPr id="52" name="Text 49"/>
+          <p:cNvSpPr/>
+          <p:nvPr/>
+        </p:nvSpPr>
+        <p:spPr>
+          <a:xfrm>
+            <a:off x="566928" y="4261104"/>
             <a:ext cx="3200400" cy="256032"/>
           </a:xfrm>
           <a:prstGeom prst="rect">
@@ -4389,13 +4557,13 @@
       </p:sp>
       <p:sp>
         <p:nvSpPr>
-          <p:cNvPr id="48" name="Text 45"/>
-          <p:cNvSpPr/>
-          <p:nvPr/>
-        </p:nvSpPr>
-        <p:spPr>
-          <a:xfrm>
-            <a:off x="3877056" y="3950208"/>
+          <p:cNvPr id="53" name="Text 50"/>
+          <p:cNvSpPr/>
+          <p:nvPr/>
+        </p:nvSpPr>
+        <p:spPr>
+          <a:xfrm>
+            <a:off x="3877056" y="4242816"/>
             <a:ext cx="6492240" cy="566928"/>
           </a:xfrm>
           <a:prstGeom prst="rect">
@@ -4423,7 +4591,7 @@
                 <a:ea typeface="Calibri" pitchFamily="34" charset="-122"/>
                 <a:cs typeface="Calibri" pitchFamily="34" charset="-120"/>
               </a:rPr>
-              <a:t>Every capability renders from one registry carrying its own status, so nothing unbuilt can appear as working. Our breakup model prints its own disagreement with the Fengyun-1C catalogue on every test run.</a:t>
+              <a:t>Every capability renders from one registry carrying its own build status, so nothing unfinished can appear as working and the sidebar marks its own gaps. Assumed inputs are controls you can sweep rather than constants — an assumption you can move is a finding; one buried in a constant is a claim.</a:t>
             </a:r>
             <a:endParaRPr lang="en-US" sz="1050" dirty="0"/>
           </a:p>
@@ -4431,13 +4599,13 @@
       </p:sp>
       <p:sp>
         <p:nvSpPr>
-          <p:cNvPr id="49" name="Shape 46"/>
-          <p:cNvSpPr/>
-          <p:nvPr/>
-        </p:nvSpPr>
-        <p:spPr>
-          <a:xfrm>
-            <a:off x="365760" y="4700016"/>
+          <p:cNvPr id="54" name="Shape 51"/>
+          <p:cNvSpPr/>
+          <p:nvPr/>
+        </p:nvSpPr>
+        <p:spPr>
+          <a:xfrm>
+            <a:off x="365760" y="4809744"/>
             <a:ext cx="10003536" cy="0"/>
           </a:xfrm>
           <a:prstGeom prst="line">
@@ -4454,13 +4622,13 @@
       </p:sp>
       <p:sp>
         <p:nvSpPr>
-          <p:cNvPr id="50" name="Shape 47"/>
-          <p:cNvSpPr/>
-          <p:nvPr/>
-        </p:nvSpPr>
-        <p:spPr>
-          <a:xfrm>
-            <a:off x="365760" y="4892040"/>
+          <p:cNvPr id="55" name="Shape 52"/>
+          <p:cNvSpPr/>
+          <p:nvPr/>
+        </p:nvSpPr>
+        <p:spPr>
+          <a:xfrm>
+            <a:off x="365760" y="5001768"/>
             <a:ext cx="91440" cy="91440"/>
           </a:xfrm>
           <a:prstGeom prst="rect">
@@ -4474,13 +4642,13 @@
       </p:sp>
       <p:sp>
         <p:nvSpPr>
-          <p:cNvPr id="51" name="Text 48"/>
-          <p:cNvSpPr/>
-          <p:nvPr/>
-        </p:nvSpPr>
-        <p:spPr>
-          <a:xfrm>
-            <a:off x="566928" y="4809744"/>
+          <p:cNvPr id="56" name="Text 53"/>
+          <p:cNvSpPr/>
+          <p:nvPr/>
+        </p:nvSpPr>
+        <p:spPr>
+          <a:xfrm>
+            <a:off x="566928" y="4919472"/>
             <a:ext cx="3200400" cy="256032"/>
           </a:xfrm>
           <a:prstGeom prst="rect">
@@ -4513,13 +4681,13 @@
       </p:sp>
       <p:sp>
         <p:nvSpPr>
-          <p:cNvPr id="52" name="Text 49"/>
-          <p:cNvSpPr/>
-          <p:nvPr/>
-        </p:nvSpPr>
-        <p:spPr>
-          <a:xfrm>
-            <a:off x="3877056" y="4791456"/>
+          <p:cNvPr id="57" name="Text 54"/>
+          <p:cNvSpPr/>
+          <p:nvPr/>
+        </p:nvSpPr>
+        <p:spPr>
+          <a:xfrm>
+            <a:off x="3877056" y="4901184"/>
             <a:ext cx="6492240" cy="566928"/>
           </a:xfrm>
           <a:prstGeom prst="rect">
@@ -4547,7 +4715,7 @@
                 <a:ea typeface="Calibri" pitchFamily="34" charset="-122"/>
                 <a:cs typeface="Calibri" pitchFamily="34" charset="-120"/>
               </a:rPr>
-              <a:t>Exports CCSDS 508.0-B-1 Conjunction Data Messages — what Space-Track, ESA and NASA CARA exchange — so output enters a real pipeline, not a spreadsheet.</a:t>
+              <a:t>Exports CCSDS 508.0-B-1 Conjunction Data Messages — the format Space-Track, ESA and NASA CARA already exchange — so the output enters an existing pipeline rather than a spreadsheet, and each message declares COVARIANCE_METHOD = DEFAULT rather than implying a covariance we do not have.</a:t>
             </a:r>
             <a:endParaRPr lang="en-US" sz="1050" dirty="0"/>
           </a:p>
@@ -4896,7 +5064,7 @@
         </p:nvSpPr>
         <p:spPr>
           <a:xfrm>
-            <a:off x="310896" y="896112"/>
+            <a:off x="310896" y="859536"/>
             <a:ext cx="292608" cy="292608"/>
           </a:xfrm>
           <a:prstGeom prst="rect">
@@ -4935,7 +5103,7 @@
         </p:nvSpPr>
         <p:spPr>
           <a:xfrm>
-            <a:off x="621792" y="896112"/>
+            <a:off x="621792" y="859536"/>
             <a:ext cx="9692640" cy="292608"/>
           </a:xfrm>
           <a:prstGeom prst="rect">
@@ -4974,12 +5142,12 @@
         </p:nvSpPr>
         <p:spPr>
           <a:xfrm>
-            <a:off x="310896" y="1298448"/>
-            <a:ext cx="3291840" cy="475488"/>
+            <a:off x="310896" y="1225296"/>
+            <a:ext cx="1828800" cy="1024128"/>
           </a:xfrm>
           <a:prstGeom prst="roundRect">
             <a:avLst>
-              <a:gd name="adj" fmla="val 5769"/>
+              <a:gd name="adj" fmla="val 2679"/>
             </a:avLst>
           </a:prstGeom>
           <a:solidFill>
@@ -4995,38 +5163,178 @@
       </p:sp>
       <p:sp>
         <p:nvSpPr>
-          <p:cNvPr id="13" name="Text 10"/>
-          <p:cNvSpPr/>
-          <p:nvPr/>
-        </p:nvSpPr>
-        <p:spPr>
-          <a:xfrm>
-            <a:off x="438912" y="1316736"/>
-            <a:ext cx="1060704" cy="438912"/>
-          </a:xfrm>
-          <a:prstGeom prst="rect">
-            <a:avLst/>
-          </a:prstGeom>
-          <a:noFill/>
-          <a:ln/>
-        </p:spPr>
-        <p:txBody>
-          <a:bodyPr wrap="square" lIns="0" tIns="0" rIns="0" bIns="0" rtlCol="0" anchor="ctr"/>
-          <a:lstStyle/>
-          <a:p>
-            <a:pPr indent="0" marL="0">
-              <a:buNone/>
-            </a:pPr>
-            <a:r>
-              <a:rPr lang="en-US" sz="1000" b="1" dirty="0">
-                <a:solidFill>
-                  <a:srgbClr val="1F497D"/>
-                </a:solidFill>
-                <a:latin typeface="Calibri" pitchFamily="34" charset="0"/>
-                <a:ea typeface="Calibri" pitchFamily="34" charset="-122"/>
-                <a:cs typeface="Calibri" pitchFamily="34" charset="-120"/>
-              </a:rPr>
-              <a:t>Frontend</a:t>
+          <p:cNvPr id="13" name="Shape 10"/>
+          <p:cNvSpPr/>
+          <p:nvPr/>
+        </p:nvSpPr>
+        <p:spPr>
+          <a:xfrm>
+            <a:off x="420624" y="1325880"/>
+            <a:ext cx="219456" cy="219456"/>
+          </a:xfrm>
+          <a:prstGeom prst="ellipse">
+            <a:avLst/>
+          </a:prstGeom>
+          <a:solidFill>
+            <a:srgbClr val="5C7A99"/>
+          </a:solidFill>
+          <a:ln/>
+        </p:spPr>
+      </p:sp>
+      <p:sp>
+        <p:nvSpPr>
+          <p:cNvPr id="14" name="Text 11"/>
+          <p:cNvSpPr/>
+          <p:nvPr/>
+        </p:nvSpPr>
+        <p:spPr>
+          <a:xfrm>
+            <a:off x="420624" y="1325880"/>
+            <a:ext cx="219456" cy="219456"/>
+          </a:xfrm>
+          <a:prstGeom prst="rect">
+            <a:avLst/>
+          </a:prstGeom>
+          <a:noFill/>
+          <a:ln/>
+        </p:spPr>
+        <p:txBody>
+          <a:bodyPr wrap="square" lIns="0" tIns="0" rIns="0" bIns="0" rtlCol="0" anchor="ctr"/>
+          <a:lstStyle/>
+          <a:p>
+            <a:pPr algn="ctr" indent="0" marL="0">
+              <a:buNone/>
+            </a:pPr>
+            <a:r>
+              <a:rPr lang="en-US" sz="950" b="1" dirty="0">
+                <a:solidFill>
+                  <a:srgbClr val="FFFFFF"/>
+                </a:solidFill>
+                <a:latin typeface="Calibri" pitchFamily="34" charset="0"/>
+                <a:ea typeface="Calibri" pitchFamily="34" charset="-122"/>
+                <a:cs typeface="Calibri" pitchFamily="34" charset="-120"/>
+              </a:rPr>
+              <a:t>1</a:t>
+            </a:r>
+            <a:endParaRPr lang="en-US" sz="950" dirty="0"/>
+          </a:p>
+        </p:txBody>
+      </p:sp>
+      <p:sp>
+        <p:nvSpPr>
+          <p:cNvPr id="15" name="Text 12"/>
+          <p:cNvSpPr/>
+          <p:nvPr/>
+        </p:nvSpPr>
+        <p:spPr>
+          <a:xfrm>
+            <a:off x="713232" y="1325880"/>
+            <a:ext cx="1316736" cy="219456"/>
+          </a:xfrm>
+          <a:prstGeom prst="rect">
+            <a:avLst/>
+          </a:prstGeom>
+          <a:noFill/>
+          <a:ln/>
+        </p:spPr>
+        <p:txBody>
+          <a:bodyPr wrap="square" lIns="0" tIns="0" rIns="0" bIns="0" rtlCol="0" anchor="ctr"/>
+          <a:lstStyle/>
+          <a:p>
+            <a:pPr indent="0" marL="0">
+              <a:buNone/>
+            </a:pPr>
+            <a:r>
+              <a:rPr lang="en-US" sz="1050" b="1" spc="40" kern="0" dirty="0">
+                <a:solidFill>
+                  <a:srgbClr val="5C7A99"/>
+                </a:solidFill>
+                <a:latin typeface="Calibri" pitchFamily="34" charset="0"/>
+                <a:ea typeface="Calibri" pitchFamily="34" charset="-122"/>
+                <a:cs typeface="Calibri" pitchFamily="34" charset="-120"/>
+              </a:rPr>
+              <a:t>DATA</a:t>
+            </a:r>
+            <a:endParaRPr lang="en-US" sz="1050" dirty="0"/>
+          </a:p>
+        </p:txBody>
+      </p:sp>
+      <p:sp>
+        <p:nvSpPr>
+          <p:cNvPr id="16" name="Text 13"/>
+          <p:cNvSpPr/>
+          <p:nvPr/>
+        </p:nvSpPr>
+        <p:spPr>
+          <a:xfrm>
+            <a:off x="420624" y="1600200"/>
+            <a:ext cx="1609344" cy="548640"/>
+          </a:xfrm>
+          <a:prstGeom prst="rect">
+            <a:avLst/>
+          </a:prstGeom>
+          <a:noFill/>
+          <a:ln/>
+        </p:spPr>
+        <p:txBody>
+          <a:bodyPr wrap="square" lIns="0" tIns="0" rIns="0" bIns="0" rtlCol="0" anchor="t"/>
+          <a:lstStyle/>
+          <a:p>
+            <a:pPr indent="0" marL="0">
+              <a:lnSpc>
+                <a:spcPts val="1050"/>
+              </a:lnSpc>
+              <a:buNone/>
+            </a:pPr>
+            <a:r>
+              <a:rPr lang="en-US" sz="850" dirty="0">
+                <a:solidFill>
+                  <a:srgbClr val="333333"/>
+                </a:solidFill>
+                <a:latin typeface="Calibri" pitchFamily="34" charset="0"/>
+                <a:ea typeface="Calibri" pitchFamily="34" charset="-122"/>
+                <a:cs typeface="Calibri" pitchFamily="34" charset="-120"/>
+              </a:rPr>
+              <a:t>CelesTrak GP element sets — free, no sign-up. Committed verbatim at one capture instant.</a:t>
+            </a:r>
+            <a:endParaRPr lang="en-US" sz="850" dirty="0"/>
+          </a:p>
+        </p:txBody>
+      </p:sp>
+      <p:sp>
+        <p:nvSpPr>
+          <p:cNvPr id="17" name="Text 14"/>
+          <p:cNvSpPr/>
+          <p:nvPr/>
+        </p:nvSpPr>
+        <p:spPr>
+          <a:xfrm>
+            <a:off x="2139696" y="1225296"/>
+            <a:ext cx="228600" cy="1024128"/>
+          </a:xfrm>
+          <a:prstGeom prst="rect">
+            <a:avLst/>
+          </a:prstGeom>
+          <a:noFill/>
+          <a:ln/>
+        </p:spPr>
+        <p:txBody>
+          <a:bodyPr wrap="square" lIns="0" tIns="0" rIns="0" bIns="0" rtlCol="0" anchor="ctr"/>
+          <a:lstStyle/>
+          <a:p>
+            <a:pPr algn="ctr" indent="0" marL="0">
+              <a:buNone/>
+            </a:pPr>
+            <a:r>
+              <a:rPr lang="en-US" sz="1000" dirty="0">
+                <a:solidFill>
+                  <a:srgbClr val="A8B2BE"/>
+                </a:solidFill>
+                <a:latin typeface="Calibri" pitchFamily="34" charset="0"/>
+                <a:ea typeface="Calibri" pitchFamily="34" charset="-122"/>
+                <a:cs typeface="Calibri" pitchFamily="34" charset="-120"/>
+              </a:rPr>
+              <a:t>▶</a:t>
             </a:r>
             <a:endParaRPr lang="en-US" sz="1000" dirty="0"/>
           </a:p>
@@ -5034,60 +5342,18 @@
       </p:sp>
       <p:sp>
         <p:nvSpPr>
-          <p:cNvPr id="14" name="Text 11"/>
-          <p:cNvSpPr/>
-          <p:nvPr/>
-        </p:nvSpPr>
-        <p:spPr>
-          <a:xfrm>
-            <a:off x="1517904" y="1316736"/>
-            <a:ext cx="1975104" cy="438912"/>
-          </a:xfrm>
-          <a:prstGeom prst="rect">
-            <a:avLst/>
-          </a:prstGeom>
-          <a:noFill/>
-          <a:ln/>
-        </p:spPr>
-        <p:txBody>
-          <a:bodyPr wrap="square" lIns="0" tIns="0" rIns="0" bIns="0" rtlCol="0" anchor="ctr"/>
-          <a:lstStyle/>
-          <a:p>
-            <a:pPr indent="0" marL="0">
-              <a:lnSpc>
-                <a:spcPts val="1100"/>
-              </a:lnSpc>
-              <a:buNone/>
-            </a:pPr>
-            <a:r>
-              <a:rPr lang="en-US" sz="950" dirty="0">
-                <a:solidFill>
-                  <a:srgbClr val="333333"/>
-                </a:solidFill>
-                <a:latin typeface="Calibri" pitchFamily="34" charset="0"/>
-                <a:ea typeface="Calibri" pitchFamily="34" charset="-122"/>
-                <a:cs typeface="Calibri" pitchFamily="34" charset="-120"/>
-              </a:rPr>
-              <a:t>React 18 · TypeScript · Vite · Tailwind</a:t>
-            </a:r>
-            <a:endParaRPr lang="en-US" sz="950" dirty="0"/>
-          </a:p>
-        </p:txBody>
-      </p:sp>
-      <p:sp>
-        <p:nvSpPr>
-          <p:cNvPr id="15" name="Shape 12"/>
-          <p:cNvSpPr/>
-          <p:nvPr/>
-        </p:nvSpPr>
-        <p:spPr>
-          <a:xfrm>
-            <a:off x="3767328" y="1298448"/>
-            <a:ext cx="3291840" cy="475488"/>
+          <p:cNvPr id="18" name="Shape 15"/>
+          <p:cNvSpPr/>
+          <p:nvPr/>
+        </p:nvSpPr>
+        <p:spPr>
+          <a:xfrm>
+            <a:off x="2368296" y="1225296"/>
+            <a:ext cx="1828800" cy="1024128"/>
           </a:xfrm>
           <a:prstGeom prst="roundRect">
             <a:avLst>
-              <a:gd name="adj" fmla="val 5769"/>
+              <a:gd name="adj" fmla="val 2679"/>
             </a:avLst>
           </a:prstGeom>
           <a:solidFill>
@@ -5103,38 +5369,178 @@
       </p:sp>
       <p:sp>
         <p:nvSpPr>
-          <p:cNvPr id="16" name="Text 13"/>
-          <p:cNvSpPr/>
-          <p:nvPr/>
-        </p:nvSpPr>
-        <p:spPr>
-          <a:xfrm>
-            <a:off x="3895344" y="1316736"/>
-            <a:ext cx="1060704" cy="438912"/>
-          </a:xfrm>
-          <a:prstGeom prst="rect">
-            <a:avLst/>
-          </a:prstGeom>
-          <a:noFill/>
-          <a:ln/>
-        </p:spPr>
-        <p:txBody>
-          <a:bodyPr wrap="square" lIns="0" tIns="0" rIns="0" bIns="0" rtlCol="0" anchor="ctr"/>
-          <a:lstStyle/>
-          <a:p>
-            <a:pPr indent="0" marL="0">
-              <a:buNone/>
-            </a:pPr>
-            <a:r>
-              <a:rPr lang="en-US" sz="1000" b="1" dirty="0">
-                <a:solidFill>
-                  <a:srgbClr val="1F497D"/>
-                </a:solidFill>
-                <a:latin typeface="Calibri" pitchFamily="34" charset="0"/>
-                <a:ea typeface="Calibri" pitchFamily="34" charset="-122"/>
-                <a:cs typeface="Calibri" pitchFamily="34" charset="-120"/>
-              </a:rPr>
-              <a:t>Orbital engine</a:t>
+          <p:cNvPr id="19" name="Shape 16"/>
+          <p:cNvSpPr/>
+          <p:nvPr/>
+        </p:nvSpPr>
+        <p:spPr>
+          <a:xfrm>
+            <a:off x="2478024" y="1325880"/>
+            <a:ext cx="219456" cy="219456"/>
+          </a:xfrm>
+          <a:prstGeom prst="ellipse">
+            <a:avLst/>
+          </a:prstGeom>
+          <a:solidFill>
+            <a:srgbClr val="3D73A8"/>
+          </a:solidFill>
+          <a:ln/>
+        </p:spPr>
+      </p:sp>
+      <p:sp>
+        <p:nvSpPr>
+          <p:cNvPr id="20" name="Text 17"/>
+          <p:cNvSpPr/>
+          <p:nvPr/>
+        </p:nvSpPr>
+        <p:spPr>
+          <a:xfrm>
+            <a:off x="2478024" y="1325880"/>
+            <a:ext cx="219456" cy="219456"/>
+          </a:xfrm>
+          <a:prstGeom prst="rect">
+            <a:avLst/>
+          </a:prstGeom>
+          <a:noFill/>
+          <a:ln/>
+        </p:spPr>
+        <p:txBody>
+          <a:bodyPr wrap="square" lIns="0" tIns="0" rIns="0" bIns="0" rtlCol="0" anchor="ctr"/>
+          <a:lstStyle/>
+          <a:p>
+            <a:pPr algn="ctr" indent="0" marL="0">
+              <a:buNone/>
+            </a:pPr>
+            <a:r>
+              <a:rPr lang="en-US" sz="950" b="1" dirty="0">
+                <a:solidFill>
+                  <a:srgbClr val="FFFFFF"/>
+                </a:solidFill>
+                <a:latin typeface="Calibri" pitchFamily="34" charset="0"/>
+                <a:ea typeface="Calibri" pitchFamily="34" charset="-122"/>
+                <a:cs typeface="Calibri" pitchFamily="34" charset="-120"/>
+              </a:rPr>
+              <a:t>2</a:t>
+            </a:r>
+            <a:endParaRPr lang="en-US" sz="950" dirty="0"/>
+          </a:p>
+        </p:txBody>
+      </p:sp>
+      <p:sp>
+        <p:nvSpPr>
+          <p:cNvPr id="21" name="Text 18"/>
+          <p:cNvSpPr/>
+          <p:nvPr/>
+        </p:nvSpPr>
+        <p:spPr>
+          <a:xfrm>
+            <a:off x="2770632" y="1325880"/>
+            <a:ext cx="1316736" cy="219456"/>
+          </a:xfrm>
+          <a:prstGeom prst="rect">
+            <a:avLst/>
+          </a:prstGeom>
+          <a:noFill/>
+          <a:ln/>
+        </p:spPr>
+        <p:txBody>
+          <a:bodyPr wrap="square" lIns="0" tIns="0" rIns="0" bIns="0" rtlCol="0" anchor="ctr"/>
+          <a:lstStyle/>
+          <a:p>
+            <a:pPr indent="0" marL="0">
+              <a:buNone/>
+            </a:pPr>
+            <a:r>
+              <a:rPr lang="en-US" sz="1050" b="1" spc="40" kern="0" dirty="0">
+                <a:solidFill>
+                  <a:srgbClr val="3D73A8"/>
+                </a:solidFill>
+                <a:latin typeface="Calibri" pitchFamily="34" charset="0"/>
+                <a:ea typeface="Calibri" pitchFamily="34" charset="-122"/>
+                <a:cs typeface="Calibri" pitchFamily="34" charset="-120"/>
+              </a:rPr>
+              <a:t>PARSE</a:t>
+            </a:r>
+            <a:endParaRPr lang="en-US" sz="1050" dirty="0"/>
+          </a:p>
+        </p:txBody>
+      </p:sp>
+      <p:sp>
+        <p:nvSpPr>
+          <p:cNvPr id="22" name="Text 19"/>
+          <p:cNvSpPr/>
+          <p:nvPr/>
+        </p:nvSpPr>
+        <p:spPr>
+          <a:xfrm>
+            <a:off x="2478024" y="1600200"/>
+            <a:ext cx="1609344" cy="548640"/>
+          </a:xfrm>
+          <a:prstGeom prst="rect">
+            <a:avLst/>
+          </a:prstGeom>
+          <a:noFill/>
+          <a:ln/>
+        </p:spPr>
+        <p:txBody>
+          <a:bodyPr wrap="square" lIns="0" tIns="0" rIns="0" bIns="0" rtlCol="0" anchor="t"/>
+          <a:lstStyle/>
+          <a:p>
+            <a:pPr indent="0" marL="0">
+              <a:lnSpc>
+                <a:spcPts val="1050"/>
+              </a:lnSpc>
+              <a:buNone/>
+            </a:pPr>
+            <a:r>
+              <a:rPr lang="en-US" sz="850" dirty="0">
+                <a:solidFill>
+                  <a:srgbClr val="333333"/>
+                </a:solidFill>
+                <a:latin typeface="Calibri" pitchFamily="34" charset="0"/>
+                <a:ea typeface="Calibri" pitchFamily="34" charset="-122"/>
+                <a:cs typeface="Calibri" pitchFamily="34" charset="-120"/>
+              </a:rPr>
+              <a:t>satellite.js turns each element set into an SGP4 satrec. TypeScript types from here on.</a:t>
+            </a:r>
+            <a:endParaRPr lang="en-US" sz="850" dirty="0"/>
+          </a:p>
+        </p:txBody>
+      </p:sp>
+      <p:sp>
+        <p:nvSpPr>
+          <p:cNvPr id="23" name="Text 20"/>
+          <p:cNvSpPr/>
+          <p:nvPr/>
+        </p:nvSpPr>
+        <p:spPr>
+          <a:xfrm>
+            <a:off x="4197096" y="1225296"/>
+            <a:ext cx="228600" cy="1024128"/>
+          </a:xfrm>
+          <a:prstGeom prst="rect">
+            <a:avLst/>
+          </a:prstGeom>
+          <a:noFill/>
+          <a:ln/>
+        </p:spPr>
+        <p:txBody>
+          <a:bodyPr wrap="square" lIns="0" tIns="0" rIns="0" bIns="0" rtlCol="0" anchor="ctr"/>
+          <a:lstStyle/>
+          <a:p>
+            <a:pPr algn="ctr" indent="0" marL="0">
+              <a:buNone/>
+            </a:pPr>
+            <a:r>
+              <a:rPr lang="en-US" sz="1000" dirty="0">
+                <a:solidFill>
+                  <a:srgbClr val="A8B2BE"/>
+                </a:solidFill>
+                <a:latin typeface="Calibri" pitchFamily="34" charset="0"/>
+                <a:ea typeface="Calibri" pitchFamily="34" charset="-122"/>
+                <a:cs typeface="Calibri" pitchFamily="34" charset="-120"/>
+              </a:rPr>
+              <a:t>▶</a:t>
             </a:r>
             <a:endParaRPr lang="en-US" sz="1000" dirty="0"/>
           </a:p>
@@ -5142,60 +5548,18 @@
       </p:sp>
       <p:sp>
         <p:nvSpPr>
-          <p:cNvPr id="17" name="Text 14"/>
-          <p:cNvSpPr/>
-          <p:nvPr/>
-        </p:nvSpPr>
-        <p:spPr>
-          <a:xfrm>
-            <a:off x="4974336" y="1316736"/>
-            <a:ext cx="1975104" cy="438912"/>
-          </a:xfrm>
-          <a:prstGeom prst="rect">
-            <a:avLst/>
-          </a:prstGeom>
-          <a:noFill/>
-          <a:ln/>
-        </p:spPr>
-        <p:txBody>
-          <a:bodyPr wrap="square" lIns="0" tIns="0" rIns="0" bIns="0" rtlCol="0" anchor="ctr"/>
-          <a:lstStyle/>
-          <a:p>
-            <a:pPr indent="0" marL="0">
-              <a:lnSpc>
-                <a:spcPts val="1100"/>
-              </a:lnSpc>
-              <a:buNone/>
-            </a:pPr>
-            <a:r>
-              <a:rPr lang="en-US" sz="950" dirty="0">
-                <a:solidFill>
-                  <a:srgbClr val="333333"/>
-                </a:solidFill>
-                <a:latin typeface="Calibri" pitchFamily="34" charset="0"/>
-                <a:ea typeface="Calibri" pitchFamily="34" charset="-122"/>
-                <a:cs typeface="Calibri" pitchFamily="34" charset="-120"/>
-              </a:rPr>
-              <a:t>SGP4 (satellite.js, AIAA 2006-6753)</a:t>
-            </a:r>
-            <a:endParaRPr lang="en-US" sz="950" dirty="0"/>
-          </a:p>
-        </p:txBody>
-      </p:sp>
-      <p:sp>
-        <p:nvSpPr>
-          <p:cNvPr id="18" name="Shape 15"/>
-          <p:cNvSpPr/>
-          <p:nvPr/>
-        </p:nvSpPr>
-        <p:spPr>
-          <a:xfrm>
-            <a:off x="7223760" y="1298448"/>
-            <a:ext cx="3291840" cy="475488"/>
+          <p:cNvPr id="24" name="Shape 21"/>
+          <p:cNvSpPr/>
+          <p:nvPr/>
+        </p:nvSpPr>
+        <p:spPr>
+          <a:xfrm>
+            <a:off x="4425696" y="1225296"/>
+            <a:ext cx="1828800" cy="1024128"/>
           </a:xfrm>
           <a:prstGeom prst="roundRect">
             <a:avLst>
-              <a:gd name="adj" fmla="val 5769"/>
+              <a:gd name="adj" fmla="val 2679"/>
             </a:avLst>
           </a:prstGeom>
           <a:solidFill>
@@ -5211,38 +5575,178 @@
       </p:sp>
       <p:sp>
         <p:nvSpPr>
-          <p:cNvPr id="19" name="Text 16"/>
-          <p:cNvSpPr/>
-          <p:nvPr/>
-        </p:nvSpPr>
-        <p:spPr>
-          <a:xfrm>
-            <a:off x="7351776" y="1316736"/>
-            <a:ext cx="1060704" cy="438912"/>
-          </a:xfrm>
-          <a:prstGeom prst="rect">
-            <a:avLst/>
-          </a:prstGeom>
-          <a:noFill/>
-          <a:ln/>
-        </p:spPr>
-        <p:txBody>
-          <a:bodyPr wrap="square" lIns="0" tIns="0" rIns="0" bIns="0" rtlCol="0" anchor="ctr"/>
-          <a:lstStyle/>
-          <a:p>
-            <a:pPr indent="0" marL="0">
-              <a:buNone/>
-            </a:pPr>
-            <a:r>
-              <a:rPr lang="en-US" sz="1000" b="1" dirty="0">
-                <a:solidFill>
-                  <a:srgbClr val="1F497D"/>
-                </a:solidFill>
-                <a:latin typeface="Calibri" pitchFamily="34" charset="0"/>
-                <a:ea typeface="Calibri" pitchFamily="34" charset="-122"/>
-                <a:cs typeface="Calibri" pitchFamily="34" charset="-120"/>
-              </a:rPr>
-              <a:t>Compute</a:t>
+          <p:cNvPr id="25" name="Shape 22"/>
+          <p:cNvSpPr/>
+          <p:nvPr/>
+        </p:nvSpPr>
+        <p:spPr>
+          <a:xfrm>
+            <a:off x="4535424" y="1325880"/>
+            <a:ext cx="219456" cy="219456"/>
+          </a:xfrm>
+          <a:prstGeom prst="ellipse">
+            <a:avLst/>
+          </a:prstGeom>
+          <a:solidFill>
+            <a:srgbClr val="0070C0"/>
+          </a:solidFill>
+          <a:ln/>
+        </p:spPr>
+      </p:sp>
+      <p:sp>
+        <p:nvSpPr>
+          <p:cNvPr id="26" name="Text 23"/>
+          <p:cNvSpPr/>
+          <p:nvPr/>
+        </p:nvSpPr>
+        <p:spPr>
+          <a:xfrm>
+            <a:off x="4535424" y="1325880"/>
+            <a:ext cx="219456" cy="219456"/>
+          </a:xfrm>
+          <a:prstGeom prst="rect">
+            <a:avLst/>
+          </a:prstGeom>
+          <a:noFill/>
+          <a:ln/>
+        </p:spPr>
+        <p:txBody>
+          <a:bodyPr wrap="square" lIns="0" tIns="0" rIns="0" bIns="0" rtlCol="0" anchor="ctr"/>
+          <a:lstStyle/>
+          <a:p>
+            <a:pPr algn="ctr" indent="0" marL="0">
+              <a:buNone/>
+            </a:pPr>
+            <a:r>
+              <a:rPr lang="en-US" sz="950" b="1" dirty="0">
+                <a:solidFill>
+                  <a:srgbClr val="FFFFFF"/>
+                </a:solidFill>
+                <a:latin typeface="Calibri" pitchFamily="34" charset="0"/>
+                <a:ea typeface="Calibri" pitchFamily="34" charset="-122"/>
+                <a:cs typeface="Calibri" pitchFamily="34" charset="-120"/>
+              </a:rPr>
+              <a:t>3</a:t>
+            </a:r>
+            <a:endParaRPr lang="en-US" sz="950" dirty="0"/>
+          </a:p>
+        </p:txBody>
+      </p:sp>
+      <p:sp>
+        <p:nvSpPr>
+          <p:cNvPr id="27" name="Text 24"/>
+          <p:cNvSpPr/>
+          <p:nvPr/>
+        </p:nvSpPr>
+        <p:spPr>
+          <a:xfrm>
+            <a:off x="4828032" y="1325880"/>
+            <a:ext cx="1316736" cy="219456"/>
+          </a:xfrm>
+          <a:prstGeom prst="rect">
+            <a:avLst/>
+          </a:prstGeom>
+          <a:noFill/>
+          <a:ln/>
+        </p:spPr>
+        <p:txBody>
+          <a:bodyPr wrap="square" lIns="0" tIns="0" rIns="0" bIns="0" rtlCol="0" anchor="ctr"/>
+          <a:lstStyle/>
+          <a:p>
+            <a:pPr indent="0" marL="0">
+              <a:buNone/>
+            </a:pPr>
+            <a:r>
+              <a:rPr lang="en-US" sz="1050" b="1" spc="40" kern="0" dirty="0">
+                <a:solidFill>
+                  <a:srgbClr val="0070C0"/>
+                </a:solidFill>
+                <a:latin typeface="Calibri" pitchFamily="34" charset="0"/>
+                <a:ea typeface="Calibri" pitchFamily="34" charset="-122"/>
+                <a:cs typeface="Calibri" pitchFamily="34" charset="-120"/>
+              </a:rPr>
+              <a:t>SCREEN</a:t>
+            </a:r>
+            <a:endParaRPr lang="en-US" sz="1050" dirty="0"/>
+          </a:p>
+        </p:txBody>
+      </p:sp>
+      <p:sp>
+        <p:nvSpPr>
+          <p:cNvPr id="28" name="Text 25"/>
+          <p:cNvSpPr/>
+          <p:nvPr/>
+        </p:nvSpPr>
+        <p:spPr>
+          <a:xfrm>
+            <a:off x="4535424" y="1600200"/>
+            <a:ext cx="1609344" cy="548640"/>
+          </a:xfrm>
+          <a:prstGeom prst="rect">
+            <a:avLst/>
+          </a:prstGeom>
+          <a:noFill/>
+          <a:ln/>
+        </p:spPr>
+        <p:txBody>
+          <a:bodyPr wrap="square" lIns="0" tIns="0" rIns="0" bIns="0" rtlCol="0" anchor="t"/>
+          <a:lstStyle/>
+          <a:p>
+            <a:pPr indent="0" marL="0">
+              <a:lnSpc>
+                <a:spcPts val="1050"/>
+              </a:lnSpc>
+              <a:buNone/>
+            </a:pPr>
+            <a:r>
+              <a:rPr lang="en-US" sz="850" dirty="0">
+                <a:solidFill>
+                  <a:srgbClr val="333333"/>
+                </a:solidFill>
+                <a:latin typeface="Calibri" pitchFamily="34" charset="0"/>
+                <a:ea typeface="Calibri" pitchFamily="34" charset="-122"/>
+                <a:cs typeface="Calibri" pitchFamily="34" charset="-120"/>
+              </a:rPr>
+              <a:t>Web Worker, off the main thread: perigee–apogee filter, 60 s sweep, bisection to exact TCA.</a:t>
+            </a:r>
+            <a:endParaRPr lang="en-US" sz="850" dirty="0"/>
+          </a:p>
+        </p:txBody>
+      </p:sp>
+      <p:sp>
+        <p:nvSpPr>
+          <p:cNvPr id="29" name="Text 26"/>
+          <p:cNvSpPr/>
+          <p:nvPr/>
+        </p:nvSpPr>
+        <p:spPr>
+          <a:xfrm>
+            <a:off x="6254496" y="1225296"/>
+            <a:ext cx="228600" cy="1024128"/>
+          </a:xfrm>
+          <a:prstGeom prst="rect">
+            <a:avLst/>
+          </a:prstGeom>
+          <a:noFill/>
+          <a:ln/>
+        </p:spPr>
+        <p:txBody>
+          <a:bodyPr wrap="square" lIns="0" tIns="0" rIns="0" bIns="0" rtlCol="0" anchor="ctr"/>
+          <a:lstStyle/>
+          <a:p>
+            <a:pPr algn="ctr" indent="0" marL="0">
+              <a:buNone/>
+            </a:pPr>
+            <a:r>
+              <a:rPr lang="en-US" sz="1000" dirty="0">
+                <a:solidFill>
+                  <a:srgbClr val="A8B2BE"/>
+                </a:solidFill>
+                <a:latin typeface="Calibri" pitchFamily="34" charset="0"/>
+                <a:ea typeface="Calibri" pitchFamily="34" charset="-122"/>
+                <a:cs typeface="Calibri" pitchFamily="34" charset="-120"/>
+              </a:rPr>
+              <a:t>▶</a:t>
             </a:r>
             <a:endParaRPr lang="en-US" sz="1000" dirty="0"/>
           </a:p>
@@ -5250,60 +5754,18 @@
       </p:sp>
       <p:sp>
         <p:nvSpPr>
-          <p:cNvPr id="20" name="Text 17"/>
-          <p:cNvSpPr/>
-          <p:nvPr/>
-        </p:nvSpPr>
-        <p:spPr>
-          <a:xfrm>
-            <a:off x="8430768" y="1316736"/>
-            <a:ext cx="1975104" cy="438912"/>
-          </a:xfrm>
-          <a:prstGeom prst="rect">
-            <a:avLst/>
-          </a:prstGeom>
-          <a:noFill/>
-          <a:ln/>
-        </p:spPr>
-        <p:txBody>
-          <a:bodyPr wrap="square" lIns="0" tIns="0" rIns="0" bIns="0" rtlCol="0" anchor="ctr"/>
-          <a:lstStyle/>
-          <a:p>
-            <a:pPr indent="0" marL="0">
-              <a:lnSpc>
-                <a:spcPts val="1100"/>
-              </a:lnSpc>
-              <a:buNone/>
-            </a:pPr>
-            <a:r>
-              <a:rPr lang="en-US" sz="950" dirty="0">
-                <a:solidFill>
-                  <a:srgbClr val="333333"/>
-                </a:solidFill>
-                <a:latin typeface="Calibri" pitchFamily="34" charset="0"/>
-                <a:ea typeface="Calibri" pitchFamily="34" charset="-122"/>
-                <a:cs typeface="Calibri" pitchFamily="34" charset="-120"/>
-              </a:rPr>
-              <a:t>Web Worker — off the main thread</a:t>
-            </a:r>
-            <a:endParaRPr lang="en-US" sz="950" dirty="0"/>
-          </a:p>
-        </p:txBody>
-      </p:sp>
-      <p:sp>
-        <p:nvSpPr>
-          <p:cNvPr id="21" name="Shape 18"/>
-          <p:cNvSpPr/>
-          <p:nvPr/>
-        </p:nvSpPr>
-        <p:spPr>
-          <a:xfrm>
-            <a:off x="310896" y="1865376"/>
-            <a:ext cx="3291840" cy="475488"/>
+          <p:cNvPr id="30" name="Shape 27"/>
+          <p:cNvSpPr/>
+          <p:nvPr/>
+        </p:nvSpPr>
+        <p:spPr>
+          <a:xfrm>
+            <a:off x="6483096" y="1225296"/>
+            <a:ext cx="1828800" cy="1024128"/>
           </a:xfrm>
           <a:prstGeom prst="roundRect">
             <a:avLst>
-              <a:gd name="adj" fmla="val 5769"/>
+              <a:gd name="adj" fmla="val 2679"/>
             </a:avLst>
           </a:prstGeom>
           <a:solidFill>
@@ -5319,38 +5781,178 @@
       </p:sp>
       <p:sp>
         <p:nvSpPr>
-          <p:cNvPr id="22" name="Text 19"/>
-          <p:cNvSpPr/>
-          <p:nvPr/>
-        </p:nvSpPr>
-        <p:spPr>
-          <a:xfrm>
-            <a:off x="438912" y="1883664"/>
-            <a:ext cx="1060704" cy="438912"/>
-          </a:xfrm>
-          <a:prstGeom prst="rect">
-            <a:avLst/>
-          </a:prstGeom>
-          <a:noFill/>
-          <a:ln/>
-        </p:spPr>
-        <p:txBody>
-          <a:bodyPr wrap="square" lIns="0" tIns="0" rIns="0" bIns="0" rtlCol="0" anchor="ctr"/>
-          <a:lstStyle/>
-          <a:p>
-            <a:pPr indent="0" marL="0">
-              <a:buNone/>
-            </a:pPr>
-            <a:r>
-              <a:rPr lang="en-US" sz="1000" b="1" dirty="0">
-                <a:solidFill>
-                  <a:srgbClr val="1F497D"/>
-                </a:solidFill>
-                <a:latin typeface="Calibri" pitchFamily="34" charset="0"/>
-                <a:ea typeface="Calibri" pitchFamily="34" charset="-122"/>
-                <a:cs typeface="Calibri" pitchFamily="34" charset="-120"/>
-              </a:rPr>
-              <a:t>Data</a:t>
+          <p:cNvPr id="31" name="Shape 28"/>
+          <p:cNvSpPr/>
+          <p:nvPr/>
+        </p:nvSpPr>
+        <p:spPr>
+          <a:xfrm>
+            <a:off x="6592824" y="1325880"/>
+            <a:ext cx="219456" cy="219456"/>
+          </a:xfrm>
+          <a:prstGeom prst="ellipse">
+            <a:avLst/>
+          </a:prstGeom>
+          <a:solidFill>
+            <a:srgbClr val="B25E00"/>
+          </a:solidFill>
+          <a:ln/>
+        </p:spPr>
+      </p:sp>
+      <p:sp>
+        <p:nvSpPr>
+          <p:cNvPr id="32" name="Text 29"/>
+          <p:cNvSpPr/>
+          <p:nvPr/>
+        </p:nvSpPr>
+        <p:spPr>
+          <a:xfrm>
+            <a:off x="6592824" y="1325880"/>
+            <a:ext cx="219456" cy="219456"/>
+          </a:xfrm>
+          <a:prstGeom prst="rect">
+            <a:avLst/>
+          </a:prstGeom>
+          <a:noFill/>
+          <a:ln/>
+        </p:spPr>
+        <p:txBody>
+          <a:bodyPr wrap="square" lIns="0" tIns="0" rIns="0" bIns="0" rtlCol="0" anchor="ctr"/>
+          <a:lstStyle/>
+          <a:p>
+            <a:pPr algn="ctr" indent="0" marL="0">
+              <a:buNone/>
+            </a:pPr>
+            <a:r>
+              <a:rPr lang="en-US" sz="950" b="1" dirty="0">
+                <a:solidFill>
+                  <a:srgbClr val="FFFFFF"/>
+                </a:solidFill>
+                <a:latin typeface="Calibri" pitchFamily="34" charset="0"/>
+                <a:ea typeface="Calibri" pitchFamily="34" charset="-122"/>
+                <a:cs typeface="Calibri" pitchFamily="34" charset="-120"/>
+              </a:rPr>
+              <a:t>4</a:t>
+            </a:r>
+            <a:endParaRPr lang="en-US" sz="950" dirty="0"/>
+          </a:p>
+        </p:txBody>
+      </p:sp>
+      <p:sp>
+        <p:nvSpPr>
+          <p:cNvPr id="33" name="Text 30"/>
+          <p:cNvSpPr/>
+          <p:nvPr/>
+        </p:nvSpPr>
+        <p:spPr>
+          <a:xfrm>
+            <a:off x="6885432" y="1325880"/>
+            <a:ext cx="1316736" cy="219456"/>
+          </a:xfrm>
+          <a:prstGeom prst="rect">
+            <a:avLst/>
+          </a:prstGeom>
+          <a:noFill/>
+          <a:ln/>
+        </p:spPr>
+        <p:txBody>
+          <a:bodyPr wrap="square" lIns="0" tIns="0" rIns="0" bIns="0" rtlCol="0" anchor="ctr"/>
+          <a:lstStyle/>
+          <a:p>
+            <a:pPr indent="0" marL="0">
+              <a:buNone/>
+            </a:pPr>
+            <a:r>
+              <a:rPr lang="en-US" sz="1050" b="1" spc="40" kern="0" dirty="0">
+                <a:solidFill>
+                  <a:srgbClr val="B25E00"/>
+                </a:solidFill>
+                <a:latin typeface="Calibri" pitchFamily="34" charset="0"/>
+                <a:ea typeface="Calibri" pitchFamily="34" charset="-122"/>
+                <a:cs typeface="Calibri" pitchFamily="34" charset="-120"/>
+              </a:rPr>
+              <a:t>RANK</a:t>
+            </a:r>
+            <a:endParaRPr lang="en-US" sz="1050" dirty="0"/>
+          </a:p>
+        </p:txBody>
+      </p:sp>
+      <p:sp>
+        <p:nvSpPr>
+          <p:cNvPr id="34" name="Text 31"/>
+          <p:cNvSpPr/>
+          <p:nvPr/>
+        </p:nvSpPr>
+        <p:spPr>
+          <a:xfrm>
+            <a:off x="6592824" y="1600200"/>
+            <a:ext cx="1609344" cy="548640"/>
+          </a:xfrm>
+          <a:prstGeom prst="rect">
+            <a:avLst/>
+          </a:prstGeom>
+          <a:noFill/>
+          <a:ln/>
+        </p:spPr>
+        <p:txBody>
+          <a:bodyPr wrap="square" lIns="0" tIns="0" rIns="0" bIns="0" rtlCol="0" anchor="t"/>
+          <a:lstStyle/>
+          <a:p>
+            <a:pPr indent="0" marL="0">
+              <a:lnSpc>
+                <a:spcPts val="1050"/>
+              </a:lnSpc>
+              <a:buNone/>
+            </a:pPr>
+            <a:r>
+              <a:rPr lang="en-US" sz="850" dirty="0">
+                <a:solidFill>
+                  <a:srgbClr val="333333"/>
+                </a:solidFill>
+                <a:latin typeface="Calibri" pitchFamily="34" charset="0"/>
+                <a:ea typeface="Calibri" pitchFamily="34" charset="-122"/>
+                <a:cs typeface="Calibri" pitchFamily="34" charset="-120"/>
+              </a:rPr>
+              <a:t>Foster collision probability, severity band, 0–100 score, and the counterfactual behind it.</a:t>
+            </a:r>
+            <a:endParaRPr lang="en-US" sz="850" dirty="0"/>
+          </a:p>
+        </p:txBody>
+      </p:sp>
+      <p:sp>
+        <p:nvSpPr>
+          <p:cNvPr id="35" name="Text 32"/>
+          <p:cNvSpPr/>
+          <p:nvPr/>
+        </p:nvSpPr>
+        <p:spPr>
+          <a:xfrm>
+            <a:off x="8311896" y="1225296"/>
+            <a:ext cx="228600" cy="1024128"/>
+          </a:xfrm>
+          <a:prstGeom prst="rect">
+            <a:avLst/>
+          </a:prstGeom>
+          <a:noFill/>
+          <a:ln/>
+        </p:spPr>
+        <p:txBody>
+          <a:bodyPr wrap="square" lIns="0" tIns="0" rIns="0" bIns="0" rtlCol="0" anchor="ctr"/>
+          <a:lstStyle/>
+          <a:p>
+            <a:pPr algn="ctr" indent="0" marL="0">
+              <a:buNone/>
+            </a:pPr>
+            <a:r>
+              <a:rPr lang="en-US" sz="1000" dirty="0">
+                <a:solidFill>
+                  <a:srgbClr val="A8B2BE"/>
+                </a:solidFill>
+                <a:latin typeface="Calibri" pitchFamily="34" charset="0"/>
+                <a:ea typeface="Calibri" pitchFamily="34" charset="-122"/>
+                <a:cs typeface="Calibri" pitchFamily="34" charset="-120"/>
+              </a:rPr>
+              <a:t>▶</a:t>
             </a:r>
             <a:endParaRPr lang="en-US" sz="1000" dirty="0"/>
           </a:p>
@@ -5358,60 +5960,18 @@
       </p:sp>
       <p:sp>
         <p:nvSpPr>
-          <p:cNvPr id="23" name="Text 20"/>
-          <p:cNvSpPr/>
-          <p:nvPr/>
-        </p:nvSpPr>
-        <p:spPr>
-          <a:xfrm>
-            <a:off x="1517904" y="1883664"/>
-            <a:ext cx="1975104" cy="438912"/>
-          </a:xfrm>
-          <a:prstGeom prst="rect">
-            <a:avLst/>
-          </a:prstGeom>
-          <a:noFill/>
-          <a:ln/>
-        </p:spPr>
-        <p:txBody>
-          <a:bodyPr wrap="square" lIns="0" tIns="0" rIns="0" bIns="0" rtlCol="0" anchor="ctr"/>
-          <a:lstStyle/>
-          <a:p>
-            <a:pPr indent="0" marL="0">
-              <a:lnSpc>
-                <a:spcPts val="1100"/>
-              </a:lnSpc>
-              <a:buNone/>
-            </a:pPr>
-            <a:r>
-              <a:rPr lang="en-US" sz="950" dirty="0">
-                <a:solidFill>
-                  <a:srgbClr val="333333"/>
-                </a:solidFill>
-                <a:latin typeface="Calibri" pitchFamily="34" charset="0"/>
-                <a:ea typeface="Calibri" pitchFamily="34" charset="-122"/>
-                <a:cs typeface="Calibri" pitchFamily="34" charset="-120"/>
-              </a:rPr>
-              <a:t>CelesTrak GP two-line element sets (free, no sign-up)</a:t>
-            </a:r>
-            <a:endParaRPr lang="en-US" sz="950" dirty="0"/>
-          </a:p>
-        </p:txBody>
-      </p:sp>
-      <p:sp>
-        <p:nvSpPr>
-          <p:cNvPr id="24" name="Shape 21"/>
-          <p:cNvSpPr/>
-          <p:nvPr/>
-        </p:nvSpPr>
-        <p:spPr>
-          <a:xfrm>
-            <a:off x="3767328" y="1865376"/>
-            <a:ext cx="3291840" cy="475488"/>
+          <p:cNvPr id="36" name="Shape 33"/>
+          <p:cNvSpPr/>
+          <p:nvPr/>
+        </p:nvSpPr>
+        <p:spPr>
+          <a:xfrm>
+            <a:off x="8540496" y="1225296"/>
+            <a:ext cx="1828800" cy="1024128"/>
           </a:xfrm>
           <a:prstGeom prst="roundRect">
             <a:avLst>
-              <a:gd name="adj" fmla="val 5769"/>
+              <a:gd name="adj" fmla="val 2679"/>
             </a:avLst>
           </a:prstGeom>
           <a:solidFill>
@@ -5427,30 +5987,209 @@
       </p:sp>
       <p:sp>
         <p:nvSpPr>
-          <p:cNvPr id="25" name="Text 22"/>
-          <p:cNvSpPr/>
-          <p:nvPr/>
-        </p:nvSpPr>
-        <p:spPr>
-          <a:xfrm>
-            <a:off x="3895344" y="1883664"/>
-            <a:ext cx="1060704" cy="438912"/>
-          </a:xfrm>
-          <a:prstGeom prst="rect">
-            <a:avLst/>
-          </a:prstGeom>
-          <a:noFill/>
-          <a:ln/>
-        </p:spPr>
-        <p:txBody>
-          <a:bodyPr wrap="square" lIns="0" tIns="0" rIns="0" bIns="0" rtlCol="0" anchor="ctr"/>
-          <a:lstStyle/>
-          <a:p>
-            <a:pPr indent="0" marL="0">
-              <a:buNone/>
-            </a:pPr>
-            <a:r>
-              <a:rPr lang="en-US" sz="1000" b="1" dirty="0">
+          <p:cNvPr id="37" name="Shape 34"/>
+          <p:cNvSpPr/>
+          <p:nvPr/>
+        </p:nvSpPr>
+        <p:spPr>
+          <a:xfrm>
+            <a:off x="8650224" y="1325880"/>
+            <a:ext cx="219456" cy="219456"/>
+          </a:xfrm>
+          <a:prstGeom prst="ellipse">
+            <a:avLst/>
+          </a:prstGeom>
+          <a:solidFill>
+            <a:srgbClr val="1E7A4C"/>
+          </a:solidFill>
+          <a:ln/>
+        </p:spPr>
+      </p:sp>
+      <p:sp>
+        <p:nvSpPr>
+          <p:cNvPr id="38" name="Text 35"/>
+          <p:cNvSpPr/>
+          <p:nvPr/>
+        </p:nvSpPr>
+        <p:spPr>
+          <a:xfrm>
+            <a:off x="8650224" y="1325880"/>
+            <a:ext cx="219456" cy="219456"/>
+          </a:xfrm>
+          <a:prstGeom prst="rect">
+            <a:avLst/>
+          </a:prstGeom>
+          <a:noFill/>
+          <a:ln/>
+        </p:spPr>
+        <p:txBody>
+          <a:bodyPr wrap="square" lIns="0" tIns="0" rIns="0" bIns="0" rtlCol="0" anchor="ctr"/>
+          <a:lstStyle/>
+          <a:p>
+            <a:pPr algn="ctr" indent="0" marL="0">
+              <a:buNone/>
+            </a:pPr>
+            <a:r>
+              <a:rPr lang="en-US" sz="950" b="1" dirty="0">
+                <a:solidFill>
+                  <a:srgbClr val="FFFFFF"/>
+                </a:solidFill>
+                <a:latin typeface="Calibri" pitchFamily="34" charset="0"/>
+                <a:ea typeface="Calibri" pitchFamily="34" charset="-122"/>
+                <a:cs typeface="Calibri" pitchFamily="34" charset="-120"/>
+              </a:rPr>
+              <a:t>5</a:t>
+            </a:r>
+            <a:endParaRPr lang="en-US" sz="950" dirty="0"/>
+          </a:p>
+        </p:txBody>
+      </p:sp>
+      <p:sp>
+        <p:nvSpPr>
+          <p:cNvPr id="39" name="Text 36"/>
+          <p:cNvSpPr/>
+          <p:nvPr/>
+        </p:nvSpPr>
+        <p:spPr>
+          <a:xfrm>
+            <a:off x="8942832" y="1325880"/>
+            <a:ext cx="1316736" cy="219456"/>
+          </a:xfrm>
+          <a:prstGeom prst="rect">
+            <a:avLst/>
+          </a:prstGeom>
+          <a:noFill/>
+          <a:ln/>
+        </p:spPr>
+        <p:txBody>
+          <a:bodyPr wrap="square" lIns="0" tIns="0" rIns="0" bIns="0" rtlCol="0" anchor="ctr"/>
+          <a:lstStyle/>
+          <a:p>
+            <a:pPr indent="0" marL="0">
+              <a:buNone/>
+            </a:pPr>
+            <a:r>
+              <a:rPr lang="en-US" sz="1050" b="1" spc="40" kern="0" dirty="0">
+                <a:solidFill>
+                  <a:srgbClr val="1E7A4C"/>
+                </a:solidFill>
+                <a:latin typeface="Calibri" pitchFamily="34" charset="0"/>
+                <a:ea typeface="Calibri" pitchFamily="34" charset="-122"/>
+                <a:cs typeface="Calibri" pitchFamily="34" charset="-120"/>
+              </a:rPr>
+              <a:t>DELIVER</a:t>
+            </a:r>
+            <a:endParaRPr lang="en-US" sz="1050" dirty="0"/>
+          </a:p>
+        </p:txBody>
+      </p:sp>
+      <p:sp>
+        <p:nvSpPr>
+          <p:cNvPr id="40" name="Text 37"/>
+          <p:cNvSpPr/>
+          <p:nvPr/>
+        </p:nvSpPr>
+        <p:spPr>
+          <a:xfrm>
+            <a:off x="8650224" y="1600200"/>
+            <a:ext cx="1609344" cy="548640"/>
+          </a:xfrm>
+          <a:prstGeom prst="rect">
+            <a:avLst/>
+          </a:prstGeom>
+          <a:noFill/>
+          <a:ln/>
+        </p:spPr>
+        <p:txBody>
+          <a:bodyPr wrap="square" lIns="0" tIns="0" rIns="0" bIns="0" rtlCol="0" anchor="t"/>
+          <a:lstStyle/>
+          <a:p>
+            <a:pPr indent="0" marL="0">
+              <a:lnSpc>
+                <a:spcPts val="1050"/>
+              </a:lnSpc>
+              <a:buNone/>
+            </a:pPr>
+            <a:r>
+              <a:rPr lang="en-US" sz="850" dirty="0">
+                <a:solidFill>
+                  <a:srgbClr val="333333"/>
+                </a:solidFill>
+                <a:latin typeface="Calibri" pitchFamily="34" charset="0"/>
+                <a:ea typeface="Calibri" pitchFamily="34" charset="-122"/>
+                <a:cs typeface="Calibri" pitchFamily="34" charset="-120"/>
+              </a:rPr>
+              <a:t>React 18 · Vite · Tailwind. Static files, or one 1.7 MB offline HTML. CDM and CSV out.</a:t>
+            </a:r>
+            <a:endParaRPr lang="en-US" sz="850" dirty="0"/>
+          </a:p>
+        </p:txBody>
+      </p:sp>
+      <p:sp>
+        <p:nvSpPr>
+          <p:cNvPr id="41" name="Text 38"/>
+          <p:cNvSpPr/>
+          <p:nvPr/>
+        </p:nvSpPr>
+        <p:spPr>
+          <a:xfrm>
+            <a:off x="310896" y="2286000"/>
+            <a:ext cx="10058400" cy="219456"/>
+          </a:xfrm>
+          <a:prstGeom prst="rect">
+            <a:avLst/>
+          </a:prstGeom>
+          <a:noFill/>
+          <a:ln/>
+        </p:spPr>
+        <p:txBody>
+          <a:bodyPr wrap="square" lIns="0" tIns="0" rIns="0" bIns="0" rtlCol="0" anchor="ctr"/>
+          <a:lstStyle/>
+          <a:p>
+            <a:pPr indent="0" marL="0">
+              <a:buNone/>
+            </a:pPr>
+            <a:r>
+              <a:rPr lang="en-US" sz="950" i="1" dirty="0">
+                <a:solidFill>
+                  <a:srgbClr val="5A6673"/>
+                </a:solidFill>
+                <a:latin typeface="Calibri" pitchFamily="34" charset="0"/>
+                <a:ea typeface="Calibri" pitchFamily="34" charset="-122"/>
+                <a:cs typeface="Calibri" pitchFamily="34" charset="-120"/>
+              </a:rPr>
+              <a:t>Every stage runs in the browser tab. No server anywhere in this diagram — nothing to provision, secure or pay for, and it works with the network unplugged.</a:t>
+            </a:r>
+            <a:endParaRPr lang="en-US" sz="950" dirty="0"/>
+          </a:p>
+        </p:txBody>
+      </p:sp>
+      <p:sp>
+        <p:nvSpPr>
+          <p:cNvPr id="42" name="Text 39"/>
+          <p:cNvSpPr/>
+          <p:nvPr/>
+        </p:nvSpPr>
+        <p:spPr>
+          <a:xfrm>
+            <a:off x="310896" y="2542032"/>
+            <a:ext cx="292608" cy="292608"/>
+          </a:xfrm>
+          <a:prstGeom prst="rect">
+            <a:avLst/>
+          </a:prstGeom>
+          <a:noFill/>
+          <a:ln/>
+        </p:spPr>
+        <p:txBody>
+          <a:bodyPr wrap="square" lIns="0" tIns="0" rIns="0" bIns="0" rtlCol="0" anchor="ctr"/>
+          <a:lstStyle/>
+          <a:p>
+            <a:pPr indent="0" marL="0">
+              <a:buNone/>
+            </a:pPr>
+            <a:r>
+              <a:rPr lang="en-US" sz="1500" dirty="0">
                 <a:solidFill>
                   <a:srgbClr val="1F497D"/>
                 </a:solidFill>
@@ -5458,49 +6197,242 @@
                 <a:ea typeface="Calibri" pitchFamily="34" charset="-122"/>
                 <a:cs typeface="Calibri" pitchFamily="34" charset="-120"/>
               </a:rPr>
-              <a:t>Interop</a:t>
-            </a:r>
-            <a:endParaRPr lang="en-US" sz="1000" dirty="0"/>
-          </a:p>
-        </p:txBody>
-      </p:sp>
-      <p:sp>
-        <p:nvSpPr>
-          <p:cNvPr id="26" name="Text 23"/>
-          <p:cNvSpPr/>
-          <p:nvPr/>
-        </p:nvSpPr>
-        <p:spPr>
-          <a:xfrm>
-            <a:off x="4974336" y="1883664"/>
-            <a:ext cx="1975104" cy="438912"/>
-          </a:xfrm>
-          <a:prstGeom prst="rect">
-            <a:avLst/>
-          </a:prstGeom>
-          <a:noFill/>
-          <a:ln/>
-        </p:spPr>
-        <p:txBody>
-          <a:bodyPr wrap="square" lIns="0" tIns="0" rIns="0" bIns="0" rtlCol="0" anchor="ctr"/>
-          <a:lstStyle/>
-          <a:p>
-            <a:pPr indent="0" marL="0">
-              <a:lnSpc>
-                <a:spcPts val="1100"/>
-              </a:lnSpc>
+              <a:t>❖</a:t>
+            </a:r>
+            <a:endParaRPr lang="en-US" sz="1500" dirty="0"/>
+          </a:p>
+        </p:txBody>
+      </p:sp>
+      <p:sp>
+        <p:nvSpPr>
+          <p:cNvPr id="43" name="Text 40"/>
+          <p:cNvSpPr/>
+          <p:nvPr/>
+        </p:nvSpPr>
+        <p:spPr>
+          <a:xfrm>
+            <a:off x="621792" y="2542032"/>
+            <a:ext cx="9692640" cy="292608"/>
+          </a:xfrm>
+          <a:prstGeom prst="rect">
+            <a:avLst/>
+          </a:prstGeom>
+          <a:noFill/>
+          <a:ln/>
+        </p:spPr>
+        <p:txBody>
+          <a:bodyPr wrap="square" lIns="0" tIns="0" rIns="0" bIns="0" rtlCol="0" anchor="ctr"/>
+          <a:lstStyle/>
+          <a:p>
+            <a:pPr indent="0" marL="0">
+              <a:buNone/>
+            </a:pPr>
+            <a:r>
+              <a:rPr lang="en-US" sz="1650" b="1" u="sng" dirty="0">
+                <a:solidFill>
+                  <a:srgbClr val="1F497D"/>
+                </a:solidFill>
+                <a:latin typeface="Calibri" pitchFamily="34" charset="0"/>
+                <a:ea typeface="Calibri" pitchFamily="34" charset="-122"/>
+                <a:cs typeface="Calibri" pitchFamily="34" charset="-120"/>
+              </a:rPr>
+              <a:t>Methodology and process for implementation</a:t>
+            </a:r>
+            <a:endParaRPr lang="en-US" sz="1650" dirty="0"/>
+          </a:p>
+        </p:txBody>
+      </p:sp>
+      <p:sp>
+        <p:nvSpPr>
+          <p:cNvPr id="44" name="Text 41"/>
+          <p:cNvSpPr/>
+          <p:nvPr/>
+        </p:nvSpPr>
+        <p:spPr>
+          <a:xfrm>
+            <a:off x="310896" y="2962656"/>
+            <a:ext cx="1133856" cy="457200"/>
+          </a:xfrm>
+          <a:prstGeom prst="rect">
+            <a:avLst/>
+          </a:prstGeom>
+          <a:noFill/>
+          <a:ln/>
+        </p:spPr>
+        <p:txBody>
+          <a:bodyPr wrap="square" lIns="0" tIns="0" rIns="0" bIns="0" rtlCol="0" anchor="ctr"/>
+          <a:lstStyle/>
+          <a:p>
+            <a:pPr algn="r" indent="0" marL="0">
+              <a:buNone/>
+            </a:pPr>
+            <a:r>
+              <a:rPr lang="en-US" sz="1450" b="1" dirty="0">
+                <a:solidFill>
+                  <a:srgbClr val="2A4A6B"/>
+                </a:solidFill>
+                <a:latin typeface="Arial" pitchFamily="34" charset="0"/>
+                <a:ea typeface="Arial" pitchFamily="34" charset="-122"/>
+                <a:cs typeface="Arial" pitchFamily="34" charset="-120"/>
+              </a:rPr>
+              <a:t>368,511</a:t>
+            </a:r>
+            <a:endParaRPr lang="en-US" sz="1450" dirty="0"/>
+          </a:p>
+        </p:txBody>
+      </p:sp>
+      <p:sp>
+        <p:nvSpPr>
+          <p:cNvPr id="45" name="Text 42"/>
+          <p:cNvSpPr/>
+          <p:nvPr/>
+        </p:nvSpPr>
+        <p:spPr>
+          <a:xfrm>
+            <a:off x="1554480" y="2980944"/>
+            <a:ext cx="2084832" cy="201168"/>
+          </a:xfrm>
+          <a:prstGeom prst="rect">
+            <a:avLst/>
+          </a:prstGeom>
+          <a:noFill/>
+          <a:ln/>
+        </p:spPr>
+        <p:txBody>
+          <a:bodyPr wrap="square" lIns="0" tIns="0" rIns="0" bIns="0" rtlCol="0" anchor="ctr"/>
+          <a:lstStyle/>
+          <a:p>
+            <a:pPr indent="0" marL="0">
+              <a:buNone/>
+            </a:pPr>
+            <a:r>
+              <a:rPr lang="en-US" sz="900" b="1" spc="60" kern="0" dirty="0">
+                <a:solidFill>
+                  <a:srgbClr val="2A4A6B"/>
+                </a:solidFill>
+                <a:latin typeface="Calibri" pitchFamily="34" charset="0"/>
+                <a:ea typeface="Calibri" pitchFamily="34" charset="-122"/>
+                <a:cs typeface="Calibri" pitchFamily="34" charset="-120"/>
+              </a:rPr>
+              <a:t>ALL PAIRS</a:t>
+            </a:r>
+            <a:endParaRPr lang="en-US" sz="900" dirty="0"/>
+          </a:p>
+        </p:txBody>
+      </p:sp>
+      <p:sp>
+        <p:nvSpPr>
+          <p:cNvPr id="46" name="Text 43"/>
+          <p:cNvSpPr/>
+          <p:nvPr/>
+        </p:nvSpPr>
+        <p:spPr>
+          <a:xfrm>
+            <a:off x="1554480" y="3182112"/>
+            <a:ext cx="2121408" cy="219456"/>
+          </a:xfrm>
+          <a:prstGeom prst="rect">
+            <a:avLst/>
+          </a:prstGeom>
+          <a:noFill/>
+          <a:ln/>
+        </p:spPr>
+        <p:txBody>
+          <a:bodyPr wrap="square" lIns="0" tIns="0" rIns="0" bIns="0" rtlCol="0" anchor="ctr"/>
+          <a:lstStyle/>
+          <a:p>
+            <a:pPr indent="0" marL="0">
+              <a:buNone/>
+            </a:pPr>
+            <a:r>
+              <a:rPr lang="en-US" sz="850" dirty="0">
+                <a:solidFill>
+                  <a:srgbClr val="5A6673"/>
+                </a:solidFill>
+                <a:latin typeface="Calibri" pitchFamily="34" charset="0"/>
+                <a:ea typeface="Calibri" pitchFamily="34" charset="-122"/>
+                <a:cs typeface="Calibri" pitchFamily="34" charset="-120"/>
+              </a:rPr>
+              <a:t>859 objects, 72-hour horizon</a:t>
+            </a:r>
+            <a:endParaRPr lang="en-US" sz="850" dirty="0"/>
+          </a:p>
+        </p:txBody>
+      </p:sp>
+      <p:sp>
+        <p:nvSpPr>
+          <p:cNvPr id="47" name="Shape 44"/>
+          <p:cNvSpPr/>
+          <p:nvPr/>
+        </p:nvSpPr>
+        <p:spPr>
+          <a:xfrm>
+            <a:off x="3712464" y="3090672"/>
+            <a:ext cx="3584448" cy="201168"/>
+          </a:xfrm>
+          <a:prstGeom prst="rect">
+            <a:avLst/>
+          </a:prstGeom>
+          <a:solidFill>
+            <a:srgbClr val="EEF2F7"/>
+          </a:solidFill>
+          <a:ln/>
+        </p:spPr>
+      </p:sp>
+      <p:sp>
+        <p:nvSpPr>
+          <p:cNvPr id="48" name="Shape 45"/>
+          <p:cNvSpPr/>
+          <p:nvPr/>
+        </p:nvSpPr>
+        <p:spPr>
+          <a:xfrm>
+            <a:off x="3712464" y="3090672"/>
+            <a:ext cx="3584448" cy="201168"/>
+          </a:xfrm>
+          <a:prstGeom prst="rect">
+            <a:avLst/>
+          </a:prstGeom>
+          <a:solidFill>
+            <a:srgbClr val="9FB3C8"/>
+          </a:solidFill>
+          <a:ln/>
+        </p:spPr>
+      </p:sp>
+      <p:sp>
+        <p:nvSpPr>
+          <p:cNvPr id="49" name="Text 46"/>
+          <p:cNvSpPr/>
+          <p:nvPr/>
+        </p:nvSpPr>
+        <p:spPr>
+          <a:xfrm>
+            <a:off x="7370064" y="2962656"/>
+            <a:ext cx="603504" cy="457200"/>
+          </a:xfrm>
+          <a:prstGeom prst="rect">
+            <a:avLst/>
+          </a:prstGeom>
+          <a:noFill/>
+          <a:ln/>
+        </p:spPr>
+        <p:txBody>
+          <a:bodyPr wrap="square" lIns="0" tIns="0" rIns="0" bIns="0" rtlCol="0" anchor="ctr"/>
+          <a:lstStyle/>
+          <a:p>
+            <a:pPr indent="0" marL="0">
               <a:buNone/>
             </a:pPr>
             <a:r>
               <a:rPr lang="en-US" sz="950" dirty="0">
                 <a:solidFill>
-                  <a:srgbClr val="333333"/>
-                </a:solidFill>
-                <a:latin typeface="Calibri" pitchFamily="34" charset="0"/>
-                <a:ea typeface="Calibri" pitchFamily="34" charset="-122"/>
-                <a:cs typeface="Calibri" pitchFamily="34" charset="-120"/>
-              </a:rPr>
-              <a:t>CCSDS 508.0-B-1 Conjunction Data Message · CSV</a:t>
+                  <a:srgbClr val="5A6673"/>
+                </a:solidFill>
+                <a:latin typeface="Arial" pitchFamily="34" charset="0"/>
+                <a:ea typeface="Arial" pitchFamily="34" charset="-122"/>
+                <a:cs typeface="Arial" pitchFamily="34" charset="-120"/>
+              </a:rPr>
+              <a:t>100.000%</a:t>
             </a:r>
             <a:endParaRPr lang="en-US" sz="950" dirty="0"/>
           </a:p>
@@ -5508,18 +6440,645 @@
       </p:sp>
       <p:sp>
         <p:nvSpPr>
-          <p:cNvPr id="27" name="Shape 24"/>
-          <p:cNvSpPr/>
-          <p:nvPr/>
-        </p:nvSpPr>
-        <p:spPr>
-          <a:xfrm>
-            <a:off x="7223760" y="1865376"/>
-            <a:ext cx="3291840" cy="475488"/>
+          <p:cNvPr id="50" name="Text 47"/>
+          <p:cNvSpPr/>
+          <p:nvPr/>
+        </p:nvSpPr>
+        <p:spPr>
+          <a:xfrm>
+            <a:off x="310896" y="3529584"/>
+            <a:ext cx="1133856" cy="457200"/>
+          </a:xfrm>
+          <a:prstGeom prst="rect">
+            <a:avLst/>
+          </a:prstGeom>
+          <a:noFill/>
+          <a:ln/>
+        </p:spPr>
+        <p:txBody>
+          <a:bodyPr wrap="square" lIns="0" tIns="0" rIns="0" bIns="0" rtlCol="0" anchor="ctr"/>
+          <a:lstStyle/>
+          <a:p>
+            <a:pPr algn="r" indent="0" marL="0">
+              <a:buNone/>
+            </a:pPr>
+            <a:r>
+              <a:rPr lang="en-US" sz="1450" b="1" dirty="0">
+                <a:solidFill>
+                  <a:srgbClr val="2A4A6B"/>
+                </a:solidFill>
+                <a:latin typeface="Arial" pitchFamily="34" charset="0"/>
+                <a:ea typeface="Arial" pitchFamily="34" charset="-122"/>
+                <a:cs typeface="Arial" pitchFamily="34" charset="-120"/>
+              </a:rPr>
+              <a:t>368,491</a:t>
+            </a:r>
+            <a:endParaRPr lang="en-US" sz="1450" dirty="0"/>
+          </a:p>
+        </p:txBody>
+      </p:sp>
+      <p:sp>
+        <p:nvSpPr>
+          <p:cNvPr id="51" name="Text 48"/>
+          <p:cNvSpPr/>
+          <p:nvPr/>
+        </p:nvSpPr>
+        <p:spPr>
+          <a:xfrm>
+            <a:off x="1554480" y="3547872"/>
+            <a:ext cx="2084832" cy="201168"/>
+          </a:xfrm>
+          <a:prstGeom prst="rect">
+            <a:avLst/>
+          </a:prstGeom>
+          <a:noFill/>
+          <a:ln/>
+        </p:spPr>
+        <p:txBody>
+          <a:bodyPr wrap="square" lIns="0" tIns="0" rIns="0" bIns="0" rtlCol="0" anchor="ctr"/>
+          <a:lstStyle/>
+          <a:p>
+            <a:pPr indent="0" marL="0">
+              <a:buNone/>
+            </a:pPr>
+            <a:r>
+              <a:rPr lang="en-US" sz="900" b="1" spc="60" kern="0" dirty="0">
+                <a:solidFill>
+                  <a:srgbClr val="2A4A6B"/>
+                </a:solidFill>
+                <a:latin typeface="Calibri" pitchFamily="34" charset="0"/>
+                <a:ea typeface="Calibri" pitchFamily="34" charset="-122"/>
+                <a:cs typeface="Calibri" pitchFamily="34" charset="-120"/>
+              </a:rPr>
+              <a:t>PERIGEE–APOGEE FILTER</a:t>
+            </a:r>
+            <a:endParaRPr lang="en-US" sz="900" dirty="0"/>
+          </a:p>
+        </p:txBody>
+      </p:sp>
+      <p:sp>
+        <p:nvSpPr>
+          <p:cNvPr id="52" name="Text 49"/>
+          <p:cNvSpPr/>
+          <p:nvPr/>
+        </p:nvSpPr>
+        <p:spPr>
+          <a:xfrm>
+            <a:off x="1554480" y="3749040"/>
+            <a:ext cx="2121408" cy="219456"/>
+          </a:xfrm>
+          <a:prstGeom prst="rect">
+            <a:avLst/>
+          </a:prstGeom>
+          <a:noFill/>
+          <a:ln/>
+        </p:spPr>
+        <p:txBody>
+          <a:bodyPr wrap="square" lIns="0" tIns="0" rIns="0" bIns="0" rtlCol="0" anchor="ctr"/>
+          <a:lstStyle/>
+          <a:p>
+            <a:pPr indent="0" marL="0">
+              <a:buNone/>
+            </a:pPr>
+            <a:r>
+              <a:rPr lang="en-US" sz="850" dirty="0">
+                <a:solidFill>
+                  <a:srgbClr val="5A6673"/>
+                </a:solidFill>
+                <a:latin typeface="Calibri" pitchFamily="34" charset="0"/>
+                <a:ea typeface="Calibri" pitchFamily="34" charset="-122"/>
+                <a:cs typeface="Calibri" pitchFamily="34" charset="-120"/>
+              </a:rPr>
+              <a:t>Orbits that can never intersect</a:t>
+            </a:r>
+            <a:endParaRPr lang="en-US" sz="850" dirty="0"/>
+          </a:p>
+        </p:txBody>
+      </p:sp>
+      <p:sp>
+        <p:nvSpPr>
+          <p:cNvPr id="53" name="Shape 50"/>
+          <p:cNvSpPr/>
+          <p:nvPr/>
+        </p:nvSpPr>
+        <p:spPr>
+          <a:xfrm>
+            <a:off x="3712464" y="3657600"/>
+            <a:ext cx="3584448" cy="201168"/>
+          </a:xfrm>
+          <a:prstGeom prst="rect">
+            <a:avLst/>
+          </a:prstGeom>
+          <a:solidFill>
+            <a:srgbClr val="EEF2F7"/>
+          </a:solidFill>
+          <a:ln/>
+        </p:spPr>
+      </p:sp>
+      <p:sp>
+        <p:nvSpPr>
+          <p:cNvPr id="54" name="Shape 51"/>
+          <p:cNvSpPr/>
+          <p:nvPr/>
+        </p:nvSpPr>
+        <p:spPr>
+          <a:xfrm>
+            <a:off x="3712464" y="3657600"/>
+            <a:ext cx="3584413" cy="201168"/>
+          </a:xfrm>
+          <a:prstGeom prst="rect">
+            <a:avLst/>
+          </a:prstGeom>
+          <a:solidFill>
+            <a:srgbClr val="6E93B8"/>
+          </a:solidFill>
+          <a:ln/>
+        </p:spPr>
+      </p:sp>
+      <p:sp>
+        <p:nvSpPr>
+          <p:cNvPr id="55" name="Text 52"/>
+          <p:cNvSpPr/>
+          <p:nvPr/>
+        </p:nvSpPr>
+        <p:spPr>
+          <a:xfrm>
+            <a:off x="7370064" y="3529584"/>
+            <a:ext cx="603504" cy="457200"/>
+          </a:xfrm>
+          <a:prstGeom prst="rect">
+            <a:avLst/>
+          </a:prstGeom>
+          <a:noFill/>
+          <a:ln/>
+        </p:spPr>
+        <p:txBody>
+          <a:bodyPr wrap="square" lIns="0" tIns="0" rIns="0" bIns="0" rtlCol="0" anchor="ctr"/>
+          <a:lstStyle/>
+          <a:p>
+            <a:pPr indent="0" marL="0">
+              <a:buNone/>
+            </a:pPr>
+            <a:r>
+              <a:rPr lang="en-US" sz="950" dirty="0">
+                <a:solidFill>
+                  <a:srgbClr val="5A6673"/>
+                </a:solidFill>
+                <a:latin typeface="Arial" pitchFamily="34" charset="0"/>
+                <a:ea typeface="Arial" pitchFamily="34" charset="-122"/>
+                <a:cs typeface="Arial" pitchFamily="34" charset="-120"/>
+              </a:rPr>
+              <a:t>99.995%</a:t>
+            </a:r>
+            <a:endParaRPr lang="en-US" sz="950" dirty="0"/>
+          </a:p>
+        </p:txBody>
+      </p:sp>
+      <p:sp>
+        <p:nvSpPr>
+          <p:cNvPr id="56" name="Text 53"/>
+          <p:cNvSpPr/>
+          <p:nvPr/>
+        </p:nvSpPr>
+        <p:spPr>
+          <a:xfrm>
+            <a:off x="310896" y="4096512"/>
+            <a:ext cx="1133856" cy="457200"/>
+          </a:xfrm>
+          <a:prstGeom prst="rect">
+            <a:avLst/>
+          </a:prstGeom>
+          <a:noFill/>
+          <a:ln/>
+        </p:spPr>
+        <p:txBody>
+          <a:bodyPr wrap="square" lIns="0" tIns="0" rIns="0" bIns="0" rtlCol="0" anchor="ctr"/>
+          <a:lstStyle/>
+          <a:p>
+            <a:pPr algn="r" indent="0" marL="0">
+              <a:buNone/>
+            </a:pPr>
+            <a:r>
+              <a:rPr lang="en-US" sz="1450" b="1" dirty="0">
+                <a:solidFill>
+                  <a:srgbClr val="2A4A6B"/>
+                </a:solidFill>
+                <a:latin typeface="Arial" pitchFamily="34" charset="0"/>
+                <a:ea typeface="Arial" pitchFamily="34" charset="-122"/>
+                <a:cs typeface="Arial" pitchFamily="34" charset="-120"/>
+              </a:rPr>
+              <a:t>253,010</a:t>
+            </a:r>
+            <a:endParaRPr lang="en-US" sz="1450" dirty="0"/>
+          </a:p>
+        </p:txBody>
+      </p:sp>
+      <p:sp>
+        <p:nvSpPr>
+          <p:cNvPr id="57" name="Text 54"/>
+          <p:cNvSpPr/>
+          <p:nvPr/>
+        </p:nvSpPr>
+        <p:spPr>
+          <a:xfrm>
+            <a:off x="1554480" y="4114800"/>
+            <a:ext cx="2084832" cy="201168"/>
+          </a:xfrm>
+          <a:prstGeom prst="rect">
+            <a:avLst/>
+          </a:prstGeom>
+          <a:noFill/>
+          <a:ln/>
+        </p:spPr>
+        <p:txBody>
+          <a:bodyPr wrap="square" lIns="0" tIns="0" rIns="0" bIns="0" rtlCol="0" anchor="ctr"/>
+          <a:lstStyle/>
+          <a:p>
+            <a:pPr indent="0" marL="0">
+              <a:buNone/>
+            </a:pPr>
+            <a:r>
+              <a:rPr lang="en-US" sz="900" b="1" spc="60" kern="0" dirty="0">
+                <a:solidFill>
+                  <a:srgbClr val="2A4A6B"/>
+                </a:solidFill>
+                <a:latin typeface="Calibri" pitchFamily="34" charset="0"/>
+                <a:ea typeface="Calibri" pitchFamily="34" charset="-122"/>
+                <a:cs typeface="Calibri" pitchFamily="34" charset="-120"/>
+              </a:rPr>
+              <a:t>COARSE SWEEP</a:t>
+            </a:r>
+            <a:endParaRPr lang="en-US" sz="900" dirty="0"/>
+          </a:p>
+        </p:txBody>
+      </p:sp>
+      <p:sp>
+        <p:nvSpPr>
+          <p:cNvPr id="58" name="Text 55"/>
+          <p:cNvSpPr/>
+          <p:nvPr/>
+        </p:nvSpPr>
+        <p:spPr>
+          <a:xfrm>
+            <a:off x="1554480" y="4315968"/>
+            <a:ext cx="2121408" cy="219456"/>
+          </a:xfrm>
+          <a:prstGeom prst="rect">
+            <a:avLst/>
+          </a:prstGeom>
+          <a:noFill/>
+          <a:ln/>
+        </p:spPr>
+        <p:txBody>
+          <a:bodyPr wrap="square" lIns="0" tIns="0" rIns="0" bIns="0" rtlCol="0" anchor="ctr"/>
+          <a:lstStyle/>
+          <a:p>
+            <a:pPr indent="0" marL="0">
+              <a:buNone/>
+            </a:pPr>
+            <a:r>
+              <a:rPr lang="en-US" sz="850" dirty="0">
+                <a:solidFill>
+                  <a:srgbClr val="5A6673"/>
+                </a:solidFill>
+                <a:latin typeface="Calibri" pitchFamily="34" charset="0"/>
+                <a:ea typeface="Calibri" pitchFamily="34" charset="-122"/>
+                <a:cs typeface="Calibri" pitchFamily="34" charset="-120"/>
+              </a:rPr>
+              <a:t>60 s steps, 450 km gate</a:t>
+            </a:r>
+            <a:endParaRPr lang="en-US" sz="850" dirty="0"/>
+          </a:p>
+        </p:txBody>
+      </p:sp>
+      <p:sp>
+        <p:nvSpPr>
+          <p:cNvPr id="59" name="Shape 56"/>
+          <p:cNvSpPr/>
+          <p:nvPr/>
+        </p:nvSpPr>
+        <p:spPr>
+          <a:xfrm>
+            <a:off x="3712464" y="4224528"/>
+            <a:ext cx="3584448" cy="201168"/>
+          </a:xfrm>
+          <a:prstGeom prst="rect">
+            <a:avLst/>
+          </a:prstGeom>
+          <a:solidFill>
+            <a:srgbClr val="EEF2F7"/>
+          </a:solidFill>
+          <a:ln/>
+        </p:spPr>
+      </p:sp>
+      <p:sp>
+        <p:nvSpPr>
+          <p:cNvPr id="60" name="Shape 57"/>
+          <p:cNvSpPr/>
+          <p:nvPr/>
+        </p:nvSpPr>
+        <p:spPr>
+          <a:xfrm>
+            <a:off x="3712464" y="4224528"/>
+            <a:ext cx="3339466" cy="201168"/>
+          </a:xfrm>
+          <a:prstGeom prst="rect">
+            <a:avLst/>
+          </a:prstGeom>
+          <a:solidFill>
+            <a:srgbClr val="3D73A8"/>
+          </a:solidFill>
+          <a:ln/>
+        </p:spPr>
+      </p:sp>
+      <p:sp>
+        <p:nvSpPr>
+          <p:cNvPr id="61" name="Text 58"/>
+          <p:cNvSpPr/>
+          <p:nvPr/>
+        </p:nvSpPr>
+        <p:spPr>
+          <a:xfrm>
+            <a:off x="7370064" y="4096512"/>
+            <a:ext cx="603504" cy="457200"/>
+          </a:xfrm>
+          <a:prstGeom prst="rect">
+            <a:avLst/>
+          </a:prstGeom>
+          <a:noFill/>
+          <a:ln/>
+        </p:spPr>
+        <p:txBody>
+          <a:bodyPr wrap="square" lIns="0" tIns="0" rIns="0" bIns="0" rtlCol="0" anchor="ctr"/>
+          <a:lstStyle/>
+          <a:p>
+            <a:pPr indent="0" marL="0">
+              <a:buNone/>
+            </a:pPr>
+            <a:r>
+              <a:rPr lang="en-US" sz="950" dirty="0">
+                <a:solidFill>
+                  <a:srgbClr val="5A6673"/>
+                </a:solidFill>
+                <a:latin typeface="Arial" pitchFamily="34" charset="0"/>
+                <a:ea typeface="Arial" pitchFamily="34" charset="-122"/>
+                <a:cs typeface="Arial" pitchFamily="34" charset="-120"/>
+              </a:rPr>
+              <a:t>68.7%</a:t>
+            </a:r>
+            <a:endParaRPr lang="en-US" sz="950" dirty="0"/>
+          </a:p>
+        </p:txBody>
+      </p:sp>
+      <p:sp>
+        <p:nvSpPr>
+          <p:cNvPr id="62" name="Text 59"/>
+          <p:cNvSpPr/>
+          <p:nvPr/>
+        </p:nvSpPr>
+        <p:spPr>
+          <a:xfrm>
+            <a:off x="310896" y="4663440"/>
+            <a:ext cx="1133856" cy="457200"/>
+          </a:xfrm>
+          <a:prstGeom prst="rect">
+            <a:avLst/>
+          </a:prstGeom>
+          <a:noFill/>
+          <a:ln/>
+        </p:spPr>
+        <p:txBody>
+          <a:bodyPr wrap="square" lIns="0" tIns="0" rIns="0" bIns="0" rtlCol="0" anchor="ctr"/>
+          <a:lstStyle/>
+          <a:p>
+            <a:pPr algn="r" indent="0" marL="0">
+              <a:buNone/>
+            </a:pPr>
+            <a:r>
+              <a:rPr lang="en-US" sz="1450" b="1" dirty="0">
+                <a:solidFill>
+                  <a:srgbClr val="1F497D"/>
+                </a:solidFill>
+                <a:latin typeface="Arial" pitchFamily="34" charset="0"/>
+                <a:ea typeface="Arial" pitchFamily="34" charset="-122"/>
+                <a:cs typeface="Arial" pitchFamily="34" charset="-120"/>
+              </a:rPr>
+              <a:t>3,032</a:t>
+            </a:r>
+            <a:endParaRPr lang="en-US" sz="1450" dirty="0"/>
+          </a:p>
+        </p:txBody>
+      </p:sp>
+      <p:sp>
+        <p:nvSpPr>
+          <p:cNvPr id="63" name="Text 60"/>
+          <p:cNvSpPr/>
+          <p:nvPr/>
+        </p:nvSpPr>
+        <p:spPr>
+          <a:xfrm>
+            <a:off x="1554480" y="4681728"/>
+            <a:ext cx="2084832" cy="201168"/>
+          </a:xfrm>
+          <a:prstGeom prst="rect">
+            <a:avLst/>
+          </a:prstGeom>
+          <a:noFill/>
+          <a:ln/>
+        </p:spPr>
+        <p:txBody>
+          <a:bodyPr wrap="square" lIns="0" tIns="0" rIns="0" bIns="0" rtlCol="0" anchor="ctr"/>
+          <a:lstStyle/>
+          <a:p>
+            <a:pPr indent="0" marL="0">
+              <a:buNone/>
+            </a:pPr>
+            <a:r>
+              <a:rPr lang="en-US" sz="900" b="1" spc="60" kern="0" dirty="0">
+                <a:solidFill>
+                  <a:srgbClr val="1F497D"/>
+                </a:solidFill>
+                <a:latin typeface="Calibri" pitchFamily="34" charset="0"/>
+                <a:ea typeface="Calibri" pitchFamily="34" charset="-122"/>
+                <a:cs typeface="Calibri" pitchFamily="34" charset="-120"/>
+              </a:rPr>
+              <a:t>CONFIRMED EVENTS</a:t>
+            </a:r>
+            <a:endParaRPr lang="en-US" sz="900" dirty="0"/>
+          </a:p>
+        </p:txBody>
+      </p:sp>
+      <p:sp>
+        <p:nvSpPr>
+          <p:cNvPr id="64" name="Text 61"/>
+          <p:cNvSpPr/>
+          <p:nvPr/>
+        </p:nvSpPr>
+        <p:spPr>
+          <a:xfrm>
+            <a:off x="1554480" y="4882896"/>
+            <a:ext cx="2121408" cy="219456"/>
+          </a:xfrm>
+          <a:prstGeom prst="rect">
+            <a:avLst/>
+          </a:prstGeom>
+          <a:noFill/>
+          <a:ln/>
+        </p:spPr>
+        <p:txBody>
+          <a:bodyPr wrap="square" lIns="0" tIns="0" rIns="0" bIns="0" rtlCol="0" anchor="ctr"/>
+          <a:lstStyle/>
+          <a:p>
+            <a:pPr indent="0" marL="0">
+              <a:buNone/>
+            </a:pPr>
+            <a:r>
+              <a:rPr lang="en-US" sz="850" dirty="0">
+                <a:solidFill>
+                  <a:srgbClr val="5A6673"/>
+                </a:solidFill>
+                <a:latin typeface="Calibri" pitchFamily="34" charset="0"/>
+                <a:ea typeface="Calibri" pitchFamily="34" charset="-122"/>
+                <a:cs typeface="Calibri" pitchFamily="34" charset="-120"/>
+              </a:rPr>
+              <a:t>Refined to exact TCA by bisection</a:t>
+            </a:r>
+            <a:endParaRPr lang="en-US" sz="850" dirty="0"/>
+          </a:p>
+        </p:txBody>
+      </p:sp>
+      <p:sp>
+        <p:nvSpPr>
+          <p:cNvPr id="65" name="Shape 62"/>
+          <p:cNvSpPr/>
+          <p:nvPr/>
+        </p:nvSpPr>
+        <p:spPr>
+          <a:xfrm>
+            <a:off x="3712464" y="4791456"/>
+            <a:ext cx="3584448" cy="201168"/>
+          </a:xfrm>
+          <a:prstGeom prst="rect">
+            <a:avLst/>
+          </a:prstGeom>
+          <a:solidFill>
+            <a:srgbClr val="EEF2F7"/>
+          </a:solidFill>
+          <a:ln/>
+        </p:spPr>
+      </p:sp>
+      <p:sp>
+        <p:nvSpPr>
+          <p:cNvPr id="66" name="Shape 63"/>
+          <p:cNvSpPr/>
+          <p:nvPr/>
+        </p:nvSpPr>
+        <p:spPr>
+          <a:xfrm>
+            <a:off x="3712464" y="4791456"/>
+            <a:ext cx="457200" cy="201168"/>
+          </a:xfrm>
+          <a:prstGeom prst="rect">
+            <a:avLst/>
+          </a:prstGeom>
+          <a:solidFill>
+            <a:srgbClr val="1F497D"/>
+          </a:solidFill>
+          <a:ln/>
+        </p:spPr>
+      </p:sp>
+      <p:sp>
+        <p:nvSpPr>
+          <p:cNvPr id="67" name="Text 64"/>
+          <p:cNvSpPr/>
+          <p:nvPr/>
+        </p:nvSpPr>
+        <p:spPr>
+          <a:xfrm>
+            <a:off x="7370064" y="4663440"/>
+            <a:ext cx="603504" cy="457200"/>
+          </a:xfrm>
+          <a:prstGeom prst="rect">
+            <a:avLst/>
+          </a:prstGeom>
+          <a:noFill/>
+          <a:ln/>
+        </p:spPr>
+        <p:txBody>
+          <a:bodyPr wrap="square" lIns="0" tIns="0" rIns="0" bIns="0" rtlCol="0" anchor="ctr"/>
+          <a:lstStyle/>
+          <a:p>
+            <a:pPr indent="0" marL="0">
+              <a:buNone/>
+            </a:pPr>
+            <a:r>
+              <a:rPr lang="en-US" sz="950" b="1" dirty="0">
+                <a:solidFill>
+                  <a:srgbClr val="1F497D"/>
+                </a:solidFill>
+                <a:latin typeface="Arial" pitchFamily="34" charset="0"/>
+                <a:ea typeface="Arial" pitchFamily="34" charset="-122"/>
+                <a:cs typeface="Arial" pitchFamily="34" charset="-120"/>
+              </a:rPr>
+              <a:t>0.82%</a:t>
+            </a:r>
+            <a:endParaRPr lang="en-US" sz="950" dirty="0"/>
+          </a:p>
+        </p:txBody>
+      </p:sp>
+      <p:sp>
+        <p:nvSpPr>
+          <p:cNvPr id="68" name="Text 65"/>
+          <p:cNvSpPr/>
+          <p:nvPr/>
+        </p:nvSpPr>
+        <p:spPr>
+          <a:xfrm>
+            <a:off x="310896" y="5266944"/>
+            <a:ext cx="7680960" cy="274320"/>
+          </a:xfrm>
+          <a:prstGeom prst="rect">
+            <a:avLst/>
+          </a:prstGeom>
+          <a:noFill/>
+          <a:ln/>
+        </p:spPr>
+        <p:txBody>
+          <a:bodyPr wrap="square" lIns="0" tIns="0" rIns="0" bIns="0" rtlCol="0" anchor="ctr"/>
+          <a:lstStyle/>
+          <a:p>
+            <a:pPr indent="0" marL="0">
+              <a:buNone/>
+            </a:pPr>
+            <a:r>
+              <a:rPr lang="en-US" sz="900" i="1" dirty="0">
+                <a:solidFill>
+                  <a:srgbClr val="5A6673"/>
+                </a:solidFill>
+                <a:latin typeface="Calibri" pitchFamily="34" charset="0"/>
+                <a:ea typeface="Calibri" pitchFamily="34" charset="-122"/>
+                <a:cs typeface="Calibri" pitchFamily="34" charset="-120"/>
+              </a:rPr>
+              <a:t>121× reduction, and the first filter removes only 20 pairs — bar length ∝ log₁₀(count); every stage figure is measured by the run, not asserted</a:t>
+            </a:r>
+            <a:endParaRPr lang="en-US" sz="900" dirty="0"/>
+          </a:p>
+        </p:txBody>
+      </p:sp>
+      <p:sp>
+        <p:nvSpPr>
+          <p:cNvPr id="69" name="Shape 66"/>
+          <p:cNvSpPr/>
+          <p:nvPr/>
+        </p:nvSpPr>
+        <p:spPr>
+          <a:xfrm>
+            <a:off x="8101584" y="2962656"/>
+            <a:ext cx="2286000" cy="2377440"/>
           </a:xfrm>
           <a:prstGeom prst="roundRect">
             <a:avLst>
-              <a:gd name="adj" fmla="val 5769"/>
+              <a:gd name="adj" fmla="val 1200"/>
             </a:avLst>
           </a:prstGeom>
           <a:solidFill>
@@ -5535,53 +7094,95 @@
       </p:sp>
       <p:sp>
         <p:nvSpPr>
-          <p:cNvPr id="28" name="Text 25"/>
-          <p:cNvSpPr/>
-          <p:nvPr/>
-        </p:nvSpPr>
-        <p:spPr>
-          <a:xfrm>
-            <a:off x="7351776" y="1883664"/>
-            <a:ext cx="1060704" cy="438912"/>
-          </a:xfrm>
-          <a:prstGeom prst="rect">
-            <a:avLst/>
-          </a:prstGeom>
-          <a:noFill/>
-          <a:ln/>
-        </p:spPr>
-        <p:txBody>
-          <a:bodyPr wrap="square" lIns="0" tIns="0" rIns="0" bIns="0" rtlCol="0" anchor="ctr"/>
-          <a:lstStyle/>
-          <a:p>
-            <a:pPr indent="0" marL="0">
-              <a:buNone/>
-            </a:pPr>
-            <a:r>
-              <a:rPr lang="en-US" sz="1000" b="1" dirty="0">
+          <p:cNvPr id="70" name="Text 67"/>
+          <p:cNvSpPr/>
+          <p:nvPr/>
+        </p:nvSpPr>
+        <p:spPr>
+          <a:xfrm>
+            <a:off x="8284464" y="3090672"/>
+            <a:ext cx="1920240" cy="182880"/>
+          </a:xfrm>
+          <a:prstGeom prst="rect">
+            <a:avLst/>
+          </a:prstGeom>
+          <a:noFill/>
+          <a:ln/>
+        </p:spPr>
+        <p:txBody>
+          <a:bodyPr wrap="square" lIns="0" tIns="0" rIns="0" bIns="0" rtlCol="0" anchor="ctr"/>
+          <a:lstStyle/>
+          <a:p>
+            <a:pPr indent="0" marL="0">
+              <a:buNone/>
+            </a:pPr>
+            <a:r>
+              <a:rPr lang="en-US" sz="850" b="1" spc="90" kern="0" dirty="0">
+                <a:solidFill>
+                  <a:srgbClr val="1E7A4C"/>
+                </a:solidFill>
+                <a:latin typeface="Calibri" pitchFamily="34" charset="0"/>
+                <a:ea typeface="Calibri" pitchFamily="34" charset="-122"/>
+                <a:cs typeface="Calibri" pitchFamily="34" charset="-120"/>
+              </a:rPr>
+              <a:t>VERIFIED, NOT CLAIMED</a:t>
+            </a:r>
+            <a:endParaRPr lang="en-US" sz="850" dirty="0"/>
+          </a:p>
+        </p:txBody>
+      </p:sp>
+      <p:sp>
+        <p:nvSpPr>
+          <p:cNvPr id="71" name="Text 68"/>
+          <p:cNvSpPr/>
+          <p:nvPr/>
+        </p:nvSpPr>
+        <p:spPr>
+          <a:xfrm>
+            <a:off x="8284464" y="3310128"/>
+            <a:ext cx="1956816" cy="310896"/>
+          </a:xfrm>
+          <a:prstGeom prst="rect">
+            <a:avLst/>
+          </a:prstGeom>
+          <a:noFill/>
+          <a:ln/>
+        </p:spPr>
+        <p:txBody>
+          <a:bodyPr wrap="square" lIns="0" tIns="0" rIns="0" bIns="0" rtlCol="0" anchor="ctr"/>
+          <a:lstStyle/>
+          <a:p>
+            <a:pPr indent="0" marL="0">
+              <a:buNone/>
+            </a:pPr>
+            <a:r>
+              <a:rPr lang="en-US" sz="2100" b="1" dirty="0">
                 <a:solidFill>
                   <a:srgbClr val="1F497D"/>
                 </a:solidFill>
-                <a:latin typeface="Calibri" pitchFamily="34" charset="0"/>
-                <a:ea typeface="Calibri" pitchFamily="34" charset="-122"/>
-                <a:cs typeface="Calibri" pitchFamily="34" charset="-120"/>
-              </a:rPr>
-              <a:t>Deployment</a:t>
-            </a:r>
-            <a:endParaRPr lang="en-US" sz="1000" dirty="0"/>
-          </a:p>
-        </p:txBody>
-      </p:sp>
-      <p:sp>
-        <p:nvSpPr>
-          <p:cNvPr id="29" name="Text 26"/>
-          <p:cNvSpPr/>
-          <p:nvPr/>
-        </p:nvSpPr>
-        <p:spPr>
-          <a:xfrm>
-            <a:off x="8430768" y="1883664"/>
-            <a:ext cx="1975104" cy="438912"/>
+                <a:latin typeface="Arial" pitchFamily="34" charset="0"/>
+                <a:ea typeface="Arial" pitchFamily="34" charset="-122"/>
+                <a:cs typeface="Arial" pitchFamily="34" charset="-120"/>
+              </a:rPr>
+              <a:t>3,710,880</a:t>
+            </a:r>
+            <a:pPr indent="0" marL="0">
+              <a:buNone/>
+            </a:pPr>
+            <a:endParaRPr lang="en-US" sz="2100" dirty="0"/>
+          </a:p>
+        </p:txBody>
+      </p:sp>
+      <p:sp>
+        <p:nvSpPr>
+          <p:cNvPr id="72" name="Text 69"/>
+          <p:cNvSpPr/>
+          <p:nvPr/>
+        </p:nvSpPr>
+        <p:spPr>
+          <a:xfrm>
+            <a:off x="8284464" y="3602736"/>
+            <a:ext cx="1956816" cy="347472"/>
           </a:xfrm>
           <a:prstGeom prst="rect">
             <a:avLst/>
@@ -5608,7 +7209,7 @@
                 <a:ea typeface="Calibri" pitchFamily="34" charset="-122"/>
                 <a:cs typeface="Calibri" pitchFamily="34" charset="-120"/>
               </a:rPr>
-              <a:t>Static files — one 1.7 MB self-contained HTML file</a:t>
+              <a:t>SGP4 propagations per run (~15 s)</a:t>
             </a:r>
             <a:endParaRPr lang="en-US" sz="950" dirty="0"/>
           </a:p>
@@ -5616,265 +7217,44 @@
       </p:sp>
       <p:sp>
         <p:nvSpPr>
-          <p:cNvPr id="30" name="Text 27"/>
-          <p:cNvSpPr/>
-          <p:nvPr/>
-        </p:nvSpPr>
-        <p:spPr>
-          <a:xfrm>
-            <a:off x="310896" y="2542032"/>
-            <a:ext cx="292608" cy="292608"/>
-          </a:xfrm>
-          <a:prstGeom prst="rect">
-            <a:avLst/>
-          </a:prstGeom>
-          <a:noFill/>
-          <a:ln/>
-        </p:spPr>
-        <p:txBody>
-          <a:bodyPr wrap="square" lIns="0" tIns="0" rIns="0" bIns="0" rtlCol="0" anchor="ctr"/>
-          <a:lstStyle/>
-          <a:p>
-            <a:pPr indent="0" marL="0">
-              <a:buNone/>
-            </a:pPr>
-            <a:r>
-              <a:rPr lang="en-US" sz="1500" dirty="0">
-                <a:solidFill>
-                  <a:srgbClr val="1F497D"/>
-                </a:solidFill>
-                <a:latin typeface="Calibri" pitchFamily="34" charset="0"/>
-                <a:ea typeface="Calibri" pitchFamily="34" charset="-122"/>
-                <a:cs typeface="Calibri" pitchFamily="34" charset="-120"/>
-              </a:rPr>
-              <a:t>❖</a:t>
-            </a:r>
-            <a:endParaRPr lang="en-US" sz="1500" dirty="0"/>
-          </a:p>
-        </p:txBody>
-      </p:sp>
-      <p:sp>
-        <p:nvSpPr>
-          <p:cNvPr id="31" name="Text 28"/>
-          <p:cNvSpPr/>
-          <p:nvPr/>
-        </p:nvSpPr>
-        <p:spPr>
-          <a:xfrm>
-            <a:off x="621792" y="2542032"/>
-            <a:ext cx="9692640" cy="292608"/>
-          </a:xfrm>
-          <a:prstGeom prst="rect">
-            <a:avLst/>
-          </a:prstGeom>
-          <a:noFill/>
-          <a:ln/>
-        </p:spPr>
-        <p:txBody>
-          <a:bodyPr wrap="square" lIns="0" tIns="0" rIns="0" bIns="0" rtlCol="0" anchor="ctr"/>
-          <a:lstStyle/>
-          <a:p>
-            <a:pPr indent="0" marL="0">
-              <a:buNone/>
-            </a:pPr>
-            <a:r>
-              <a:rPr lang="en-US" sz="1650" b="1" u="sng" dirty="0">
-                <a:solidFill>
-                  <a:srgbClr val="1F497D"/>
-                </a:solidFill>
-                <a:latin typeface="Calibri" pitchFamily="34" charset="0"/>
-                <a:ea typeface="Calibri" pitchFamily="34" charset="-122"/>
-                <a:cs typeface="Calibri" pitchFamily="34" charset="-120"/>
-              </a:rPr>
-              <a:t>Methodology and process for implementation</a:t>
-            </a:r>
-            <a:endParaRPr lang="en-US" sz="1650" dirty="0"/>
-          </a:p>
-        </p:txBody>
-      </p:sp>
-      <p:sp>
-        <p:nvSpPr>
-          <p:cNvPr id="32" name="Text 29"/>
-          <p:cNvSpPr/>
-          <p:nvPr/>
-        </p:nvSpPr>
-        <p:spPr>
-          <a:xfrm>
-            <a:off x="310896" y="2962656"/>
-            <a:ext cx="1133856" cy="457200"/>
-          </a:xfrm>
-          <a:prstGeom prst="rect">
-            <a:avLst/>
-          </a:prstGeom>
-          <a:noFill/>
-          <a:ln/>
-        </p:spPr>
-        <p:txBody>
-          <a:bodyPr wrap="square" lIns="0" tIns="0" rIns="0" bIns="0" rtlCol="0" anchor="ctr"/>
-          <a:lstStyle/>
-          <a:p>
-            <a:pPr algn="r" indent="0" marL="0">
-              <a:buNone/>
-            </a:pPr>
-            <a:r>
-              <a:rPr lang="en-US" sz="1450" b="1" dirty="0">
-                <a:solidFill>
-                  <a:srgbClr val="2A4A6B"/>
+          <p:cNvPr id="73" name="Text 70"/>
+          <p:cNvSpPr/>
+          <p:nvPr/>
+        </p:nvSpPr>
+        <p:spPr>
+          <a:xfrm>
+            <a:off x="8284464" y="3968496"/>
+            <a:ext cx="1956816" cy="310896"/>
+          </a:xfrm>
+          <a:prstGeom prst="rect">
+            <a:avLst/>
+          </a:prstGeom>
+          <a:noFill/>
+          <a:ln/>
+        </p:spPr>
+        <p:txBody>
+          <a:bodyPr wrap="square" lIns="0" tIns="0" rIns="0" bIns="0" rtlCol="0" anchor="ctr"/>
+          <a:lstStyle/>
+          <a:p>
+            <a:pPr indent="0" marL="0">
+              <a:buNone/>
+            </a:pPr>
+            <a:r>
+              <a:rPr lang="en-US" sz="2100" b="1" dirty="0">
+                <a:solidFill>
+                  <a:srgbClr val="1E7A4C"/>
                 </a:solidFill>
                 <a:latin typeface="Arial" pitchFamily="34" charset="0"/>
                 <a:ea typeface="Arial" pitchFamily="34" charset="-122"/>
                 <a:cs typeface="Arial" pitchFamily="34" charset="-120"/>
               </a:rPr>
-              <a:t>368,511</a:t>
-            </a:r>
-            <a:endParaRPr lang="en-US" sz="1450" dirty="0"/>
-          </a:p>
-        </p:txBody>
-      </p:sp>
-      <p:sp>
-        <p:nvSpPr>
-          <p:cNvPr id="33" name="Text 30"/>
-          <p:cNvSpPr/>
-          <p:nvPr/>
-        </p:nvSpPr>
-        <p:spPr>
-          <a:xfrm>
-            <a:off x="1554480" y="2980944"/>
-            <a:ext cx="2084832" cy="201168"/>
-          </a:xfrm>
-          <a:prstGeom prst="rect">
-            <a:avLst/>
-          </a:prstGeom>
-          <a:noFill/>
-          <a:ln/>
-        </p:spPr>
-        <p:txBody>
-          <a:bodyPr wrap="square" lIns="0" tIns="0" rIns="0" bIns="0" rtlCol="0" anchor="ctr"/>
-          <a:lstStyle/>
-          <a:p>
-            <a:pPr indent="0" marL="0">
-              <a:buNone/>
-            </a:pPr>
-            <a:r>
-              <a:rPr lang="en-US" sz="900" b="1" spc="60" kern="0" dirty="0">
-                <a:solidFill>
-                  <a:srgbClr val="2A4A6B"/>
-                </a:solidFill>
-                <a:latin typeface="Calibri" pitchFamily="34" charset="0"/>
-                <a:ea typeface="Calibri" pitchFamily="34" charset="-122"/>
-                <a:cs typeface="Calibri" pitchFamily="34" charset="-120"/>
-              </a:rPr>
-              <a:t>ALL PAIRS</a:t>
-            </a:r>
-            <a:endParaRPr lang="en-US" sz="900" dirty="0"/>
-          </a:p>
-        </p:txBody>
-      </p:sp>
-      <p:sp>
-        <p:nvSpPr>
-          <p:cNvPr id="34" name="Text 31"/>
-          <p:cNvSpPr/>
-          <p:nvPr/>
-        </p:nvSpPr>
-        <p:spPr>
-          <a:xfrm>
-            <a:off x="1554480" y="3182112"/>
-            <a:ext cx="2121408" cy="219456"/>
-          </a:xfrm>
-          <a:prstGeom prst="rect">
-            <a:avLst/>
-          </a:prstGeom>
-          <a:noFill/>
-          <a:ln/>
-        </p:spPr>
-        <p:txBody>
-          <a:bodyPr wrap="square" lIns="0" tIns="0" rIns="0" bIns="0" rtlCol="0" anchor="ctr"/>
-          <a:lstStyle/>
-          <a:p>
-            <a:pPr indent="0" marL="0">
-              <a:buNone/>
-            </a:pPr>
-            <a:r>
-              <a:rPr lang="en-US" sz="850" dirty="0">
-                <a:solidFill>
-                  <a:srgbClr val="5A6673"/>
-                </a:solidFill>
-                <a:latin typeface="Calibri" pitchFamily="34" charset="0"/>
-                <a:ea typeface="Calibri" pitchFamily="34" charset="-122"/>
-                <a:cs typeface="Calibri" pitchFamily="34" charset="-120"/>
-              </a:rPr>
-              <a:t>859 objects, 72-hour horizon</a:t>
-            </a:r>
-            <a:endParaRPr lang="en-US" sz="850" dirty="0"/>
-          </a:p>
-        </p:txBody>
-      </p:sp>
-      <p:sp>
-        <p:nvSpPr>
-          <p:cNvPr id="35" name="Shape 32"/>
-          <p:cNvSpPr/>
-          <p:nvPr/>
-        </p:nvSpPr>
-        <p:spPr>
-          <a:xfrm>
-            <a:off x="3712464" y="3090672"/>
-            <a:ext cx="3584448" cy="201168"/>
-          </a:xfrm>
-          <a:prstGeom prst="rect">
-            <a:avLst/>
-          </a:prstGeom>
-          <a:solidFill>
-            <a:srgbClr val="EEF2F7"/>
-          </a:solidFill>
-          <a:ln/>
-        </p:spPr>
-      </p:sp>
-      <p:sp>
-        <p:nvSpPr>
-          <p:cNvPr id="36" name="Shape 33"/>
-          <p:cNvSpPr/>
-          <p:nvPr/>
-        </p:nvSpPr>
-        <p:spPr>
-          <a:xfrm>
-            <a:off x="3712464" y="3090672"/>
-            <a:ext cx="3584448" cy="201168"/>
-          </a:xfrm>
-          <a:prstGeom prst="rect">
-            <a:avLst/>
-          </a:prstGeom>
-          <a:solidFill>
-            <a:srgbClr val="9FB3C8"/>
-          </a:solidFill>
-          <a:ln/>
-        </p:spPr>
-      </p:sp>
-      <p:sp>
-        <p:nvSpPr>
-          <p:cNvPr id="37" name="Text 34"/>
-          <p:cNvSpPr/>
-          <p:nvPr/>
-        </p:nvSpPr>
-        <p:spPr>
-          <a:xfrm>
-            <a:off x="7370064" y="2962656"/>
-            <a:ext cx="603504" cy="457200"/>
-          </a:xfrm>
-          <a:prstGeom prst="rect">
-            <a:avLst/>
-          </a:prstGeom>
-          <a:noFill/>
-          <a:ln/>
-        </p:spPr>
-        <p:txBody>
-          <a:bodyPr wrap="square" lIns="0" tIns="0" rIns="0" bIns="0" rtlCol="0" anchor="ctr"/>
-          <a:lstStyle/>
-          <a:p>
-            <a:pPr indent="0" marL="0">
-              <a:buNone/>
-            </a:pPr>
-            <a:r>
-              <a:rPr lang="en-US" sz="950" dirty="0">
+              <a:t>1.14×10⁻¹³</a:t>
+            </a:r>
+            <a:pPr indent="0" marL="0">
+              <a:buNone/>
+            </a:pPr>
+            <a:r>
+              <a:rPr lang="en-US" sz="1000" dirty="0">
                 <a:solidFill>
                   <a:srgbClr val="5A6673"/>
                 </a:solidFill>
@@ -5882,7 +7262,49 @@
                 <a:ea typeface="Arial" pitchFamily="34" charset="-122"/>
                 <a:cs typeface="Arial" pitchFamily="34" charset="-120"/>
               </a:rPr>
-              <a:t>100.000%</a:t>
+              <a:t> km</a:t>
+            </a:r>
+            <a:endParaRPr lang="en-US" sz="2100" dirty="0"/>
+          </a:p>
+        </p:txBody>
+      </p:sp>
+      <p:sp>
+        <p:nvSpPr>
+          <p:cNvPr id="74" name="Text 71"/>
+          <p:cNvSpPr/>
+          <p:nvPr/>
+        </p:nvSpPr>
+        <p:spPr>
+          <a:xfrm>
+            <a:off x="8284464" y="4261104"/>
+            <a:ext cx="1956816" cy="347472"/>
+          </a:xfrm>
+          <a:prstGeom prst="rect">
+            <a:avLst/>
+          </a:prstGeom>
+          <a:noFill/>
+          <a:ln/>
+        </p:spPr>
+        <p:txBody>
+          <a:bodyPr wrap="square" lIns="0" tIns="0" rIns="0" bIns="0" rtlCol="0" anchor="ctr"/>
+          <a:lstStyle/>
+          <a:p>
+            <a:pPr indent="0" marL="0">
+              <a:lnSpc>
+                <a:spcPts val="1100"/>
+              </a:lnSpc>
+              <a:buNone/>
+            </a:pPr>
+            <a:r>
+              <a:rPr lang="en-US" sz="950" dirty="0">
+                <a:solidFill>
+                  <a:srgbClr val="333333"/>
+                </a:solidFill>
+                <a:latin typeface="Calibri" pitchFamily="34" charset="0"/>
+                <a:ea typeface="Calibri" pitchFamily="34" charset="-122"/>
+                <a:cs typeface="Calibri" pitchFamily="34" charset="-120"/>
+              </a:rPr>
+              <a:t>Cascade vs brute-force all-pairs agreement</a:t>
             </a:r>
             <a:endParaRPr lang="en-US" sz="950" dirty="0"/>
           </a:p>
@@ -5890,731 +7312,38 @@
       </p:sp>
       <p:sp>
         <p:nvSpPr>
-          <p:cNvPr id="38" name="Text 35"/>
-          <p:cNvSpPr/>
-          <p:nvPr/>
-        </p:nvSpPr>
-        <p:spPr>
-          <a:xfrm>
-            <a:off x="310896" y="3529584"/>
-            <a:ext cx="1133856" cy="457200"/>
-          </a:xfrm>
-          <a:prstGeom prst="rect">
-            <a:avLst/>
-          </a:prstGeom>
-          <a:noFill/>
-          <a:ln/>
-        </p:spPr>
-        <p:txBody>
-          <a:bodyPr wrap="square" lIns="0" tIns="0" rIns="0" bIns="0" rtlCol="0" anchor="ctr"/>
-          <a:lstStyle/>
-          <a:p>
-            <a:pPr algn="r" indent="0" marL="0">
-              <a:buNone/>
-            </a:pPr>
-            <a:r>
-              <a:rPr lang="en-US" sz="1450" b="1" dirty="0">
-                <a:solidFill>
-                  <a:srgbClr val="2A4A6B"/>
+          <p:cNvPr id="75" name="Text 72"/>
+          <p:cNvSpPr/>
+          <p:nvPr/>
+        </p:nvSpPr>
+        <p:spPr>
+          <a:xfrm>
+            <a:off x="8284464" y="4626864"/>
+            <a:ext cx="1956816" cy="310896"/>
+          </a:xfrm>
+          <a:prstGeom prst="rect">
+            <a:avLst/>
+          </a:prstGeom>
+          <a:noFill/>
+          <a:ln/>
+        </p:spPr>
+        <p:txBody>
+          <a:bodyPr wrap="square" lIns="0" tIns="0" rIns="0" bIns="0" rtlCol="0" anchor="ctr"/>
+          <a:lstStyle/>
+          <a:p>
+            <a:pPr indent="0" marL="0">
+              <a:buNone/>
+            </a:pPr>
+            <a:r>
+              <a:rPr lang="en-US" sz="2100" b="1" dirty="0">
+                <a:solidFill>
+                  <a:srgbClr val="1F497D"/>
                 </a:solidFill>
                 <a:latin typeface="Arial" pitchFamily="34" charset="0"/>
                 <a:ea typeface="Arial" pitchFamily="34" charset="-122"/>
                 <a:cs typeface="Arial" pitchFamily="34" charset="-120"/>
               </a:rPr>
-              <a:t>368,491</a:t>
-            </a:r>
-            <a:endParaRPr lang="en-US" sz="1450" dirty="0"/>
-          </a:p>
-        </p:txBody>
-      </p:sp>
-      <p:sp>
-        <p:nvSpPr>
-          <p:cNvPr id="39" name="Text 36"/>
-          <p:cNvSpPr/>
-          <p:nvPr/>
-        </p:nvSpPr>
-        <p:spPr>
-          <a:xfrm>
-            <a:off x="1554480" y="3547872"/>
-            <a:ext cx="2084832" cy="201168"/>
-          </a:xfrm>
-          <a:prstGeom prst="rect">
-            <a:avLst/>
-          </a:prstGeom>
-          <a:noFill/>
-          <a:ln/>
-        </p:spPr>
-        <p:txBody>
-          <a:bodyPr wrap="square" lIns="0" tIns="0" rIns="0" bIns="0" rtlCol="0" anchor="ctr"/>
-          <a:lstStyle/>
-          <a:p>
-            <a:pPr indent="0" marL="0">
-              <a:buNone/>
-            </a:pPr>
-            <a:r>
-              <a:rPr lang="en-US" sz="900" b="1" spc="60" kern="0" dirty="0">
-                <a:solidFill>
-                  <a:srgbClr val="2A4A6B"/>
-                </a:solidFill>
-                <a:latin typeface="Calibri" pitchFamily="34" charset="0"/>
-                <a:ea typeface="Calibri" pitchFamily="34" charset="-122"/>
-                <a:cs typeface="Calibri" pitchFamily="34" charset="-120"/>
-              </a:rPr>
-              <a:t>PERIGEE–APOGEE FILTER</a:t>
-            </a:r>
-            <a:endParaRPr lang="en-US" sz="900" dirty="0"/>
-          </a:p>
-        </p:txBody>
-      </p:sp>
-      <p:sp>
-        <p:nvSpPr>
-          <p:cNvPr id="40" name="Text 37"/>
-          <p:cNvSpPr/>
-          <p:nvPr/>
-        </p:nvSpPr>
-        <p:spPr>
-          <a:xfrm>
-            <a:off x="1554480" y="3749040"/>
-            <a:ext cx="2121408" cy="219456"/>
-          </a:xfrm>
-          <a:prstGeom prst="rect">
-            <a:avLst/>
-          </a:prstGeom>
-          <a:noFill/>
-          <a:ln/>
-        </p:spPr>
-        <p:txBody>
-          <a:bodyPr wrap="square" lIns="0" tIns="0" rIns="0" bIns="0" rtlCol="0" anchor="ctr"/>
-          <a:lstStyle/>
-          <a:p>
-            <a:pPr indent="0" marL="0">
-              <a:buNone/>
-            </a:pPr>
-            <a:r>
-              <a:rPr lang="en-US" sz="850" dirty="0">
-                <a:solidFill>
-                  <a:srgbClr val="5A6673"/>
-                </a:solidFill>
-                <a:latin typeface="Calibri" pitchFamily="34" charset="0"/>
-                <a:ea typeface="Calibri" pitchFamily="34" charset="-122"/>
-                <a:cs typeface="Calibri" pitchFamily="34" charset="-120"/>
-              </a:rPr>
-              <a:t>Orbits that can never intersect</a:t>
-            </a:r>
-            <a:endParaRPr lang="en-US" sz="850" dirty="0"/>
-          </a:p>
-        </p:txBody>
-      </p:sp>
-      <p:sp>
-        <p:nvSpPr>
-          <p:cNvPr id="41" name="Shape 38"/>
-          <p:cNvSpPr/>
-          <p:nvPr/>
-        </p:nvSpPr>
-        <p:spPr>
-          <a:xfrm>
-            <a:off x="3712464" y="3657600"/>
-            <a:ext cx="3584448" cy="201168"/>
-          </a:xfrm>
-          <a:prstGeom prst="rect">
-            <a:avLst/>
-          </a:prstGeom>
-          <a:solidFill>
-            <a:srgbClr val="EEF2F7"/>
-          </a:solidFill>
-          <a:ln/>
-        </p:spPr>
-      </p:sp>
-      <p:sp>
-        <p:nvSpPr>
-          <p:cNvPr id="42" name="Shape 39"/>
-          <p:cNvSpPr/>
-          <p:nvPr/>
-        </p:nvSpPr>
-        <p:spPr>
-          <a:xfrm>
-            <a:off x="3712464" y="3657600"/>
-            <a:ext cx="3584413" cy="201168"/>
-          </a:xfrm>
-          <a:prstGeom prst="rect">
-            <a:avLst/>
-          </a:prstGeom>
-          <a:solidFill>
-            <a:srgbClr val="6E93B8"/>
-          </a:solidFill>
-          <a:ln/>
-        </p:spPr>
-      </p:sp>
-      <p:sp>
-        <p:nvSpPr>
-          <p:cNvPr id="43" name="Text 40"/>
-          <p:cNvSpPr/>
-          <p:nvPr/>
-        </p:nvSpPr>
-        <p:spPr>
-          <a:xfrm>
-            <a:off x="7370064" y="3529584"/>
-            <a:ext cx="603504" cy="457200"/>
-          </a:xfrm>
-          <a:prstGeom prst="rect">
-            <a:avLst/>
-          </a:prstGeom>
-          <a:noFill/>
-          <a:ln/>
-        </p:spPr>
-        <p:txBody>
-          <a:bodyPr wrap="square" lIns="0" tIns="0" rIns="0" bIns="0" rtlCol="0" anchor="ctr"/>
-          <a:lstStyle/>
-          <a:p>
-            <a:pPr indent="0" marL="0">
-              <a:buNone/>
-            </a:pPr>
-            <a:r>
-              <a:rPr lang="en-US" sz="950" dirty="0">
-                <a:solidFill>
-                  <a:srgbClr val="5A6673"/>
-                </a:solidFill>
-                <a:latin typeface="Arial" pitchFamily="34" charset="0"/>
-                <a:ea typeface="Arial" pitchFamily="34" charset="-122"/>
-                <a:cs typeface="Arial" pitchFamily="34" charset="-120"/>
-              </a:rPr>
-              <a:t>99.995%</a:t>
-            </a:r>
-            <a:endParaRPr lang="en-US" sz="950" dirty="0"/>
-          </a:p>
-        </p:txBody>
-      </p:sp>
-      <p:sp>
-        <p:nvSpPr>
-          <p:cNvPr id="44" name="Text 41"/>
-          <p:cNvSpPr/>
-          <p:nvPr/>
-        </p:nvSpPr>
-        <p:spPr>
-          <a:xfrm>
-            <a:off x="310896" y="4096512"/>
-            <a:ext cx="1133856" cy="457200"/>
-          </a:xfrm>
-          <a:prstGeom prst="rect">
-            <a:avLst/>
-          </a:prstGeom>
-          <a:noFill/>
-          <a:ln/>
-        </p:spPr>
-        <p:txBody>
-          <a:bodyPr wrap="square" lIns="0" tIns="0" rIns="0" bIns="0" rtlCol="0" anchor="ctr"/>
-          <a:lstStyle/>
-          <a:p>
-            <a:pPr algn="r" indent="0" marL="0">
-              <a:buNone/>
-            </a:pPr>
-            <a:r>
-              <a:rPr lang="en-US" sz="1450" b="1" dirty="0">
-                <a:solidFill>
-                  <a:srgbClr val="2A4A6B"/>
-                </a:solidFill>
-                <a:latin typeface="Arial" pitchFamily="34" charset="0"/>
-                <a:ea typeface="Arial" pitchFamily="34" charset="-122"/>
-                <a:cs typeface="Arial" pitchFamily="34" charset="-120"/>
-              </a:rPr>
-              <a:t>253,010</a:t>
-            </a:r>
-            <a:endParaRPr lang="en-US" sz="1450" dirty="0"/>
-          </a:p>
-        </p:txBody>
-      </p:sp>
-      <p:sp>
-        <p:nvSpPr>
-          <p:cNvPr id="45" name="Text 42"/>
-          <p:cNvSpPr/>
-          <p:nvPr/>
-        </p:nvSpPr>
-        <p:spPr>
-          <a:xfrm>
-            <a:off x="1554480" y="4114800"/>
-            <a:ext cx="2084832" cy="201168"/>
-          </a:xfrm>
-          <a:prstGeom prst="rect">
-            <a:avLst/>
-          </a:prstGeom>
-          <a:noFill/>
-          <a:ln/>
-        </p:spPr>
-        <p:txBody>
-          <a:bodyPr wrap="square" lIns="0" tIns="0" rIns="0" bIns="0" rtlCol="0" anchor="ctr"/>
-          <a:lstStyle/>
-          <a:p>
-            <a:pPr indent="0" marL="0">
-              <a:buNone/>
-            </a:pPr>
-            <a:r>
-              <a:rPr lang="en-US" sz="900" b="1" spc="60" kern="0" dirty="0">
-                <a:solidFill>
-                  <a:srgbClr val="2A4A6B"/>
-                </a:solidFill>
-                <a:latin typeface="Calibri" pitchFamily="34" charset="0"/>
-                <a:ea typeface="Calibri" pitchFamily="34" charset="-122"/>
-                <a:cs typeface="Calibri" pitchFamily="34" charset="-120"/>
-              </a:rPr>
-              <a:t>COARSE SWEEP</a:t>
-            </a:r>
-            <a:endParaRPr lang="en-US" sz="900" dirty="0"/>
-          </a:p>
-        </p:txBody>
-      </p:sp>
-      <p:sp>
-        <p:nvSpPr>
-          <p:cNvPr id="46" name="Text 43"/>
-          <p:cNvSpPr/>
-          <p:nvPr/>
-        </p:nvSpPr>
-        <p:spPr>
-          <a:xfrm>
-            <a:off x="1554480" y="4315968"/>
-            <a:ext cx="2121408" cy="219456"/>
-          </a:xfrm>
-          <a:prstGeom prst="rect">
-            <a:avLst/>
-          </a:prstGeom>
-          <a:noFill/>
-          <a:ln/>
-        </p:spPr>
-        <p:txBody>
-          <a:bodyPr wrap="square" lIns="0" tIns="0" rIns="0" bIns="0" rtlCol="0" anchor="ctr"/>
-          <a:lstStyle/>
-          <a:p>
-            <a:pPr indent="0" marL="0">
-              <a:buNone/>
-            </a:pPr>
-            <a:r>
-              <a:rPr lang="en-US" sz="850" dirty="0">
-                <a:solidFill>
-                  <a:srgbClr val="5A6673"/>
-                </a:solidFill>
-                <a:latin typeface="Calibri" pitchFamily="34" charset="0"/>
-                <a:ea typeface="Calibri" pitchFamily="34" charset="-122"/>
-                <a:cs typeface="Calibri" pitchFamily="34" charset="-120"/>
-              </a:rPr>
-              <a:t>60 s steps, 450 km gate</a:t>
-            </a:r>
-            <a:endParaRPr lang="en-US" sz="850" dirty="0"/>
-          </a:p>
-        </p:txBody>
-      </p:sp>
-      <p:sp>
-        <p:nvSpPr>
-          <p:cNvPr id="47" name="Shape 44"/>
-          <p:cNvSpPr/>
-          <p:nvPr/>
-        </p:nvSpPr>
-        <p:spPr>
-          <a:xfrm>
-            <a:off x="3712464" y="4224528"/>
-            <a:ext cx="3584448" cy="201168"/>
-          </a:xfrm>
-          <a:prstGeom prst="rect">
-            <a:avLst/>
-          </a:prstGeom>
-          <a:solidFill>
-            <a:srgbClr val="EEF2F7"/>
-          </a:solidFill>
-          <a:ln/>
-        </p:spPr>
-      </p:sp>
-      <p:sp>
-        <p:nvSpPr>
-          <p:cNvPr id="48" name="Shape 45"/>
-          <p:cNvSpPr/>
-          <p:nvPr/>
-        </p:nvSpPr>
-        <p:spPr>
-          <a:xfrm>
-            <a:off x="3712464" y="4224528"/>
-            <a:ext cx="3339466" cy="201168"/>
-          </a:xfrm>
-          <a:prstGeom prst="rect">
-            <a:avLst/>
-          </a:prstGeom>
-          <a:solidFill>
-            <a:srgbClr val="3D73A8"/>
-          </a:solidFill>
-          <a:ln/>
-        </p:spPr>
-      </p:sp>
-      <p:sp>
-        <p:nvSpPr>
-          <p:cNvPr id="49" name="Text 46"/>
-          <p:cNvSpPr/>
-          <p:nvPr/>
-        </p:nvSpPr>
-        <p:spPr>
-          <a:xfrm>
-            <a:off x="7370064" y="4096512"/>
-            <a:ext cx="603504" cy="457200"/>
-          </a:xfrm>
-          <a:prstGeom prst="rect">
-            <a:avLst/>
-          </a:prstGeom>
-          <a:noFill/>
-          <a:ln/>
-        </p:spPr>
-        <p:txBody>
-          <a:bodyPr wrap="square" lIns="0" tIns="0" rIns="0" bIns="0" rtlCol="0" anchor="ctr"/>
-          <a:lstStyle/>
-          <a:p>
-            <a:pPr indent="0" marL="0">
-              <a:buNone/>
-            </a:pPr>
-            <a:r>
-              <a:rPr lang="en-US" sz="950" dirty="0">
-                <a:solidFill>
-                  <a:srgbClr val="5A6673"/>
-                </a:solidFill>
-                <a:latin typeface="Arial" pitchFamily="34" charset="0"/>
-                <a:ea typeface="Arial" pitchFamily="34" charset="-122"/>
-                <a:cs typeface="Arial" pitchFamily="34" charset="-120"/>
-              </a:rPr>
-              <a:t>68.7%</a:t>
-            </a:r>
-            <a:endParaRPr lang="en-US" sz="950" dirty="0"/>
-          </a:p>
-        </p:txBody>
-      </p:sp>
-      <p:sp>
-        <p:nvSpPr>
-          <p:cNvPr id="50" name="Text 47"/>
-          <p:cNvSpPr/>
-          <p:nvPr/>
-        </p:nvSpPr>
-        <p:spPr>
-          <a:xfrm>
-            <a:off x="310896" y="4663440"/>
-            <a:ext cx="1133856" cy="457200"/>
-          </a:xfrm>
-          <a:prstGeom prst="rect">
-            <a:avLst/>
-          </a:prstGeom>
-          <a:noFill/>
-          <a:ln/>
-        </p:spPr>
-        <p:txBody>
-          <a:bodyPr wrap="square" lIns="0" tIns="0" rIns="0" bIns="0" rtlCol="0" anchor="ctr"/>
-          <a:lstStyle/>
-          <a:p>
-            <a:pPr algn="r" indent="0" marL="0">
-              <a:buNone/>
-            </a:pPr>
-            <a:r>
-              <a:rPr lang="en-US" sz="1450" b="1" dirty="0">
-                <a:solidFill>
-                  <a:srgbClr val="1F497D"/>
-                </a:solidFill>
-                <a:latin typeface="Arial" pitchFamily="34" charset="0"/>
-                <a:ea typeface="Arial" pitchFamily="34" charset="-122"/>
-                <a:cs typeface="Arial" pitchFamily="34" charset="-120"/>
-              </a:rPr>
-              <a:t>3,032</a:t>
-            </a:r>
-            <a:endParaRPr lang="en-US" sz="1450" dirty="0"/>
-          </a:p>
-        </p:txBody>
-      </p:sp>
-      <p:sp>
-        <p:nvSpPr>
-          <p:cNvPr id="51" name="Text 48"/>
-          <p:cNvSpPr/>
-          <p:nvPr/>
-        </p:nvSpPr>
-        <p:spPr>
-          <a:xfrm>
-            <a:off x="1554480" y="4681728"/>
-            <a:ext cx="2084832" cy="201168"/>
-          </a:xfrm>
-          <a:prstGeom prst="rect">
-            <a:avLst/>
-          </a:prstGeom>
-          <a:noFill/>
-          <a:ln/>
-        </p:spPr>
-        <p:txBody>
-          <a:bodyPr wrap="square" lIns="0" tIns="0" rIns="0" bIns="0" rtlCol="0" anchor="ctr"/>
-          <a:lstStyle/>
-          <a:p>
-            <a:pPr indent="0" marL="0">
-              <a:buNone/>
-            </a:pPr>
-            <a:r>
-              <a:rPr lang="en-US" sz="900" b="1" spc="60" kern="0" dirty="0">
-                <a:solidFill>
-                  <a:srgbClr val="1F497D"/>
-                </a:solidFill>
-                <a:latin typeface="Calibri" pitchFamily="34" charset="0"/>
-                <a:ea typeface="Calibri" pitchFamily="34" charset="-122"/>
-                <a:cs typeface="Calibri" pitchFamily="34" charset="-120"/>
-              </a:rPr>
-              <a:t>CONFIRMED EVENTS</a:t>
-            </a:r>
-            <a:endParaRPr lang="en-US" sz="900" dirty="0"/>
-          </a:p>
-        </p:txBody>
-      </p:sp>
-      <p:sp>
-        <p:nvSpPr>
-          <p:cNvPr id="52" name="Text 49"/>
-          <p:cNvSpPr/>
-          <p:nvPr/>
-        </p:nvSpPr>
-        <p:spPr>
-          <a:xfrm>
-            <a:off x="1554480" y="4882896"/>
-            <a:ext cx="2121408" cy="219456"/>
-          </a:xfrm>
-          <a:prstGeom prst="rect">
-            <a:avLst/>
-          </a:prstGeom>
-          <a:noFill/>
-          <a:ln/>
-        </p:spPr>
-        <p:txBody>
-          <a:bodyPr wrap="square" lIns="0" tIns="0" rIns="0" bIns="0" rtlCol="0" anchor="ctr"/>
-          <a:lstStyle/>
-          <a:p>
-            <a:pPr indent="0" marL="0">
-              <a:buNone/>
-            </a:pPr>
-            <a:r>
-              <a:rPr lang="en-US" sz="850" dirty="0">
-                <a:solidFill>
-                  <a:srgbClr val="5A6673"/>
-                </a:solidFill>
-                <a:latin typeface="Calibri" pitchFamily="34" charset="0"/>
-                <a:ea typeface="Calibri" pitchFamily="34" charset="-122"/>
-                <a:cs typeface="Calibri" pitchFamily="34" charset="-120"/>
-              </a:rPr>
-              <a:t>Refined to exact TCA by bisection</a:t>
-            </a:r>
-            <a:endParaRPr lang="en-US" sz="850" dirty="0"/>
-          </a:p>
-        </p:txBody>
-      </p:sp>
-      <p:sp>
-        <p:nvSpPr>
-          <p:cNvPr id="53" name="Shape 50"/>
-          <p:cNvSpPr/>
-          <p:nvPr/>
-        </p:nvSpPr>
-        <p:spPr>
-          <a:xfrm>
-            <a:off x="3712464" y="4791456"/>
-            <a:ext cx="3584448" cy="201168"/>
-          </a:xfrm>
-          <a:prstGeom prst="rect">
-            <a:avLst/>
-          </a:prstGeom>
-          <a:solidFill>
-            <a:srgbClr val="EEF2F7"/>
-          </a:solidFill>
-          <a:ln/>
-        </p:spPr>
-      </p:sp>
-      <p:sp>
-        <p:nvSpPr>
-          <p:cNvPr id="54" name="Shape 51"/>
-          <p:cNvSpPr/>
-          <p:nvPr/>
-        </p:nvSpPr>
-        <p:spPr>
-          <a:xfrm>
-            <a:off x="3712464" y="4791456"/>
-            <a:ext cx="457200" cy="201168"/>
-          </a:xfrm>
-          <a:prstGeom prst="rect">
-            <a:avLst/>
-          </a:prstGeom>
-          <a:solidFill>
-            <a:srgbClr val="1F497D"/>
-          </a:solidFill>
-          <a:ln/>
-        </p:spPr>
-      </p:sp>
-      <p:sp>
-        <p:nvSpPr>
-          <p:cNvPr id="55" name="Text 52"/>
-          <p:cNvSpPr/>
-          <p:nvPr/>
-        </p:nvSpPr>
-        <p:spPr>
-          <a:xfrm>
-            <a:off x="7370064" y="4663440"/>
-            <a:ext cx="603504" cy="457200"/>
-          </a:xfrm>
-          <a:prstGeom prst="rect">
-            <a:avLst/>
-          </a:prstGeom>
-          <a:noFill/>
-          <a:ln/>
-        </p:spPr>
-        <p:txBody>
-          <a:bodyPr wrap="square" lIns="0" tIns="0" rIns="0" bIns="0" rtlCol="0" anchor="ctr"/>
-          <a:lstStyle/>
-          <a:p>
-            <a:pPr indent="0" marL="0">
-              <a:buNone/>
-            </a:pPr>
-            <a:r>
-              <a:rPr lang="en-US" sz="950" b="1" dirty="0">
-                <a:solidFill>
-                  <a:srgbClr val="1F497D"/>
-                </a:solidFill>
-                <a:latin typeface="Arial" pitchFamily="34" charset="0"/>
-                <a:ea typeface="Arial" pitchFamily="34" charset="-122"/>
-                <a:cs typeface="Arial" pitchFamily="34" charset="-120"/>
-              </a:rPr>
-              <a:t>0.82%</a:t>
-            </a:r>
-            <a:endParaRPr lang="en-US" sz="950" dirty="0"/>
-          </a:p>
-        </p:txBody>
-      </p:sp>
-      <p:sp>
-        <p:nvSpPr>
-          <p:cNvPr id="56" name="Text 53"/>
-          <p:cNvSpPr/>
-          <p:nvPr/>
-        </p:nvSpPr>
-        <p:spPr>
-          <a:xfrm>
-            <a:off x="310896" y="5266944"/>
-            <a:ext cx="7680960" cy="274320"/>
-          </a:xfrm>
-          <a:prstGeom prst="rect">
-            <a:avLst/>
-          </a:prstGeom>
-          <a:noFill/>
-          <a:ln/>
-        </p:spPr>
-        <p:txBody>
-          <a:bodyPr wrap="square" lIns="0" tIns="0" rIns="0" bIns="0" rtlCol="0" anchor="ctr"/>
-          <a:lstStyle/>
-          <a:p>
-            <a:pPr indent="0" marL="0">
-              <a:buNone/>
-            </a:pPr>
-            <a:r>
-              <a:rPr lang="en-US" sz="900" i="1" dirty="0">
-                <a:solidFill>
-                  <a:srgbClr val="5A6673"/>
-                </a:solidFill>
-                <a:latin typeface="Calibri" pitchFamily="34" charset="0"/>
-                <a:ea typeface="Calibri" pitchFamily="34" charset="-122"/>
-                <a:cs typeface="Calibri" pitchFamily="34" charset="-120"/>
-              </a:rPr>
-              <a:t>121× reduction, and the first filter removes only 20 pairs — bar length ∝ log₁₀(count); every stage figure is measured by the run, not asserted</a:t>
-            </a:r>
-            <a:endParaRPr lang="en-US" sz="900" dirty="0"/>
-          </a:p>
-        </p:txBody>
-      </p:sp>
-      <p:sp>
-        <p:nvSpPr>
-          <p:cNvPr id="57" name="Shape 54"/>
-          <p:cNvSpPr/>
-          <p:nvPr/>
-        </p:nvSpPr>
-        <p:spPr>
-          <a:xfrm>
-            <a:off x="8101584" y="2962656"/>
-            <a:ext cx="2286000" cy="2377440"/>
-          </a:xfrm>
-          <a:prstGeom prst="roundRect">
-            <a:avLst>
-              <a:gd name="adj" fmla="val 1200"/>
-            </a:avLst>
-          </a:prstGeom>
-          <a:solidFill>
-            <a:srgbClr val="FFFFFF"/>
-          </a:solidFill>
-          <a:ln w="9525">
-            <a:solidFill>
-              <a:srgbClr val="D4DAE2"/>
-            </a:solidFill>
-            <a:prstDash val="solid"/>
-          </a:ln>
-        </p:spPr>
-      </p:sp>
-      <p:sp>
-        <p:nvSpPr>
-          <p:cNvPr id="58" name="Text 55"/>
-          <p:cNvSpPr/>
-          <p:nvPr/>
-        </p:nvSpPr>
-        <p:spPr>
-          <a:xfrm>
-            <a:off x="8284464" y="3090672"/>
-            <a:ext cx="1920240" cy="182880"/>
-          </a:xfrm>
-          <a:prstGeom prst="rect">
-            <a:avLst/>
-          </a:prstGeom>
-          <a:noFill/>
-          <a:ln/>
-        </p:spPr>
-        <p:txBody>
-          <a:bodyPr wrap="square" lIns="0" tIns="0" rIns="0" bIns="0" rtlCol="0" anchor="ctr"/>
-          <a:lstStyle/>
-          <a:p>
-            <a:pPr indent="0" marL="0">
-              <a:buNone/>
-            </a:pPr>
-            <a:r>
-              <a:rPr lang="en-US" sz="850" b="1" spc="90" kern="0" dirty="0">
-                <a:solidFill>
-                  <a:srgbClr val="1E7A4C"/>
-                </a:solidFill>
-                <a:latin typeface="Calibri" pitchFamily="34" charset="0"/>
-                <a:ea typeface="Calibri" pitchFamily="34" charset="-122"/>
-                <a:cs typeface="Calibri" pitchFamily="34" charset="-120"/>
-              </a:rPr>
-              <a:t>VERIFIED, NOT CLAIMED</a:t>
-            </a:r>
-            <a:endParaRPr lang="en-US" sz="850" dirty="0"/>
-          </a:p>
-        </p:txBody>
-      </p:sp>
-      <p:sp>
-        <p:nvSpPr>
-          <p:cNvPr id="59" name="Text 56"/>
-          <p:cNvSpPr/>
-          <p:nvPr/>
-        </p:nvSpPr>
-        <p:spPr>
-          <a:xfrm>
-            <a:off x="8284464" y="3310128"/>
-            <a:ext cx="1956816" cy="310896"/>
-          </a:xfrm>
-          <a:prstGeom prst="rect">
-            <a:avLst/>
-          </a:prstGeom>
-          <a:noFill/>
-          <a:ln/>
-        </p:spPr>
-        <p:txBody>
-          <a:bodyPr wrap="square" lIns="0" tIns="0" rIns="0" bIns="0" rtlCol="0" anchor="ctr"/>
-          <a:lstStyle/>
-          <a:p>
-            <a:pPr indent="0" marL="0">
-              <a:buNone/>
-            </a:pPr>
-            <a:r>
-              <a:rPr lang="en-US" sz="2100" b="1" dirty="0">
-                <a:solidFill>
-                  <a:srgbClr val="1F497D"/>
-                </a:solidFill>
-                <a:latin typeface="Arial" pitchFamily="34" charset="0"/>
-                <a:ea typeface="Arial" pitchFamily="34" charset="-122"/>
-                <a:cs typeface="Arial" pitchFamily="34" charset="-120"/>
-              </a:rPr>
-              <a:t>3,710,880</a:t>
+              <a:t>≈1.73</a:t>
             </a:r>
             <a:pPr indent="0" marL="0">
               <a:buNone/>
@@ -6625,186 +7354,7 @@
       </p:sp>
       <p:sp>
         <p:nvSpPr>
-          <p:cNvPr id="60" name="Text 57"/>
-          <p:cNvSpPr/>
-          <p:nvPr/>
-        </p:nvSpPr>
-        <p:spPr>
-          <a:xfrm>
-            <a:off x="8284464" y="3602736"/>
-            <a:ext cx="1956816" cy="347472"/>
-          </a:xfrm>
-          <a:prstGeom prst="rect">
-            <a:avLst/>
-          </a:prstGeom>
-          <a:noFill/>
-          <a:ln/>
-        </p:spPr>
-        <p:txBody>
-          <a:bodyPr wrap="square" lIns="0" tIns="0" rIns="0" bIns="0" rtlCol="0" anchor="ctr"/>
-          <a:lstStyle/>
-          <a:p>
-            <a:pPr indent="0" marL="0">
-              <a:lnSpc>
-                <a:spcPts val="1100"/>
-              </a:lnSpc>
-              <a:buNone/>
-            </a:pPr>
-            <a:r>
-              <a:rPr lang="en-US" sz="950" dirty="0">
-                <a:solidFill>
-                  <a:srgbClr val="333333"/>
-                </a:solidFill>
-                <a:latin typeface="Calibri" pitchFamily="34" charset="0"/>
-                <a:ea typeface="Calibri" pitchFamily="34" charset="-122"/>
-                <a:cs typeface="Calibri" pitchFamily="34" charset="-120"/>
-              </a:rPr>
-              <a:t>SGP4 propagations per run (~15 s)</a:t>
-            </a:r>
-            <a:endParaRPr lang="en-US" sz="950" dirty="0"/>
-          </a:p>
-        </p:txBody>
-      </p:sp>
-      <p:sp>
-        <p:nvSpPr>
-          <p:cNvPr id="61" name="Text 58"/>
-          <p:cNvSpPr/>
-          <p:nvPr/>
-        </p:nvSpPr>
-        <p:spPr>
-          <a:xfrm>
-            <a:off x="8284464" y="3968496"/>
-            <a:ext cx="1956816" cy="310896"/>
-          </a:xfrm>
-          <a:prstGeom prst="rect">
-            <a:avLst/>
-          </a:prstGeom>
-          <a:noFill/>
-          <a:ln/>
-        </p:spPr>
-        <p:txBody>
-          <a:bodyPr wrap="square" lIns="0" tIns="0" rIns="0" bIns="0" rtlCol="0" anchor="ctr"/>
-          <a:lstStyle/>
-          <a:p>
-            <a:pPr indent="0" marL="0">
-              <a:buNone/>
-            </a:pPr>
-            <a:r>
-              <a:rPr lang="en-US" sz="2100" b="1" dirty="0">
-                <a:solidFill>
-                  <a:srgbClr val="1E7A4C"/>
-                </a:solidFill>
-                <a:latin typeface="Arial" pitchFamily="34" charset="0"/>
-                <a:ea typeface="Arial" pitchFamily="34" charset="-122"/>
-                <a:cs typeface="Arial" pitchFamily="34" charset="-120"/>
-              </a:rPr>
-              <a:t>1.14×10⁻¹³</a:t>
-            </a:r>
-            <a:pPr indent="0" marL="0">
-              <a:buNone/>
-            </a:pPr>
-            <a:r>
-              <a:rPr lang="en-US" sz="1000" dirty="0">
-                <a:solidFill>
-                  <a:srgbClr val="5A6673"/>
-                </a:solidFill>
-                <a:latin typeface="Arial" pitchFamily="34" charset="0"/>
-                <a:ea typeface="Arial" pitchFamily="34" charset="-122"/>
-                <a:cs typeface="Arial" pitchFamily="34" charset="-120"/>
-              </a:rPr>
-              <a:t> km</a:t>
-            </a:r>
-            <a:endParaRPr lang="en-US" sz="2100" dirty="0"/>
-          </a:p>
-        </p:txBody>
-      </p:sp>
-      <p:sp>
-        <p:nvSpPr>
-          <p:cNvPr id="62" name="Text 59"/>
-          <p:cNvSpPr/>
-          <p:nvPr/>
-        </p:nvSpPr>
-        <p:spPr>
-          <a:xfrm>
-            <a:off x="8284464" y="4261104"/>
-            <a:ext cx="1956816" cy="347472"/>
-          </a:xfrm>
-          <a:prstGeom prst="rect">
-            <a:avLst/>
-          </a:prstGeom>
-          <a:noFill/>
-          <a:ln/>
-        </p:spPr>
-        <p:txBody>
-          <a:bodyPr wrap="square" lIns="0" tIns="0" rIns="0" bIns="0" rtlCol="0" anchor="ctr"/>
-          <a:lstStyle/>
-          <a:p>
-            <a:pPr indent="0" marL="0">
-              <a:lnSpc>
-                <a:spcPts val="1100"/>
-              </a:lnSpc>
-              <a:buNone/>
-            </a:pPr>
-            <a:r>
-              <a:rPr lang="en-US" sz="950" dirty="0">
-                <a:solidFill>
-                  <a:srgbClr val="333333"/>
-                </a:solidFill>
-                <a:latin typeface="Calibri" pitchFamily="34" charset="0"/>
-                <a:ea typeface="Calibri" pitchFamily="34" charset="-122"/>
-                <a:cs typeface="Calibri" pitchFamily="34" charset="-120"/>
-              </a:rPr>
-              <a:t>Cascade vs brute-force all-pairs agreement</a:t>
-            </a:r>
-            <a:endParaRPr lang="en-US" sz="950" dirty="0"/>
-          </a:p>
-        </p:txBody>
-      </p:sp>
-      <p:sp>
-        <p:nvSpPr>
-          <p:cNvPr id="63" name="Text 60"/>
-          <p:cNvSpPr/>
-          <p:nvPr/>
-        </p:nvSpPr>
-        <p:spPr>
-          <a:xfrm>
-            <a:off x="8284464" y="4626864"/>
-            <a:ext cx="1956816" cy="310896"/>
-          </a:xfrm>
-          <a:prstGeom prst="rect">
-            <a:avLst/>
-          </a:prstGeom>
-          <a:noFill/>
-          <a:ln/>
-        </p:spPr>
-        <p:txBody>
-          <a:bodyPr wrap="square" lIns="0" tIns="0" rIns="0" bIns="0" rtlCol="0" anchor="ctr"/>
-          <a:lstStyle/>
-          <a:p>
-            <a:pPr indent="0" marL="0">
-              <a:buNone/>
-            </a:pPr>
-            <a:r>
-              <a:rPr lang="en-US" sz="2100" b="1" dirty="0">
-                <a:solidFill>
-                  <a:srgbClr val="1F497D"/>
-                </a:solidFill>
-                <a:latin typeface="Arial" pitchFamily="34" charset="0"/>
-                <a:ea typeface="Arial" pitchFamily="34" charset="-122"/>
-                <a:cs typeface="Arial" pitchFamily="34" charset="-120"/>
-              </a:rPr>
-              <a:t>≈1.73</a:t>
-            </a:r>
-            <a:pPr indent="0" marL="0">
-              <a:buNone/>
-            </a:pPr>
-            <a:endParaRPr lang="en-US" sz="2100" dirty="0"/>
-          </a:p>
-        </p:txBody>
-      </p:sp>
-      <p:sp>
-        <p:nvSpPr>
-          <p:cNvPr id="64" name="Text 61"/>
+          <p:cNvPr id="76" name="Text 73"/>
           <p:cNvSpPr/>
           <p:nvPr/>
         </p:nvSpPr>
@@ -7265,12 +7815,12 @@
         </p:nvSpPr>
         <p:spPr>
           <a:xfrm>
-            <a:off x="310896" y="1298448"/>
-            <a:ext cx="2450592" cy="1060704"/>
+            <a:off x="310896" y="1280160"/>
+            <a:ext cx="2450592" cy="1170432"/>
           </a:xfrm>
           <a:prstGeom prst="roundRect">
             <a:avLst>
-              <a:gd name="adj" fmla="val 2586"/>
+              <a:gd name="adj" fmla="val 2344"/>
             </a:avLst>
           </a:prstGeom>
           <a:solidFill>
@@ -7292,7 +7842,7 @@
         </p:nvSpPr>
         <p:spPr>
           <a:xfrm>
-            <a:off x="438912" y="1408176"/>
+            <a:off x="438912" y="1371600"/>
             <a:ext cx="219456" cy="219456"/>
           </a:xfrm>
           <a:prstGeom prst="rect">
@@ -7331,7 +7881,7 @@
         </p:nvSpPr>
         <p:spPr>
           <a:xfrm>
-            <a:off x="694944" y="1408176"/>
+            <a:off x="694944" y="1371600"/>
             <a:ext cx="1920240" cy="219456"/>
           </a:xfrm>
           <a:prstGeom prst="rect">
@@ -7370,27 +7920,27 @@
         </p:nvSpPr>
         <p:spPr>
           <a:xfrm>
-            <a:off x="438912" y="1682496"/>
-            <a:ext cx="2212848" cy="603504"/>
-          </a:xfrm>
-          <a:prstGeom prst="rect">
-            <a:avLst/>
-          </a:prstGeom>
-          <a:noFill/>
-          <a:ln/>
-        </p:spPr>
-        <p:txBody>
-          <a:bodyPr wrap="square" lIns="0" tIns="0" rIns="0" bIns="0" rtlCol="0" anchor="ctr"/>
+            <a:off x="438912" y="1627632"/>
+            <a:ext cx="2231136" cy="768096"/>
+          </a:xfrm>
+          <a:prstGeom prst="rect">
+            <a:avLst/>
+          </a:prstGeom>
+          <a:noFill/>
+          <a:ln/>
+        </p:spPr>
+        <p:txBody>
+          <a:bodyPr wrap="square" lIns="0" tIns="0" rIns="0" bIns="0" rtlCol="0" anchor="t"/>
           <a:lstStyle/>
           <a:p>
             <a:pPr indent="0" marL="0">
               <a:lnSpc>
-                <a:spcPts val="1150"/>
+                <a:spcPts val="1100"/>
               </a:lnSpc>
               <a:buNone/>
             </a:pPr>
             <a:r>
-              <a:rPr lang="en-US" sz="950" dirty="0">
+              <a:rPr lang="en-US" sz="900" dirty="0">
                 <a:solidFill>
                   <a:srgbClr val="333333"/>
                 </a:solidFill>
@@ -7398,9 +7948,9 @@
                 <a:ea typeface="Calibri" pitchFamily="34" charset="-122"/>
                 <a:cs typeface="Calibri" pitchFamily="34" charset="-120"/>
               </a:rPr>
-              <a:t>Not a concept. A working console with a real screening engine, running today.</a:t>
-            </a:r>
-            <a:endParaRPr lang="en-US" sz="950" dirty="0"/>
+              <a:t>Not a concept. A working console with a real screening engine, running today — every number in this deck came out of it, not out of a plan.</a:t>
+            </a:r>
+            <a:endParaRPr lang="en-US" sz="900" dirty="0"/>
           </a:p>
         </p:txBody>
       </p:sp>
@@ -7412,12 +7962,12 @@
         </p:nvSpPr>
         <p:spPr>
           <a:xfrm>
-            <a:off x="2916936" y="1298448"/>
-            <a:ext cx="2450592" cy="1060704"/>
+            <a:off x="2916936" y="1280160"/>
+            <a:ext cx="2450592" cy="1170432"/>
           </a:xfrm>
           <a:prstGeom prst="roundRect">
             <a:avLst>
-              <a:gd name="adj" fmla="val 2586"/>
+              <a:gd name="adj" fmla="val 2344"/>
             </a:avLst>
           </a:prstGeom>
           <a:solidFill>
@@ -7439,7 +7989,7 @@
         </p:nvSpPr>
         <p:spPr>
           <a:xfrm>
-            <a:off x="3044952" y="1408176"/>
+            <a:off x="3044952" y="1371600"/>
             <a:ext cx="219456" cy="219456"/>
           </a:xfrm>
           <a:prstGeom prst="rect">
@@ -7478,7 +8028,7 @@
         </p:nvSpPr>
         <p:spPr>
           <a:xfrm>
-            <a:off x="3300984" y="1408176"/>
+            <a:off x="3300984" y="1371600"/>
             <a:ext cx="1920240" cy="219456"/>
           </a:xfrm>
           <a:prstGeom prst="rect">
@@ -7517,27 +8067,27 @@
         </p:nvSpPr>
         <p:spPr>
           <a:xfrm>
-            <a:off x="3044952" y="1682496"/>
-            <a:ext cx="2212848" cy="603504"/>
-          </a:xfrm>
-          <a:prstGeom prst="rect">
-            <a:avLst/>
-          </a:prstGeom>
-          <a:noFill/>
-          <a:ln/>
-        </p:spPr>
-        <p:txBody>
-          <a:bodyPr wrap="square" lIns="0" tIns="0" rIns="0" bIns="0" rtlCol="0" anchor="ctr"/>
+            <a:off x="3044952" y="1627632"/>
+            <a:ext cx="2231136" cy="768096"/>
+          </a:xfrm>
+          <a:prstGeom prst="rect">
+            <a:avLst/>
+          </a:prstGeom>
+          <a:noFill/>
+          <a:ln/>
+        </p:spPr>
+        <p:txBody>
+          <a:bodyPr wrap="square" lIns="0" tIns="0" rIns="0" bIns="0" rtlCol="0" anchor="t"/>
           <a:lstStyle/>
           <a:p>
             <a:pPr indent="0" marL="0">
               <a:lnSpc>
-                <a:spcPts val="1150"/>
+                <a:spcPts val="1100"/>
               </a:lnSpc>
               <a:buNone/>
             </a:pPr>
             <a:r>
-              <a:rPr lang="en-US" sz="950" dirty="0">
+              <a:rPr lang="en-US" sz="900" dirty="0">
                 <a:solidFill>
                   <a:srgbClr val="333333"/>
                 </a:solidFill>
@@ -7545,9 +8095,9 @@
                 <a:ea typeface="Calibri" pitchFamily="34" charset="-122"/>
                 <a:cs typeface="Calibri" pitchFamily="34" charset="-120"/>
               </a:rPr>
-              <a:t>CelesTrak publishes TLEs free with no sign-up — the usual blocker for this theme.</a:t>
-            </a:r>
-            <a:endParaRPr lang="en-US" sz="950" dirty="0"/>
+              <a:t>CelesTrak publishes element sets free, no sign-up. A licensed catalogue is the usual blocker on this theme; there is nothing here to procure.</a:t>
+            </a:r>
+            <a:endParaRPr lang="en-US" sz="900" dirty="0"/>
           </a:p>
         </p:txBody>
       </p:sp>
@@ -7559,12 +8109,12 @@
         </p:nvSpPr>
         <p:spPr>
           <a:xfrm>
-            <a:off x="5522976" y="1298448"/>
-            <a:ext cx="2450592" cy="1060704"/>
+            <a:off x="5522976" y="1280160"/>
+            <a:ext cx="2450592" cy="1170432"/>
           </a:xfrm>
           <a:prstGeom prst="roundRect">
             <a:avLst>
-              <a:gd name="adj" fmla="val 2586"/>
+              <a:gd name="adj" fmla="val 2344"/>
             </a:avLst>
           </a:prstGeom>
           <a:solidFill>
@@ -7586,7 +8136,7 @@
         </p:nvSpPr>
         <p:spPr>
           <a:xfrm>
-            <a:off x="5650992" y="1408176"/>
+            <a:off x="5650992" y="1371600"/>
             <a:ext cx="219456" cy="219456"/>
           </a:xfrm>
           <a:prstGeom prst="rect">
@@ -7625,7 +8175,7 @@
         </p:nvSpPr>
         <p:spPr>
           <a:xfrm>
-            <a:off x="5907024" y="1408176"/>
+            <a:off x="5907024" y="1371600"/>
             <a:ext cx="1920240" cy="219456"/>
           </a:xfrm>
           <a:prstGeom prst="rect">
@@ -7664,27 +8214,27 @@
         </p:nvSpPr>
         <p:spPr>
           <a:xfrm>
-            <a:off x="5650992" y="1682496"/>
-            <a:ext cx="2212848" cy="603504"/>
-          </a:xfrm>
-          <a:prstGeom prst="rect">
-            <a:avLst/>
-          </a:prstGeom>
-          <a:noFill/>
-          <a:ln/>
-        </p:spPr>
-        <p:txBody>
-          <a:bodyPr wrap="square" lIns="0" tIns="0" rIns="0" bIns="0" rtlCol="0" anchor="ctr"/>
+            <a:off x="5650992" y="1627632"/>
+            <a:ext cx="2231136" cy="768096"/>
+          </a:xfrm>
+          <a:prstGeom prst="rect">
+            <a:avLst/>
+          </a:prstGeom>
+          <a:noFill/>
+          <a:ln/>
+        </p:spPr>
+        <p:txBody>
+          <a:bodyPr wrap="square" lIns="0" tIns="0" rIns="0" bIns="0" rtlCol="0" anchor="t"/>
           <a:lstStyle/>
           <a:p>
             <a:pPr indent="0" marL="0">
               <a:lnSpc>
-                <a:spcPts val="1150"/>
+                <a:spcPts val="1100"/>
               </a:lnSpc>
               <a:buNone/>
             </a:pPr>
             <a:r>
-              <a:rPr lang="en-US" sz="950" dirty="0">
+              <a:rPr lang="en-US" sz="900" dirty="0">
                 <a:solidFill>
                   <a:srgbClr val="333333"/>
                 </a:solidFill>
@@ -7692,9 +8242,9 @@
                 <a:ea typeface="Calibri" pitchFamily="34" charset="-122"/>
                 <a:cs typeface="Calibri" pitchFamily="34" charset="-120"/>
               </a:rPr>
-              <a:t>No backend, no database, no server. Static hosting, or one offline file.</a:t>
-            </a:r>
-            <a:endParaRPr lang="en-US" sz="950" dirty="0"/>
+              <a:t>No backend, no database, no server, no API key. Free static hosting, or one 1.7 MB file that runs offline from a USB stick.</a:t>
+            </a:r>
+            <a:endParaRPr lang="en-US" sz="900" dirty="0"/>
           </a:p>
         </p:txBody>
       </p:sp>
@@ -7706,12 +8256,12 @@
         </p:nvSpPr>
         <p:spPr>
           <a:xfrm>
-            <a:off x="8129016" y="1298448"/>
-            <a:ext cx="2450592" cy="1060704"/>
+            <a:off x="8129016" y="1280160"/>
+            <a:ext cx="2450592" cy="1170432"/>
           </a:xfrm>
           <a:prstGeom prst="roundRect">
             <a:avLst>
-              <a:gd name="adj" fmla="val 2586"/>
+              <a:gd name="adj" fmla="val 2344"/>
             </a:avLst>
           </a:prstGeom>
           <a:solidFill>
@@ -7733,7 +8283,7 @@
         </p:nvSpPr>
         <p:spPr>
           <a:xfrm>
-            <a:off x="8257032" y="1408176"/>
+            <a:off x="8257032" y="1371600"/>
             <a:ext cx="219456" cy="219456"/>
           </a:xfrm>
           <a:prstGeom prst="rect">
@@ -7772,7 +8322,7 @@
         </p:nvSpPr>
         <p:spPr>
           <a:xfrm>
-            <a:off x="8513064" y="1408176"/>
+            <a:off x="8513064" y="1371600"/>
             <a:ext cx="1920240" cy="219456"/>
           </a:xfrm>
           <a:prstGeom prst="rect">
@@ -7797,7 +8347,7 @@
                 <a:ea typeface="Calibri" pitchFamily="34" charset="-122"/>
                 <a:cs typeface="Calibri" pitchFamily="34" charset="-120"/>
               </a:rPr>
-              <a:t>Proven correct</a:t>
+              <a:t>Open and checkable</a:t>
             </a:r>
             <a:endParaRPr lang="en-US" sz="1100" dirty="0"/>
           </a:p>
@@ -7811,27 +8361,27 @@
         </p:nvSpPr>
         <p:spPr>
           <a:xfrm>
-            <a:off x="8257032" y="1682496"/>
-            <a:ext cx="2212848" cy="603504"/>
-          </a:xfrm>
-          <a:prstGeom prst="rect">
-            <a:avLst/>
-          </a:prstGeom>
-          <a:noFill/>
-          <a:ln/>
-        </p:spPr>
-        <p:txBody>
-          <a:bodyPr wrap="square" lIns="0" tIns="0" rIns="0" bIns="0" rtlCol="0" anchor="ctr"/>
+            <a:off x="8257032" y="1627632"/>
+            <a:ext cx="2231136" cy="768096"/>
+          </a:xfrm>
+          <a:prstGeom prst="rect">
+            <a:avLst/>
+          </a:prstGeom>
+          <a:noFill/>
+          <a:ln/>
+        </p:spPr>
+        <p:txBody>
+          <a:bodyPr wrap="square" lIns="0" tIns="0" rIns="0" bIns="0" rtlCol="0" anchor="t"/>
           <a:lstStyle/>
           <a:p>
             <a:pPr indent="0" marL="0">
               <a:lnSpc>
-                <a:spcPts val="1150"/>
+                <a:spcPts val="1100"/>
               </a:lnSpc>
               <a:buNone/>
             </a:pPr>
             <a:r>
-              <a:rPr lang="en-US" sz="950" dirty="0">
+              <a:rPr lang="en-US" sz="900" dirty="0">
                 <a:solidFill>
                   <a:srgbClr val="333333"/>
                 </a:solidFill>
@@ -7839,9 +8389,9 @@
                 <a:ea typeface="Calibri" pitchFamily="34" charset="-122"/>
                 <a:cs typeface="Calibri" pitchFamily="34" charset="-120"/>
               </a:rPr>
-              <a:t>62 known-answer tests, including brute-force cross-check of the whole cascade.</a:t>
-            </a:r>
-            <a:endParaRPr lang="en-US" sz="950" dirty="0"/>
+              <a:t>MIT licence; engine, snapshot and results all in the repository. 62 known-answer tests, including a brute-force cross-check of the cascade.</a:t>
+            </a:r>
+            <a:endParaRPr lang="en-US" sz="900" dirty="0"/>
           </a:p>
         </p:txBody>
       </p:sp>
@@ -10173,7 +10723,7 @@
                 <a:ea typeface="Calibri" pitchFamily="34" charset="-122"/>
                 <a:cs typeface="Calibri" pitchFamily="34" charset="-120"/>
               </a:rPr>
-              <a:t>Screening you can run yourself, on open data, is sovereign capability — supporting India’s Debris Free Space Missions target for 2030.</a:t>
+              <a:t>Screening you can run yourself, on open data, under an MIT licence, is sovereign capability — no vendor, no export licence, no foreign dependency. It supports India’s Debris Free Space Missions target for 2030.</a:t>
             </a:r>
             <a:endParaRPr lang="en-US" sz="950" dirty="0"/>
           </a:p>
@@ -12120,8 +12670,47 @@
         </p:nvSpPr>
         <p:spPr>
           <a:xfrm>
+            <a:off x="4846320" y="4626864"/>
+            <a:ext cx="5394960" cy="256032"/>
+          </a:xfrm>
+          <a:prstGeom prst="rect">
+            <a:avLst/>
+          </a:prstGeom>
+          <a:noFill/>
+          <a:ln/>
+        </p:spPr>
+        <p:txBody>
+          <a:bodyPr wrap="square" lIns="0" tIns="0" rIns="0" bIns="0" rtlCol="0" anchor="ctr"/>
+          <a:lstStyle/>
+          <a:p>
+            <a:pPr indent="0" marL="0">
+              <a:buNone/>
+            </a:pPr>
+            <a:r>
+              <a:rPr lang="en-US" sz="1000" dirty="0">
+                <a:solidFill>
+                  <a:srgbClr val="333333"/>
+                </a:solidFill>
+                <a:latin typeface="Calibri" pitchFamily="34" charset="0"/>
+                <a:ea typeface="Calibri" pitchFamily="34" charset="-122"/>
+                <a:cs typeface="Calibri" pitchFamily="34" charset="-120"/>
+              </a:rPr>
+              <a:t>MIT licence — engine, snapshot and screening results all in the tree</a:t>
+            </a:r>
+            <a:endParaRPr lang="en-US" sz="1000" dirty="0"/>
+          </a:p>
+        </p:txBody>
+      </p:sp>
+      <p:sp>
+        <p:nvSpPr>
+          <p:cNvPr id="57" name="Text 54"/>
+          <p:cNvSpPr/>
+          <p:nvPr/>
+        </p:nvSpPr>
+        <p:spPr>
+          <a:xfrm>
             <a:off x="512064" y="4626864"/>
-            <a:ext cx="4754880" cy="256032"/>
+            <a:ext cx="4297680" cy="256032"/>
           </a:xfrm>
           <a:prstGeom prst="rect">
             <a:avLst/>
@@ -12153,7 +12742,7 @@
       </p:sp>
       <p:sp>
         <p:nvSpPr>
-          <p:cNvPr id="57" name="Text 54"/>
+          <p:cNvPr id="58" name="Text 55"/>
           <p:cNvSpPr/>
           <p:nvPr/>
         </p:nvSpPr>
@@ -12184,7 +12773,7 @@
                 <a:ea typeface="Calibri" pitchFamily="34" charset="-122"/>
                 <a:cs typeface="Calibri" pitchFamily="34" charset="-120"/>
               </a:rPr>
-              <a:t>npm run validate  reproduces all 62 engine checks  ·  npm run screen  reproduces all 3,032 events  ·  npm run scaling  re-measures the ≈1.73 scaling exponent</a:t>
+              <a:t>npm run validate  reproduces all 62 engine checks  ·  npm run screen  reproduces all 3,032 events  ·  npm run scaling  re-measures the ≈1.73 exponent</a:t>
             </a:r>
             <a:endParaRPr lang="en-US" sz="950" dirty="0"/>
           </a:p>
@@ -12192,7 +12781,7 @@
       </p:sp>
       <p:sp>
         <p:nvSpPr>
-          <p:cNvPr id="58" name="Text 55"/>
+          <p:cNvPr id="59" name="Text 56"/>
           <p:cNvSpPr/>
           <p:nvPr/>
         </p:nvSpPr>
